--- a/apresentacao/Azul-SmartCargo-Apresentacao.pptx
+++ b/apresentacao/Azul-SmartCargo-Apresentacao.pptx
@@ -7,6 +7,15 @@
   <p:sldIdLst>
     <p:sldId id="256" r:id="rId7"/>
     <p:sldId id="257" r:id="rId9"/>
+    <p:sldId id="288" r:id="rId40"/>
+    <p:sldId id="289" r:id="rId41"/>
+    <p:sldId id="290" r:id="rId42"/>
+    <p:sldId id="291" r:id="rId43"/>
+    <p:sldId id="292" r:id="rId44"/>
+    <p:sldId id="293" r:id="rId45"/>
+    <p:sldId id="294" r:id="rId46"/>
+    <p:sldId id="295" r:id="rId47"/>
+    <p:sldId id="296" r:id="rId48"/>
     <p:sldId id="258" r:id="rId10"/>
     <p:sldId id="259" r:id="rId11"/>
     <p:sldId id="260" r:id="rId12"/>
@@ -533,7 +542,7 @@
           <a:lstStyle/>
           <a:p>
             <a:r>
-              <a:t>Apresentamos o Azul SmartCargo, proposta acadêmica para o Challenge FIAP e Azul Logística. O protótipo demonstra apoio à decisão com dados simulados. Vamos percorrer suas 28 telas e explicar a jornada operacional.</a:t>
+              <a:t>Apresentamos o Azul SmartCargo, proposta acadêmica do Challenge FIAP e Azul Logística. Primeiro explicamos o problema, o valor de negócio e como validá-lo. Depois percorremos as 28 telas com dados simulados. Os benefícios são hipóteses, não resultados medidos da operação real.</a:t>
             </a:r>
           </a:p>
         </p:txBody>
@@ -2308,6 +2317,496 @@
 </p:notes>
 </file>
 
+<file path=ppt/notesSlides/notesSlide33.xml><?xml version="1.0" encoding="utf-8"?>
+<p:notes xmlns:a="http://schemas.openxmlformats.org/drawingml/2006/main" xmlns:p="http://schemas.openxmlformats.org/presentationml/2006/main" xmlns:r="http://schemas.openxmlformats.org/officeDocument/2006/relationships">
+  <p:cSld>
+    <p:spTree>
+      <p:nvGrpSpPr>
+        <p:cNvPr id="1" name=""/>
+        <p:cNvGrpSpPr/>
+        <p:nvPr/>
+      </p:nvGrpSpPr>
+      <p:grpSpPr>
+        <a:xfrm>
+          <a:off x="0" y="0"/>
+          <a:ext cx="0" cy="0"/>
+          <a:chOff x="0" y="0"/>
+          <a:chExt cx="0" cy="0"/>
+        </a:xfrm>
+      </p:grpSpPr>
+      <p:sp>
+        <p:nvSpPr>
+          <p:cNvPr id="2" name="Slide Image Placeholder 1"/>
+          <p:cNvSpPr>
+            <a:spLocks noGrp="1"/>
+          </p:cNvSpPr>
+          <p:nvPr>
+            <p:ph type="sldImg" idx="2"/>
+          </p:nvPr>
+        </p:nvSpPr>
+        <p:spPr/>
+      </p:sp>
+      <p:sp>
+        <p:nvSpPr>
+          <p:cNvPr id="3" name="Notes Placeholder 2"/>
+          <p:cNvSpPr>
+            <a:spLocks noGrp="1"/>
+          </p:cNvSpPr>
+          <p:nvPr>
+            <p:ph type="body" idx="3" sz="quarter"/>
+          </p:nvPr>
+        </p:nvSpPr>
+        <p:spPr/>
+        <p:txBody>
+          <a:bodyPr/>
+          <a:lstStyle/>
+          <a:p>
+            <a:r>
+              <a:t>O briefing apresenta o desafio de reduzir atrasos e melhorar a eficiência sem ampliar a área física. Partimos da hipótese de que falta de visibilidade compartilhada e decisões desconectadas podem dificultar a priorização. Não realizamos entrevistas nem medimos a operação real da Azul. Estas causas e impactos devem ser investigados no diagnóstico com operadores e gestores.</a:t>
+            </a:r>
+          </a:p>
+        </p:txBody>
+      </p:sp>
+      <p:sp>
+        <p:nvSpPr>
+          <p:cNvPr id="4" name="Slide Number Placeholder 3"/>
+          <p:cNvSpPr>
+            <a:spLocks noGrp="1"/>
+          </p:cNvSpPr>
+          <p:nvPr>
+            <p:ph type="sldNum" idx="5" sz="quarter"/>
+          </p:nvPr>
+        </p:nvSpPr>
+        <p:spPr/>
+      </p:sp>
+    </p:spTree>
+  </p:cSld>
+  <p:clrMapOvr>
+    <a:masterClrMapping/>
+  </p:clrMapOvr>
+</p:notes>
+</file>
+
+<file path=ppt/notesSlides/notesSlide34.xml><?xml version="1.0" encoding="utf-8"?>
+<p:notes xmlns:a="http://schemas.openxmlformats.org/drawingml/2006/main" xmlns:p="http://schemas.openxmlformats.org/presentationml/2006/main" xmlns:r="http://schemas.openxmlformats.org/officeDocument/2006/relationships">
+  <p:cSld>
+    <p:spTree>
+      <p:nvGrpSpPr>
+        <p:cNvPr id="1" name=""/>
+        <p:cNvGrpSpPr/>
+        <p:nvPr/>
+      </p:nvGrpSpPr>
+      <p:grpSpPr>
+        <a:xfrm>
+          <a:off x="0" y="0"/>
+          <a:ext cx="0" cy="0"/>
+          <a:chOff x="0" y="0"/>
+          <a:chExt cx="0" cy="0"/>
+        </a:xfrm>
+      </p:grpSpPr>
+      <p:sp>
+        <p:nvSpPr>
+          <p:cNvPr id="2" name="Slide Image Placeholder 1"/>
+          <p:cNvSpPr>
+            <a:spLocks noGrp="1"/>
+          </p:cNvSpPr>
+          <p:nvPr>
+            <p:ph type="sldImg" idx="2"/>
+          </p:nvPr>
+        </p:nvSpPr>
+        <p:spPr/>
+      </p:sp>
+      <p:sp>
+        <p:nvSpPr>
+          <p:cNvPr id="3" name="Notes Placeholder 2"/>
+          <p:cNvSpPr>
+            <a:spLocks noGrp="1"/>
+          </p:cNvSpPr>
+          <p:nvPr>
+            <p:ph type="body" idx="3" sz="quarter"/>
+          </p:nvPr>
+        </p:nvSpPr>
+        <p:spPr/>
+        <p:txBody>
+          <a:bodyPr/>
+          <a:lstStyle/>
+          <a:p>
+            <a:r>
+              <a:t>Os perfis são propostos para orientar a descoberta, não personas validadas. O operador usa a ferramenta no dia a dia. O supervisor coordena exceções, capacidade e equipes. O gestor acompanha desempenho e pode patrocinar o piloto. Aprovação, orçamento e responsabilidades precisam ser confirmados com a organização.</a:t>
+            </a:r>
+          </a:p>
+        </p:txBody>
+      </p:sp>
+      <p:sp>
+        <p:nvSpPr>
+          <p:cNvPr id="4" name="Slide Number Placeholder 3"/>
+          <p:cNvSpPr>
+            <a:spLocks noGrp="1"/>
+          </p:cNvSpPr>
+          <p:nvPr>
+            <p:ph type="sldNum" idx="5" sz="quarter"/>
+          </p:nvPr>
+        </p:nvSpPr>
+        <p:spPr/>
+      </p:sp>
+    </p:spTree>
+  </p:cSld>
+  <p:clrMapOvr>
+    <a:masterClrMapping/>
+  </p:clrMapOvr>
+</p:notes>
+</file>
+
+<file path=ppt/notesSlides/notesSlide35.xml><?xml version="1.0" encoding="utf-8"?>
+<p:notes xmlns:a="http://schemas.openxmlformats.org/drawingml/2006/main" xmlns:p="http://schemas.openxmlformats.org/presentationml/2006/main" xmlns:r="http://schemas.openxmlformats.org/officeDocument/2006/relationships">
+  <p:cSld>
+    <p:spTree>
+      <p:nvGrpSpPr>
+        <p:cNvPr id="1" name=""/>
+        <p:cNvGrpSpPr/>
+        <p:nvPr/>
+      </p:nvGrpSpPr>
+      <p:grpSpPr>
+        <a:xfrm>
+          <a:off x="0" y="0"/>
+          <a:ext cx="0" cy="0"/>
+          <a:chOff x="0" y="0"/>
+          <a:chExt cx="0" cy="0"/>
+        </a:xfrm>
+      </p:grpSpPr>
+      <p:sp>
+        <p:nvSpPr>
+          <p:cNvPr id="2" name="Slide Image Placeholder 1"/>
+          <p:cNvSpPr>
+            <a:spLocks noGrp="1"/>
+          </p:cNvSpPr>
+          <p:nvPr>
+            <p:ph type="sldImg" idx="2"/>
+          </p:nvPr>
+        </p:nvSpPr>
+        <p:spPr/>
+      </p:sp>
+      <p:sp>
+        <p:nvSpPr>
+          <p:cNvPr id="3" name="Notes Placeholder 2"/>
+          <p:cNvSpPr>
+            <a:spLocks noGrp="1"/>
+          </p:cNvSpPr>
+          <p:nvPr>
+            <p:ph type="body" idx="3" sz="quarter"/>
+          </p:nvPr>
+        </p:nvSpPr>
+        <p:spPr/>
+        <p:txBody>
+          <a:bodyPr/>
+          <a:lstStyle/>
+          <a:p>
+            <a:r>
+              <a:t>O valor proposto é conectar prioridade, capacidade e execução. A classificação por margem é uma regra transparente, não um modelo de inteligência artificial. O operador continua responsável pelas decisões. O diferencial apresentado é a combinação das informações em uma mesma jornada, e não uma comparação comprovada com os sistemas atualmente utilizados pela Azul.</a:t>
+            </a:r>
+          </a:p>
+        </p:txBody>
+      </p:sp>
+      <p:sp>
+        <p:nvSpPr>
+          <p:cNvPr id="4" name="Slide Number Placeholder 3"/>
+          <p:cNvSpPr>
+            <a:spLocks noGrp="1"/>
+          </p:cNvSpPr>
+          <p:nvPr>
+            <p:ph type="sldNum" idx="5" sz="quarter"/>
+          </p:nvPr>
+        </p:nvSpPr>
+        <p:spPr/>
+      </p:sp>
+    </p:spTree>
+  </p:cSld>
+  <p:clrMapOvr>
+    <a:masterClrMapping/>
+  </p:clrMapOvr>
+</p:notes>
+</file>
+
+<file path=ppt/notesSlides/notesSlide36.xml><?xml version="1.0" encoding="utf-8"?>
+<p:notes xmlns:a="http://schemas.openxmlformats.org/drawingml/2006/main" xmlns:p="http://schemas.openxmlformats.org/presentationml/2006/main" xmlns:r="http://schemas.openxmlformats.org/officeDocument/2006/relationships">
+  <p:cSld>
+    <p:spTree>
+      <p:nvGrpSpPr>
+        <p:cNvPr id="1" name=""/>
+        <p:cNvGrpSpPr/>
+        <p:nvPr/>
+      </p:nvGrpSpPr>
+      <p:grpSpPr>
+        <a:xfrm>
+          <a:off x="0" y="0"/>
+          <a:ext cx="0" cy="0"/>
+          <a:chOff x="0" y="0"/>
+          <a:chExt cx="0" cy="0"/>
+        </a:xfrm>
+      </p:grpSpPr>
+      <p:sp>
+        <p:nvSpPr>
+          <p:cNvPr id="2" name="Slide Image Placeholder 1"/>
+          <p:cNvSpPr>
+            <a:spLocks noGrp="1"/>
+          </p:cNvSpPr>
+          <p:nvPr>
+            <p:ph type="sldImg" idx="2"/>
+          </p:nvPr>
+        </p:nvSpPr>
+        <p:spPr/>
+      </p:sp>
+      <p:sp>
+        <p:nvSpPr>
+          <p:cNvPr id="3" name="Notes Placeholder 2"/>
+          <p:cNvSpPr>
+            <a:spLocks noGrp="1"/>
+          </p:cNvSpPr>
+          <p:nvPr>
+            <p:ph type="body" idx="3" sz="quarter"/>
+          </p:nvPr>
+        </p:nvSpPr>
+        <p:spPr/>
+        <p:txBody>
+          <a:bodyPr/>
+          <a:lstStyle/>
+          <a:p>
+            <a:r>
+              <a:t>A coluna de risco representa uma situação hipotética de baixa visibilidade, não uma afirmação sobre o modo como a Azul trabalha. O piloto deve verificar se a equipe hoje enfrenta essas dificuldades e se a proposta melhora a decisão. O valor só se confirma quando o uso real muda os indicadores sem criar novos gargalos.</a:t>
+            </a:r>
+          </a:p>
+        </p:txBody>
+      </p:sp>
+      <p:sp>
+        <p:nvSpPr>
+          <p:cNvPr id="4" name="Slide Number Placeholder 3"/>
+          <p:cNvSpPr>
+            <a:spLocks noGrp="1"/>
+          </p:cNvSpPr>
+          <p:nvPr>
+            <p:ph type="sldNum" idx="5" sz="quarter"/>
+          </p:nvPr>
+        </p:nvSpPr>
+        <p:spPr/>
+      </p:sp>
+    </p:spTree>
+  </p:cSld>
+  <p:clrMapOvr>
+    <a:masterClrMapping/>
+  </p:clrMapOvr>
+</p:notes>
+</file>
+
+<file path=ppt/notesSlides/notesSlide37.xml><?xml version="1.0" encoding="utf-8"?>
+<p:notes xmlns:a="http://schemas.openxmlformats.org/drawingml/2006/main" xmlns:p="http://schemas.openxmlformats.org/presentationml/2006/main" xmlns:r="http://schemas.openxmlformats.org/officeDocument/2006/relationships">
+  <p:cSld>
+    <p:spTree>
+      <p:nvGrpSpPr>
+        <p:cNvPr id="1" name=""/>
+        <p:cNvGrpSpPr/>
+        <p:nvPr/>
+      </p:nvGrpSpPr>
+      <p:grpSpPr>
+        <a:xfrm>
+          <a:off x="0" y="0"/>
+          <a:ext cx="0" cy="0"/>
+          <a:chOff x="0" y="0"/>
+          <a:chExt cx="0" cy="0"/>
+        </a:xfrm>
+      </p:grpSpPr>
+      <p:sp>
+        <p:nvSpPr>
+          <p:cNvPr id="2" name="Slide Image Placeholder 1"/>
+          <p:cNvSpPr>
+            <a:spLocks noGrp="1"/>
+          </p:cNvSpPr>
+          <p:nvPr>
+            <p:ph type="sldImg" idx="2"/>
+          </p:nvPr>
+        </p:nvSpPr>
+        <p:spPr/>
+      </p:sp>
+      <p:sp>
+        <p:nvSpPr>
+          <p:cNvPr id="3" name="Notes Placeholder 2"/>
+          <p:cNvSpPr>
+            <a:spLocks noGrp="1"/>
+          </p:cNvSpPr>
+          <p:nvPr>
+            <p:ph type="body" idx="3" sz="quarter"/>
+          </p:nvPr>
+        </p:nvSpPr>
+        <p:spPr/>
+        <p:txBody>
+          <a:bodyPr/>
+          <a:lstStyle/>
+          <a:p>
+            <a:r>
+              <a:t>Os benefícios são hipóteses. A fila pode reduzir espera das urgentes; o bloqueio de capacidade pode reduzir alocações inadequadas; o histórico pode reduzir tempo gasto procurando informações. Nenhum percentual de ganho foi medido. Mesmo uma carga concluída pode terminar em atraso, como ocorre com a SC-1042.</a:t>
+            </a:r>
+          </a:p>
+        </p:txBody>
+      </p:sp>
+      <p:sp>
+        <p:nvSpPr>
+          <p:cNvPr id="4" name="Slide Number Placeholder 3"/>
+          <p:cNvSpPr>
+            <a:spLocks noGrp="1"/>
+          </p:cNvSpPr>
+          <p:nvPr>
+            <p:ph type="sldNum" idx="5" sz="quarter"/>
+          </p:nvPr>
+        </p:nvSpPr>
+        <p:spPr/>
+      </p:sp>
+    </p:spTree>
+  </p:cSld>
+  <p:clrMapOvr>
+    <a:masterClrMapping/>
+  </p:clrMapOvr>
+</p:notes>
+</file>
+
+<file path=ppt/notesSlides/notesSlide38.xml><?xml version="1.0" encoding="utf-8"?>
+<p:notes xmlns:a="http://schemas.openxmlformats.org/drawingml/2006/main" xmlns:p="http://schemas.openxmlformats.org/presentationml/2006/main" xmlns:r="http://schemas.openxmlformats.org/officeDocument/2006/relationships">
+  <p:cSld>
+    <p:spTree>
+      <p:nvGrpSpPr>
+        <p:cNvPr id="1" name=""/>
+        <p:cNvGrpSpPr/>
+        <p:nvPr/>
+      </p:nvGrpSpPr>
+      <p:grpSpPr>
+        <a:xfrm>
+          <a:off x="0" y="0"/>
+          <a:ext cx="0" cy="0"/>
+          <a:chOff x="0" y="0"/>
+          <a:chExt cx="0" cy="0"/>
+        </a:xfrm>
+      </p:grpSpPr>
+      <p:sp>
+        <p:nvSpPr>
+          <p:cNvPr id="2" name="Slide Image Placeholder 1"/>
+          <p:cNvSpPr>
+            <a:spLocks noGrp="1"/>
+          </p:cNvSpPr>
+          <p:nvPr>
+            <p:ph type="sldImg" idx="2"/>
+          </p:nvPr>
+        </p:nvSpPr>
+        <p:spPr/>
+      </p:sp>
+      <p:sp>
+        <p:nvSpPr>
+          <p:cNvPr id="3" name="Notes Placeholder 2"/>
+          <p:cNvSpPr>
+            <a:spLocks noGrp="1"/>
+          </p:cNvSpPr>
+          <p:nvPr>
+            <p:ph type="body" idx="3" sz="quarter"/>
+          </p:nvPr>
+        </p:nvSpPr>
+        <p:spPr/>
+        <p:txBody>
+          <a:bodyPr/>
+          <a:lstStyle/>
+          <a:p>
+            <a:r>
+              <a:t>Antes do piloto, definir os eventos e timestamps: recebida, início de separação, consolidada e pronta. Pontualidade compara o instante pronta com o prazo acordado. O tempo médio usa a mesma janela e as mesmas regras para todos os registros. Ocupação deve ser acompanhada ao longo do turno, e não só em uma captura de tela. Metas numéricas serão acordadas após medir a linha de base. Os indicadores do protótipo são fictícios e não servem como baseline.</a:t>
+            </a:r>
+          </a:p>
+        </p:txBody>
+      </p:sp>
+      <p:sp>
+        <p:nvSpPr>
+          <p:cNvPr id="4" name="Slide Number Placeholder 3"/>
+          <p:cNvSpPr>
+            <a:spLocks noGrp="1"/>
+          </p:cNvSpPr>
+          <p:nvPr>
+            <p:ph type="sldNum" idx="5" sz="quarter"/>
+          </p:nvPr>
+        </p:nvSpPr>
+        <p:spPr/>
+      </p:sp>
+    </p:spTree>
+  </p:cSld>
+  <p:clrMapOvr>
+    <a:masterClrMapping/>
+  </p:clrMapOvr>
+</p:notes>
+</file>
+
+<file path=ppt/notesSlides/notesSlide39.xml><?xml version="1.0" encoding="utf-8"?>
+<p:notes xmlns:a="http://schemas.openxmlformats.org/drawingml/2006/main" xmlns:p="http://schemas.openxmlformats.org/presentationml/2006/main" xmlns:r="http://schemas.openxmlformats.org/officeDocument/2006/relationships">
+  <p:cSld>
+    <p:spTree>
+      <p:nvGrpSpPr>
+        <p:cNvPr id="1" name=""/>
+        <p:cNvGrpSpPr/>
+        <p:nvPr/>
+      </p:nvGrpSpPr>
+      <p:grpSpPr>
+        <a:xfrm>
+          <a:off x="0" y="0"/>
+          <a:ext cx="0" cy="0"/>
+          <a:chOff x="0" y="0"/>
+          <a:chExt cx="0" cy="0"/>
+        </a:xfrm>
+      </p:grpSpPr>
+      <p:sp>
+        <p:nvSpPr>
+          <p:cNvPr id="2" name="Slide Image Placeholder 1"/>
+          <p:cNvSpPr>
+            <a:spLocks noGrp="1"/>
+          </p:cNvSpPr>
+          <p:nvPr>
+            <p:ph type="sldImg" idx="2"/>
+          </p:nvPr>
+        </p:nvSpPr>
+        <p:spPr/>
+      </p:sp>
+      <p:sp>
+        <p:nvSpPr>
+          <p:cNvPr id="3" name="Notes Placeholder 2"/>
+          <p:cNvSpPr>
+            <a:spLocks noGrp="1"/>
+          </p:cNvSpPr>
+          <p:nvPr>
+            <p:ph type="body" idx="3" sz="quarter"/>
+          </p:nvPr>
+        </p:nvSpPr>
+        <p:spPr/>
+        <p:txBody>
+          <a:bodyPr/>
+          <a:lstStyle/>
+          <a:p>
+            <a:r>
+              <a:t>Não há informação validada de orçamento, custos ou volume financeiro. O modelo é de uso interno: não presumimos receita de assinatura. Estimar horas efetivamente economizadas, verificar se são convertidas em capacidade ou redução de custo, e evitar contar o mesmo ganho duas vezes. ROI é benefícios menos custos dividido pelos custos no mesmo período. Se houver ganhos anuais e investimento inicial, o payback depende do fluxo líquido; só calcular após validar valores e recorrência.</a:t>
+            </a:r>
+          </a:p>
+        </p:txBody>
+      </p:sp>
+      <p:sp>
+        <p:nvSpPr>
+          <p:cNvPr id="4" name="Slide Number Placeholder 3"/>
+          <p:cNvSpPr>
+            <a:spLocks noGrp="1"/>
+          </p:cNvSpPr>
+          <p:nvPr>
+            <p:ph type="sldNum" idx="5" sz="quarter"/>
+          </p:nvPr>
+        </p:nvSpPr>
+        <p:spPr/>
+      </p:sp>
+    </p:spTree>
+  </p:cSld>
+  <p:clrMapOvr>
+    <a:masterClrMapping/>
+  </p:clrMapOvr>
+</p:notes>
+</file>
+
 <file path=ppt/notesSlides/notesSlide4.xml><?xml version="1.0" encoding="utf-8"?>
 <p:notes xmlns:a="http://schemas.openxmlformats.org/drawingml/2006/main" xmlns:p="http://schemas.openxmlformats.org/presentationml/2006/main" xmlns:r="http://schemas.openxmlformats.org/officeDocument/2006/relationships">
   <p:cSld>
@@ -2354,6 +2853,146 @@
           <a:p>
             <a:r>
               <a:t>O dashboard oferece uma visão rápida do terminal. As duas cargas prioritárias correspondem a uma crítica e uma alta. A carga pronta não entra nas três ativas. Os gráficos mostram movimentação e distribuição de prioridades; a tabela orienta o operador para a SC-1042. O percentual de 92% representa a base histórica simulada, não apenas as quatro cargas da lista.</a:t>
+            </a:r>
+          </a:p>
+        </p:txBody>
+      </p:sp>
+      <p:sp>
+        <p:nvSpPr>
+          <p:cNvPr id="4" name="Slide Number Placeholder 3"/>
+          <p:cNvSpPr>
+            <a:spLocks noGrp="1"/>
+          </p:cNvSpPr>
+          <p:nvPr>
+            <p:ph type="sldNum" idx="5" sz="quarter"/>
+          </p:nvPr>
+        </p:nvSpPr>
+        <p:spPr/>
+      </p:sp>
+    </p:spTree>
+  </p:cSld>
+  <p:clrMapOvr>
+    <a:masterClrMapping/>
+  </p:clrMapOvr>
+</p:notes>
+</file>
+
+<file path=ppt/notesSlides/notesSlide40.xml><?xml version="1.0" encoding="utf-8"?>
+<p:notes xmlns:a="http://schemas.openxmlformats.org/drawingml/2006/main" xmlns:p="http://schemas.openxmlformats.org/presentationml/2006/main" xmlns:r="http://schemas.openxmlformats.org/officeDocument/2006/relationships">
+  <p:cSld>
+    <p:spTree>
+      <p:nvGrpSpPr>
+        <p:cNvPr id="1" name=""/>
+        <p:cNvGrpSpPr/>
+        <p:nvPr/>
+      </p:nvGrpSpPr>
+      <p:grpSpPr>
+        <a:xfrm>
+          <a:off x="0" y="0"/>
+          <a:ext cx="0" cy="0"/>
+          <a:chOff x="0" y="0"/>
+          <a:chExt cx="0" cy="0"/>
+        </a:xfrm>
+      </p:grpSpPr>
+      <p:sp>
+        <p:nvSpPr>
+          <p:cNvPr id="2" name="Slide Image Placeholder 1"/>
+          <p:cNvSpPr>
+            <a:spLocks noGrp="1"/>
+          </p:cNvSpPr>
+          <p:nvPr>
+            <p:ph type="sldImg" idx="2"/>
+          </p:nvPr>
+        </p:nvSpPr>
+        <p:spPr/>
+      </p:sp>
+      <p:sp>
+        <p:nvSpPr>
+          <p:cNvPr id="3" name="Notes Placeholder 2"/>
+          <p:cNvSpPr>
+            <a:spLocks noGrp="1"/>
+          </p:cNvSpPr>
+          <p:nvPr>
+            <p:ph type="body" idx="3" sz="quarter"/>
+          </p:nvPr>
+        </p:nvSpPr>
+        <p:spPr/>
+        <p:txBody>
+          <a:bodyPr/>
+          <a:lstStyle/>
+          <a:p>
+            <a:r>
+              <a:t>Primeiro observar o processo e entrevistar operadores e gestores, definindo indicadores e linha de base. Depois testar usabilidade com cenários de carga crítica, capacidade excedida e sequência inválida. O piloto operacional deve ter um recorte de área ou turno, dados confiáveis e comparação controlada por perfil de carga. Sem melhora sustentada e sem aceitação dos operadores, revisar antes de expandir. Critérios e metas precisam ser acordados, não inventados nesta apresentação.</a:t>
+            </a:r>
+          </a:p>
+        </p:txBody>
+      </p:sp>
+      <p:sp>
+        <p:nvSpPr>
+          <p:cNvPr id="4" name="Slide Number Placeholder 3"/>
+          <p:cNvSpPr>
+            <a:spLocks noGrp="1"/>
+          </p:cNvSpPr>
+          <p:nvPr>
+            <p:ph type="sldNum" idx="5" sz="quarter"/>
+          </p:nvPr>
+        </p:nvSpPr>
+        <p:spPr/>
+      </p:sp>
+    </p:spTree>
+  </p:cSld>
+  <p:clrMapOvr>
+    <a:masterClrMapping/>
+  </p:clrMapOvr>
+</p:notes>
+</file>
+
+<file path=ppt/notesSlides/notesSlide41.xml><?xml version="1.0" encoding="utf-8"?>
+<p:notes xmlns:a="http://schemas.openxmlformats.org/drawingml/2006/main" xmlns:p="http://schemas.openxmlformats.org/presentationml/2006/main" xmlns:r="http://schemas.openxmlformats.org/officeDocument/2006/relationships">
+  <p:cSld>
+    <p:spTree>
+      <p:nvGrpSpPr>
+        <p:cNvPr id="1" name=""/>
+        <p:cNvGrpSpPr/>
+        <p:nvPr/>
+      </p:nvGrpSpPr>
+      <p:grpSpPr>
+        <a:xfrm>
+          <a:off x="0" y="0"/>
+          <a:ext cx="0" cy="0"/>
+          <a:chOff x="0" y="0"/>
+          <a:chExt cx="0" cy="0"/>
+        </a:xfrm>
+      </p:grpSpPr>
+      <p:sp>
+        <p:nvSpPr>
+          <p:cNvPr id="2" name="Slide Image Placeholder 1"/>
+          <p:cNvSpPr>
+            <a:spLocks noGrp="1"/>
+          </p:cNvSpPr>
+          <p:nvPr>
+            <p:ph type="sldImg" idx="2"/>
+          </p:nvPr>
+        </p:nvSpPr>
+        <p:spPr/>
+      </p:sp>
+      <p:sp>
+        <p:nvSpPr>
+          <p:cNvPr id="3" name="Notes Placeholder 2"/>
+          <p:cNvSpPr>
+            <a:spLocks noGrp="1"/>
+          </p:cNvSpPr>
+          <p:nvPr>
+            <p:ph type="body" idx="3" sz="quarter"/>
+          </p:nvPr>
+        </p:nvSpPr>
+        <p:spPr/>
+        <p:txBody>
+          <a:bodyPr/>
+          <a:lstStyle/>
+          <a:p>
+            <a:r>
+              <a:t>O MVP inclui cadastro, consulta, fila por margem, capacidade e acompanhamento. A implementação pode começar com HTML, CSS, JavaScript e Tailwind e dados simulados; persistência, perfis, auditoria e integrações exigem definição adicional antes de uso operacional. Capacidade e estimativas precisam ser confiáveis. Não estamos prometendo previsão com IA, otimização automática de toda a operação ou ampliação física.</a:t>
             </a:r>
           </a:p>
         </p:txBody>
@@ -5911,7 +6550,7 @@
               </a:defRPr>
             </a:pPr>
             <a:r>
-              <a:t>01 / 32</a:t>
+              <a:t>01 / 41</a:t>
             </a:r>
           </a:p>
         </p:txBody>
@@ -5925,7 +6564,7 @@
         <p:spPr>
           <a:xfrm>
             <a:off x="502920" y="8156448"/>
-            <a:ext cx="425767" cy="41148"/>
+            <a:ext cx="332306" cy="41148"/>
           </a:xfrm>
           <a:prstGeom prst="rect">
             <a:avLst/>
@@ -6869,7 +7508,7 @@
               </a:defRPr>
             </a:pPr>
             <a:r>
-              <a:t>10 / 32</a:t>
+              <a:t>19 / 41</a:t>
             </a:r>
           </a:p>
         </p:txBody>
@@ -6883,7 +7522,7 @@
         <p:spPr>
           <a:xfrm>
             <a:off x="502920" y="8156448"/>
-            <a:ext cx="4257675" cy="41148"/>
+            <a:ext cx="6313820" cy="41148"/>
           </a:xfrm>
           <a:prstGeom prst="rect">
             <a:avLst/>
@@ -8409,7 +9048,7 @@
               </a:defRPr>
             </a:pPr>
             <a:r>
-              <a:t>11 / 32</a:t>
+              <a:t>20 / 41</a:t>
             </a:r>
           </a:p>
         </p:txBody>
@@ -8423,7 +9062,7 @@
         <p:spPr>
           <a:xfrm>
             <a:off x="502920" y="8156448"/>
-            <a:ext cx="4683442" cy="41148"/>
+            <a:ext cx="6646126" cy="41148"/>
           </a:xfrm>
           <a:prstGeom prst="rect">
             <a:avLst/>
@@ -9949,7 +10588,7 @@
               </a:defRPr>
             </a:pPr>
             <a:r>
-              <a:t>12 / 32</a:t>
+              <a:t>21 / 41</a:t>
             </a:r>
           </a:p>
         </p:txBody>
@@ -9963,7 +10602,7 @@
         <p:spPr>
           <a:xfrm>
             <a:off x="502920" y="8156448"/>
-            <a:ext cx="5109210" cy="41148"/>
+            <a:ext cx="6978433" cy="41148"/>
           </a:xfrm>
           <a:prstGeom prst="rect">
             <a:avLst/>
@@ -11489,7 +12128,7 @@
               </a:defRPr>
             </a:pPr>
             <a:r>
-              <a:t>13 / 32</a:t>
+              <a:t>22 / 41</a:t>
             </a:r>
           </a:p>
         </p:txBody>
@@ -11503,7 +12142,7 @@
         <p:spPr>
           <a:xfrm>
             <a:off x="502920" y="8156448"/>
-            <a:ext cx="5534977" cy="41148"/>
+            <a:ext cx="7310739" cy="41148"/>
           </a:xfrm>
           <a:prstGeom prst="rect">
             <a:avLst/>
@@ -13029,7 +13668,7 @@
               </a:defRPr>
             </a:pPr>
             <a:r>
-              <a:t>14 / 32</a:t>
+              <a:t>23 / 41</a:t>
             </a:r>
           </a:p>
         </p:txBody>
@@ -13043,7 +13682,7 @@
         <p:spPr>
           <a:xfrm>
             <a:off x="502920" y="8156448"/>
-            <a:ext cx="5960745" cy="41148"/>
+            <a:ext cx="7643045" cy="41148"/>
           </a:xfrm>
           <a:prstGeom prst="rect">
             <a:avLst/>
@@ -14569,7 +15208,7 @@
               </a:defRPr>
             </a:pPr>
             <a:r>
-              <a:t>15 / 32</a:t>
+              <a:t>24 / 41</a:t>
             </a:r>
           </a:p>
         </p:txBody>
@@ -14583,7 +15222,7 @@
         <p:spPr>
           <a:xfrm>
             <a:off x="502920" y="8156448"/>
-            <a:ext cx="6386512" cy="41148"/>
+            <a:ext cx="7975352" cy="41148"/>
           </a:xfrm>
           <a:prstGeom prst="rect">
             <a:avLst/>
@@ -16109,7 +16748,7 @@
               </a:defRPr>
             </a:pPr>
             <a:r>
-              <a:t>16 / 32</a:t>
+              <a:t>25 / 41</a:t>
             </a:r>
           </a:p>
         </p:txBody>
@@ -16123,7 +16762,7 @@
         <p:spPr>
           <a:xfrm>
             <a:off x="502920" y="8156448"/>
-            <a:ext cx="6812280" cy="41148"/>
+            <a:ext cx="8307658" cy="41148"/>
           </a:xfrm>
           <a:prstGeom prst="rect">
             <a:avLst/>
@@ -17649,7 +18288,7 @@
               </a:defRPr>
             </a:pPr>
             <a:r>
-              <a:t>17 / 32</a:t>
+              <a:t>26 / 41</a:t>
             </a:r>
           </a:p>
         </p:txBody>
@@ -17663,7 +18302,7 @@
         <p:spPr>
           <a:xfrm>
             <a:off x="502920" y="8156448"/>
-            <a:ext cx="7238047" cy="41148"/>
+            <a:ext cx="8639964" cy="41148"/>
           </a:xfrm>
           <a:prstGeom prst="rect">
             <a:avLst/>
@@ -19189,7 +19828,7 @@
               </a:defRPr>
             </a:pPr>
             <a:r>
-              <a:t>18 / 32</a:t>
+              <a:t>27 / 41</a:t>
             </a:r>
           </a:p>
         </p:txBody>
@@ -19203,7 +19842,7 @@
         <p:spPr>
           <a:xfrm>
             <a:off x="502920" y="8156448"/>
-            <a:ext cx="7663815" cy="41148"/>
+            <a:ext cx="8972271" cy="41148"/>
           </a:xfrm>
           <a:prstGeom prst="rect">
             <a:avLst/>
@@ -20729,7 +21368,7 @@
               </a:defRPr>
             </a:pPr>
             <a:r>
-              <a:t>19 / 32</a:t>
+              <a:t>28 / 41</a:t>
             </a:r>
           </a:p>
         </p:txBody>
@@ -20743,7 +21382,7 @@
         <p:spPr>
           <a:xfrm>
             <a:off x="502920" y="8156448"/>
-            <a:ext cx="8089582" cy="41148"/>
+            <a:ext cx="9304577" cy="41148"/>
           </a:xfrm>
           <a:prstGeom prst="rect">
             <a:avLst/>
@@ -22269,7 +22908,7 @@
               </a:defRPr>
             </a:pPr>
             <a:r>
-              <a:t>02 / 32</a:t>
+              <a:t>02 / 41</a:t>
             </a:r>
           </a:p>
         </p:txBody>
@@ -22283,7 +22922,7 @@
         <p:spPr>
           <a:xfrm>
             <a:off x="502920" y="8156448"/>
-            <a:ext cx="851535" cy="41148"/>
+            <a:ext cx="664612" cy="41148"/>
           </a:xfrm>
           <a:prstGeom prst="rect">
             <a:avLst/>
@@ -23101,7 +23740,7 @@
               </a:defRPr>
             </a:pPr>
             <a:r>
-              <a:t>20 / 32</a:t>
+              <a:t>29 / 41</a:t>
             </a:r>
           </a:p>
         </p:txBody>
@@ -23115,7 +23754,7 @@
         <p:spPr>
           <a:xfrm>
             <a:off x="502920" y="8156448"/>
-            <a:ext cx="8515350" cy="41148"/>
+            <a:ext cx="9636883" cy="41148"/>
           </a:xfrm>
           <a:prstGeom prst="rect">
             <a:avLst/>
@@ -24641,7 +25280,7 @@
               </a:defRPr>
             </a:pPr>
             <a:r>
-              <a:t>21 / 32</a:t>
+              <a:t>30 / 41</a:t>
             </a:r>
           </a:p>
         </p:txBody>
@@ -24655,7 +25294,7 @@
         <p:spPr>
           <a:xfrm>
             <a:off x="502920" y="8156448"/>
-            <a:ext cx="8941117" cy="41148"/>
+            <a:ext cx="9969190" cy="41148"/>
           </a:xfrm>
           <a:prstGeom prst="rect">
             <a:avLst/>
@@ -26181,7 +26820,7 @@
               </a:defRPr>
             </a:pPr>
             <a:r>
-              <a:t>22 / 32</a:t>
+              <a:t>31 / 41</a:t>
             </a:r>
           </a:p>
         </p:txBody>
@@ -26195,7 +26834,7 @@
         <p:spPr>
           <a:xfrm>
             <a:off x="502920" y="8156448"/>
-            <a:ext cx="9366885" cy="41148"/>
+            <a:ext cx="10301496" cy="41148"/>
           </a:xfrm>
           <a:prstGeom prst="rect">
             <a:avLst/>
@@ -27721,7 +28360,7 @@
               </a:defRPr>
             </a:pPr>
             <a:r>
-              <a:t>23 / 32</a:t>
+              <a:t>32 / 41</a:t>
             </a:r>
           </a:p>
         </p:txBody>
@@ -27735,7 +28374,7 @@
         <p:spPr>
           <a:xfrm>
             <a:off x="502920" y="8156448"/>
-            <a:ext cx="9792652" cy="41148"/>
+            <a:ext cx="10633802" cy="41148"/>
           </a:xfrm>
           <a:prstGeom prst="rect">
             <a:avLst/>
@@ -29261,7 +29900,7 @@
               </a:defRPr>
             </a:pPr>
             <a:r>
-              <a:t>24 / 32</a:t>
+              <a:t>33 / 41</a:t>
             </a:r>
           </a:p>
         </p:txBody>
@@ -29275,7 +29914,7 @@
         <p:spPr>
           <a:xfrm>
             <a:off x="502920" y="8156448"/>
-            <a:ext cx="10218420" cy="41148"/>
+            <a:ext cx="10966109" cy="41148"/>
           </a:xfrm>
           <a:prstGeom prst="rect">
             <a:avLst/>
@@ -30801,7 +31440,7 @@
               </a:defRPr>
             </a:pPr>
             <a:r>
-              <a:t>25 / 32</a:t>
+              <a:t>34 / 41</a:t>
             </a:r>
           </a:p>
         </p:txBody>
@@ -30815,7 +31454,7 @@
         <p:spPr>
           <a:xfrm>
             <a:off x="502920" y="8156448"/>
-            <a:ext cx="10644187" cy="41148"/>
+            <a:ext cx="11298415" cy="41148"/>
           </a:xfrm>
           <a:prstGeom prst="rect">
             <a:avLst/>
@@ -32341,7 +32980,7 @@
               </a:defRPr>
             </a:pPr>
             <a:r>
-              <a:t>26 / 32</a:t>
+              <a:t>35 / 41</a:t>
             </a:r>
           </a:p>
         </p:txBody>
@@ -32355,7 +32994,7 @@
         <p:spPr>
           <a:xfrm>
             <a:off x="502920" y="8156448"/>
-            <a:ext cx="11069955" cy="41148"/>
+            <a:ext cx="11630721" cy="41148"/>
           </a:xfrm>
           <a:prstGeom prst="rect">
             <a:avLst/>
@@ -33881,7 +34520,7 @@
               </a:defRPr>
             </a:pPr>
             <a:r>
-              <a:t>27 / 32</a:t>
+              <a:t>36 / 41</a:t>
             </a:r>
           </a:p>
         </p:txBody>
@@ -33895,7 +34534,7 @@
         <p:spPr>
           <a:xfrm>
             <a:off x="502920" y="8156448"/>
-            <a:ext cx="11495722" cy="41148"/>
+            <a:ext cx="11963028" cy="41148"/>
           </a:xfrm>
           <a:prstGeom prst="rect">
             <a:avLst/>
@@ -35421,7 +36060,7 @@
               </a:defRPr>
             </a:pPr>
             <a:r>
-              <a:t>28 / 32</a:t>
+              <a:t>37 / 41</a:t>
             </a:r>
           </a:p>
         </p:txBody>
@@ -35435,7 +36074,7 @@
         <p:spPr>
           <a:xfrm>
             <a:off x="502920" y="8156448"/>
-            <a:ext cx="11921490" cy="41148"/>
+            <a:ext cx="12295334" cy="41148"/>
           </a:xfrm>
           <a:prstGeom prst="rect">
             <a:avLst/>
@@ -36961,7 +37600,7 @@
               </a:defRPr>
             </a:pPr>
             <a:r>
-              <a:t>29 / 32</a:t>
+              <a:t>38 / 41</a:t>
             </a:r>
           </a:p>
         </p:txBody>
@@ -36975,7 +37614,7 @@
         <p:spPr>
           <a:xfrm>
             <a:off x="502920" y="8156448"/>
-            <a:ext cx="12347257" cy="41148"/>
+            <a:ext cx="12627640" cy="41148"/>
           </a:xfrm>
           <a:prstGeom prst="rect">
             <a:avLst/>
@@ -38501,7 +39140,7 @@
               </a:defRPr>
             </a:pPr>
             <a:r>
-              <a:t>03 / 32</a:t>
+              <a:t>12 / 41</a:t>
             </a:r>
           </a:p>
         </p:txBody>
@@ -38515,7 +39154,7 @@
         <p:spPr>
           <a:xfrm>
             <a:off x="502920" y="8156448"/>
-            <a:ext cx="1277302" cy="41148"/>
+            <a:ext cx="3987676" cy="41148"/>
           </a:xfrm>
           <a:prstGeom prst="rect">
             <a:avLst/>
@@ -40041,7 +40680,7 @@
               </a:defRPr>
             </a:pPr>
             <a:r>
-              <a:t>30 / 32</a:t>
+              <a:t>39 / 41</a:t>
             </a:r>
           </a:p>
         </p:txBody>
@@ -40055,7 +40694,7 @@
         <p:spPr>
           <a:xfrm>
             <a:off x="502920" y="8156448"/>
-            <a:ext cx="12773025" cy="41148"/>
+            <a:ext cx="12959947" cy="41148"/>
           </a:xfrm>
           <a:prstGeom prst="rect">
             <a:avLst/>
@@ -41581,7 +42220,7 @@
               </a:defRPr>
             </a:pPr>
             <a:r>
-              <a:t>31 / 32</a:t>
+              <a:t>40 / 41</a:t>
             </a:r>
           </a:p>
         </p:txBody>
@@ -41595,7 +42234,7 @@
         <p:spPr>
           <a:xfrm>
             <a:off x="502920" y="8156448"/>
-            <a:ext cx="13198792" cy="41148"/>
+            <a:ext cx="13292253" cy="41148"/>
           </a:xfrm>
           <a:prstGeom prst="rect">
             <a:avLst/>
@@ -42817,7 +43456,7 @@
               </a:defRPr>
             </a:pPr>
             <a:r>
-              <a:t>32 / 32</a:t>
+              <a:t>41 / 41</a:t>
             </a:r>
           </a:p>
         </p:txBody>
@@ -42831,7 +43470,7 @@
         <p:spPr>
           <a:xfrm>
             <a:off x="502920" y="8156448"/>
-            <a:ext cx="13624560" cy="41148"/>
+            <a:ext cx="13624559" cy="41148"/>
           </a:xfrm>
           <a:prstGeom prst="rect">
             <a:avLst/>
@@ -43364,6 +44003,5767 @@
             <a:r>
               <a:t>AZUL SMARTCARGO  /  CHALLENGE FIAP</a:t>
             </a:r>
+          </a:p>
+        </p:txBody>
+      </p:sp>
+    </p:spTree>
+  </p:cSld>
+  <p:clrMapOvr>
+    <a:masterClrMapping/>
+  </p:clrMapOvr>
+</p:sld>
+</file>
+
+<file path=ppt/slides/slide33.xml><?xml version="1.0" encoding="utf-8"?>
+<p:sld xmlns:a="http://schemas.openxmlformats.org/drawingml/2006/main" xmlns:p="http://schemas.openxmlformats.org/presentationml/2006/main" xmlns:r="http://schemas.openxmlformats.org/officeDocument/2006/relationships">
+  <p:cSld>
+    <p:bg>
+      <p:bgPr>
+        <a:solidFill>
+          <a:srgbClr val="071E35"/>
+        </a:solidFill>
+        <a:effectLst/>
+      </p:bgPr>
+    </p:bg>
+    <p:spTree>
+      <p:nvGrpSpPr>
+        <p:cNvPr id="1" name=""/>
+        <p:cNvGrpSpPr/>
+        <p:nvPr/>
+      </p:nvGrpSpPr>
+      <p:grpSpPr/>
+      <p:sp>
+        <p:nvSpPr>
+          <p:cNvPr id="2" name="TextBox 1"/>
+          <p:cNvSpPr txBox="1"/>
+          <p:nvPr/>
+        </p:nvSpPr>
+        <p:spPr>
+          <a:xfrm>
+            <a:off x="502920" y="256032"/>
+            <a:ext cx="4572000" cy="274320"/>
+          </a:xfrm>
+          <a:prstGeom prst="rect">
+            <a:avLst/>
+          </a:prstGeom>
+          <a:noFill/>
+        </p:spPr>
+        <p:txBody>
+          <a:bodyPr wrap="square" lIns="0" rIns="0" tIns="0" bIns="0">
+            <a:spAutoFit/>
+          </a:bodyPr>
+          <a:lstStyle/>
+          <a:p>
+            <a:pPr>
+              <a:spcAft>
+                <a:spcPts val="1000"/>
+              </a:spcAft>
+              <a:defRPr sz="1300" b="1">
+                <a:solidFill>
+                  <a:srgbClr val="43CEEF"/>
+                </a:solidFill>
+                <a:latin typeface="Aptos"/>
+              </a:defRPr>
+            </a:pPr>
+            <a:r>
+              <a:t>AZUL / SMARTCARGO</a:t>
+            </a:r>
+          </a:p>
+        </p:txBody>
+      </p:sp>
+      <p:sp>
+        <p:nvSpPr>
+          <p:cNvPr id="3" name="TextBox 2"/>
+          <p:cNvSpPr txBox="1"/>
+          <p:nvPr/>
+        </p:nvSpPr>
+        <p:spPr>
+          <a:xfrm>
+            <a:off x="10149840" y="256032"/>
+            <a:ext cx="3931920" cy="274320"/>
+          </a:xfrm>
+          <a:prstGeom prst="rect">
+            <a:avLst/>
+          </a:prstGeom>
+          <a:noFill/>
+        </p:spPr>
+        <p:txBody>
+          <a:bodyPr wrap="square" lIns="0" rIns="0" tIns="0" bIns="0">
+            <a:spAutoFit/>
+          </a:bodyPr>
+          <a:lstStyle/>
+          <a:p>
+            <a:pPr>
+              <a:spcAft>
+                <a:spcPts val="1000"/>
+              </a:spcAft>
+              <a:defRPr sz="1000" b="0">
+                <a:solidFill>
+                  <a:srgbClr val="A6BDCF"/>
+                </a:solidFill>
+                <a:latin typeface="Aptos"/>
+              </a:defRPr>
+            </a:pPr>
+            <a:r>
+              <a:t>FIAP  +  AZUL LOGÍSTICA  /  SPRINT 1</a:t>
+            </a:r>
+          </a:p>
+        </p:txBody>
+      </p:sp>
+      <p:sp>
+        <p:nvSpPr>
+          <p:cNvPr id="4" name="TextBox 3"/>
+          <p:cNvSpPr txBox="1"/>
+          <p:nvPr/>
+        </p:nvSpPr>
+        <p:spPr>
+          <a:xfrm>
+            <a:off x="640080" y="1143000"/>
+            <a:ext cx="13258800" cy="1005840"/>
+          </a:xfrm>
+          <a:prstGeom prst="rect">
+            <a:avLst/>
+          </a:prstGeom>
+          <a:noFill/>
+        </p:spPr>
+        <p:txBody>
+          <a:bodyPr wrap="square" lIns="0" rIns="0" tIns="0" bIns="0">
+            <a:spAutoFit/>
+          </a:bodyPr>
+          <a:lstStyle/>
+          <a:p>
+            <a:pPr>
+              <a:spcAft>
+                <a:spcPts val="1000"/>
+              </a:spcAft>
+              <a:defRPr sz="3400" b="1">
+                <a:solidFill>
+                  <a:srgbClr val="FFFFFF"/>
+                </a:solidFill>
+                <a:latin typeface="Aptos"/>
+              </a:defRPr>
+            </a:pPr>
+            <a:r>
+              <a:t>O problema que o negócio precisa resolver</a:t>
+            </a:r>
+          </a:p>
+        </p:txBody>
+      </p:sp>
+      <p:sp>
+        <p:nvSpPr>
+          <p:cNvPr id="5" name="TextBox 4"/>
+          <p:cNvSpPr txBox="1"/>
+          <p:nvPr/>
+        </p:nvSpPr>
+        <p:spPr>
+          <a:xfrm>
+            <a:off x="685800" y="2331720"/>
+            <a:ext cx="12984480" cy="822960"/>
+          </a:xfrm>
+          <a:prstGeom prst="rect">
+            <a:avLst/>
+          </a:prstGeom>
+          <a:noFill/>
+        </p:spPr>
+        <p:txBody>
+          <a:bodyPr wrap="square" lIns="0" rIns="0" tIns="0" bIns="0">
+            <a:spAutoFit/>
+          </a:bodyPr>
+          <a:lstStyle/>
+          <a:p>
+            <a:pPr>
+              <a:spcAft>
+                <a:spcPts val="1000"/>
+              </a:spcAft>
+              <a:defRPr sz="2100" b="0">
+                <a:solidFill>
+                  <a:srgbClr val="A6BDCF"/>
+                </a:solidFill>
+                <a:latin typeface="Aptos"/>
+              </a:defRPr>
+            </a:pPr>
+            <a:r>
+              <a:t>Atrasos e restrições de espaço exigem decisões coordenadas no terminal.</a:t>
+            </a:r>
+          </a:p>
+        </p:txBody>
+      </p:sp>
+      <p:sp>
+        <p:nvSpPr>
+          <p:cNvPr id="6" name="TextBox 5"/>
+          <p:cNvSpPr txBox="1"/>
+          <p:nvPr/>
+        </p:nvSpPr>
+        <p:spPr>
+          <a:xfrm>
+            <a:off x="502920" y="7808975"/>
+            <a:ext cx="10972800" cy="228600"/>
+          </a:xfrm>
+          <a:prstGeom prst="rect">
+            <a:avLst/>
+          </a:prstGeom>
+          <a:noFill/>
+        </p:spPr>
+        <p:txBody>
+          <a:bodyPr wrap="square" lIns="0" rIns="0" tIns="0" bIns="0">
+            <a:spAutoFit/>
+          </a:bodyPr>
+          <a:lstStyle/>
+          <a:p>
+            <a:pPr>
+              <a:spcAft>
+                <a:spcPts val="1000"/>
+              </a:spcAft>
+              <a:defRPr sz="900" b="0">
+                <a:solidFill>
+                  <a:srgbClr val="A6BDCF"/>
+                </a:solidFill>
+                <a:latin typeface="Aptos"/>
+              </a:defRPr>
+            </a:pPr>
+            <a:r>
+              <a:t>PROTÓTIPO ACADÊMICO   /   HIPÓTESES DE NEGÓCIO A VALIDAR</a:t>
+            </a:r>
+          </a:p>
+        </p:txBody>
+      </p:sp>
+      <p:sp>
+        <p:nvSpPr>
+          <p:cNvPr id="7" name="Rounded Rectangle 6"/>
+          <p:cNvSpPr/>
+          <p:nvPr/>
+        </p:nvSpPr>
+        <p:spPr>
+          <a:xfrm>
+            <a:off x="685800" y="3566160"/>
+            <a:ext cx="4251960" cy="3474720"/>
+          </a:xfrm>
+          <a:prstGeom prst="roundRect">
+            <a:avLst>
+              <a:gd name="adj" fmla="val 8000"/>
+            </a:avLst>
+          </a:prstGeom>
+          <a:solidFill>
+            <a:srgbClr val="10314B"/>
+          </a:solidFill>
+          <a:ln>
+            <a:noFill/>
+          </a:ln>
+        </p:spPr>
+        <p:style>
+          <a:lnRef idx="1">
+            <a:schemeClr val="accent1"/>
+          </a:lnRef>
+          <a:fillRef idx="3">
+            <a:schemeClr val="accent1"/>
+          </a:fillRef>
+          <a:effectRef idx="2">
+            <a:schemeClr val="accent1"/>
+          </a:effectRef>
+          <a:fontRef idx="minor">
+            <a:schemeClr val="lt1"/>
+          </a:fontRef>
+        </p:style>
+        <p:txBody>
+          <a:bodyPr rtlCol="0" anchor="ctr"/>
+          <a:lstStyle/>
+          <a:p>
+            <a:pPr algn="ctr"/>
+          </a:p>
+        </p:txBody>
+      </p:sp>
+      <p:sp>
+        <p:nvSpPr>
+          <p:cNvPr id="8" name="TextBox 7"/>
+          <p:cNvSpPr txBox="1"/>
+          <p:nvPr/>
+        </p:nvSpPr>
+        <p:spPr>
+          <a:xfrm>
+            <a:off x="914400" y="3794760"/>
+            <a:ext cx="914400" cy="502920"/>
+          </a:xfrm>
+          <a:prstGeom prst="rect">
+            <a:avLst/>
+          </a:prstGeom>
+          <a:noFill/>
+        </p:spPr>
+        <p:txBody>
+          <a:bodyPr wrap="square" lIns="0" rIns="0" tIns="0" bIns="0">
+            <a:spAutoFit/>
+          </a:bodyPr>
+          <a:lstStyle/>
+          <a:p>
+            <a:pPr>
+              <a:spcAft>
+                <a:spcPts val="1000"/>
+              </a:spcAft>
+              <a:defRPr sz="2900" b="1">
+                <a:solidFill>
+                  <a:srgbClr val="43CEEF"/>
+                </a:solidFill>
+                <a:latin typeface="Aptos"/>
+              </a:defRPr>
+            </a:pPr>
+            <a:r>
+              <a:t>01</a:t>
+            </a:r>
+          </a:p>
+        </p:txBody>
+      </p:sp>
+      <p:sp>
+        <p:nvSpPr>
+          <p:cNvPr id="9" name="TextBox 8"/>
+          <p:cNvSpPr txBox="1"/>
+          <p:nvPr/>
+        </p:nvSpPr>
+        <p:spPr>
+          <a:xfrm>
+            <a:off x="914400" y="4572000"/>
+            <a:ext cx="3749039" cy="777240"/>
+          </a:xfrm>
+          <a:prstGeom prst="rect">
+            <a:avLst/>
+          </a:prstGeom>
+          <a:noFill/>
+        </p:spPr>
+        <p:txBody>
+          <a:bodyPr wrap="square" lIns="0" rIns="0" tIns="0" bIns="0">
+            <a:spAutoFit/>
+          </a:bodyPr>
+          <a:lstStyle/>
+          <a:p>
+            <a:pPr>
+              <a:spcAft>
+                <a:spcPts val="1000"/>
+              </a:spcAft>
+              <a:defRPr sz="2300" b="1">
+                <a:solidFill>
+                  <a:srgbClr val="FFFFFF"/>
+                </a:solidFill>
+                <a:latin typeface="Aptos"/>
+              </a:defRPr>
+            </a:pPr>
+            <a:r>
+              <a:t>Urgência</a:t>
+            </a:r>
+          </a:p>
+        </p:txBody>
+      </p:sp>
+      <p:sp>
+        <p:nvSpPr>
+          <p:cNvPr id="10" name="TextBox 9"/>
+          <p:cNvSpPr txBox="1"/>
+          <p:nvPr/>
+        </p:nvSpPr>
+        <p:spPr>
+          <a:xfrm>
+            <a:off x="914400" y="5577840"/>
+            <a:ext cx="3749039" cy="1234440"/>
+          </a:xfrm>
+          <a:prstGeom prst="rect">
+            <a:avLst/>
+          </a:prstGeom>
+          <a:noFill/>
+        </p:spPr>
+        <p:txBody>
+          <a:bodyPr wrap="square" lIns="0" rIns="0" tIns="0" bIns="0">
+            <a:spAutoFit/>
+          </a:bodyPr>
+          <a:lstStyle/>
+          <a:p>
+            <a:pPr>
+              <a:spcAft>
+                <a:spcPts val="1000"/>
+              </a:spcAft>
+              <a:defRPr sz="2000" b="0">
+                <a:solidFill>
+                  <a:srgbClr val="A6BDCF"/>
+                </a:solidFill>
+                <a:latin typeface="Aptos"/>
+              </a:defRPr>
+            </a:pPr>
+            <a:r>
+              <a:t>Identificar quais cargas têm menos tempo para completar o processo.</a:t>
+            </a:r>
+          </a:p>
+        </p:txBody>
+      </p:sp>
+      <p:sp>
+        <p:nvSpPr>
+          <p:cNvPr id="11" name="Rounded Rectangle 10"/>
+          <p:cNvSpPr/>
+          <p:nvPr/>
+        </p:nvSpPr>
+        <p:spPr>
+          <a:xfrm>
+            <a:off x="5257800" y="3566160"/>
+            <a:ext cx="4251960" cy="3474720"/>
+          </a:xfrm>
+          <a:prstGeom prst="roundRect">
+            <a:avLst>
+              <a:gd name="adj" fmla="val 8000"/>
+            </a:avLst>
+          </a:prstGeom>
+          <a:solidFill>
+            <a:srgbClr val="10314B"/>
+          </a:solidFill>
+          <a:ln>
+            <a:noFill/>
+          </a:ln>
+        </p:spPr>
+        <p:style>
+          <a:lnRef idx="1">
+            <a:schemeClr val="accent1"/>
+          </a:lnRef>
+          <a:fillRef idx="3">
+            <a:schemeClr val="accent1"/>
+          </a:fillRef>
+          <a:effectRef idx="2">
+            <a:schemeClr val="accent1"/>
+          </a:effectRef>
+          <a:fontRef idx="minor">
+            <a:schemeClr val="lt1"/>
+          </a:fontRef>
+        </p:style>
+        <p:txBody>
+          <a:bodyPr rtlCol="0" anchor="ctr"/>
+          <a:lstStyle/>
+          <a:p>
+            <a:pPr algn="ctr"/>
+          </a:p>
+        </p:txBody>
+      </p:sp>
+      <p:sp>
+        <p:nvSpPr>
+          <p:cNvPr id="12" name="TextBox 11"/>
+          <p:cNvSpPr txBox="1"/>
+          <p:nvPr/>
+        </p:nvSpPr>
+        <p:spPr>
+          <a:xfrm>
+            <a:off x="5486400" y="3794760"/>
+            <a:ext cx="914400" cy="502920"/>
+          </a:xfrm>
+          <a:prstGeom prst="rect">
+            <a:avLst/>
+          </a:prstGeom>
+          <a:noFill/>
+        </p:spPr>
+        <p:txBody>
+          <a:bodyPr wrap="square" lIns="0" rIns="0" tIns="0" bIns="0">
+            <a:spAutoFit/>
+          </a:bodyPr>
+          <a:lstStyle/>
+          <a:p>
+            <a:pPr>
+              <a:spcAft>
+                <a:spcPts val="1000"/>
+              </a:spcAft>
+              <a:defRPr sz="2900" b="1">
+                <a:solidFill>
+                  <a:srgbClr val="43CEEF"/>
+                </a:solidFill>
+                <a:latin typeface="Aptos"/>
+              </a:defRPr>
+            </a:pPr>
+            <a:r>
+              <a:t>02</a:t>
+            </a:r>
+          </a:p>
+        </p:txBody>
+      </p:sp>
+      <p:sp>
+        <p:nvSpPr>
+          <p:cNvPr id="13" name="TextBox 12"/>
+          <p:cNvSpPr txBox="1"/>
+          <p:nvPr/>
+        </p:nvSpPr>
+        <p:spPr>
+          <a:xfrm>
+            <a:off x="5486400" y="4572000"/>
+            <a:ext cx="3749039" cy="777240"/>
+          </a:xfrm>
+          <a:prstGeom prst="rect">
+            <a:avLst/>
+          </a:prstGeom>
+          <a:noFill/>
+        </p:spPr>
+        <p:txBody>
+          <a:bodyPr wrap="square" lIns="0" rIns="0" tIns="0" bIns="0">
+            <a:spAutoFit/>
+          </a:bodyPr>
+          <a:lstStyle/>
+          <a:p>
+            <a:pPr>
+              <a:spcAft>
+                <a:spcPts val="1000"/>
+              </a:spcAft>
+              <a:defRPr sz="2300" b="1">
+                <a:solidFill>
+                  <a:srgbClr val="FFFFFF"/>
+                </a:solidFill>
+                <a:latin typeface="Aptos"/>
+              </a:defRPr>
+            </a:pPr>
+            <a:r>
+              <a:t>Espaço limitado</a:t>
+            </a:r>
+          </a:p>
+        </p:txBody>
+      </p:sp>
+      <p:sp>
+        <p:nvSpPr>
+          <p:cNvPr id="14" name="TextBox 13"/>
+          <p:cNvSpPr txBox="1"/>
+          <p:nvPr/>
+        </p:nvSpPr>
+        <p:spPr>
+          <a:xfrm>
+            <a:off x="5486400" y="5577840"/>
+            <a:ext cx="3749039" cy="1234440"/>
+          </a:xfrm>
+          <a:prstGeom prst="rect">
+            <a:avLst/>
+          </a:prstGeom>
+          <a:noFill/>
+        </p:spPr>
+        <p:txBody>
+          <a:bodyPr wrap="square" lIns="0" rIns="0" tIns="0" bIns="0">
+            <a:spAutoFit/>
+          </a:bodyPr>
+          <a:lstStyle/>
+          <a:p>
+            <a:pPr>
+              <a:spcAft>
+                <a:spcPts val="1000"/>
+              </a:spcAft>
+              <a:defRPr sz="2000" b="0">
+                <a:solidFill>
+                  <a:srgbClr val="A6BDCF"/>
+                </a:solidFill>
+                <a:latin typeface="Aptos"/>
+              </a:defRPr>
+            </a:pPr>
+            <a:r>
+              <a:t>Distribuir cargas respeitando a capacidade disponível de cada área.</a:t>
+            </a:r>
+          </a:p>
+        </p:txBody>
+      </p:sp>
+      <p:sp>
+        <p:nvSpPr>
+          <p:cNvPr id="15" name="Rounded Rectangle 14"/>
+          <p:cNvSpPr/>
+          <p:nvPr/>
+        </p:nvSpPr>
+        <p:spPr>
+          <a:xfrm>
+            <a:off x="9829800" y="3566160"/>
+            <a:ext cx="4251960" cy="3474720"/>
+          </a:xfrm>
+          <a:prstGeom prst="roundRect">
+            <a:avLst>
+              <a:gd name="adj" fmla="val 8000"/>
+            </a:avLst>
+          </a:prstGeom>
+          <a:solidFill>
+            <a:srgbClr val="10314B"/>
+          </a:solidFill>
+          <a:ln>
+            <a:noFill/>
+          </a:ln>
+        </p:spPr>
+        <p:style>
+          <a:lnRef idx="1">
+            <a:schemeClr val="accent1"/>
+          </a:lnRef>
+          <a:fillRef idx="3">
+            <a:schemeClr val="accent1"/>
+          </a:fillRef>
+          <a:effectRef idx="2">
+            <a:schemeClr val="accent1"/>
+          </a:effectRef>
+          <a:fontRef idx="minor">
+            <a:schemeClr val="lt1"/>
+          </a:fontRef>
+        </p:style>
+        <p:txBody>
+          <a:bodyPr rtlCol="0" anchor="ctr"/>
+          <a:lstStyle/>
+          <a:p>
+            <a:pPr algn="ctr"/>
+          </a:p>
+        </p:txBody>
+      </p:sp>
+      <p:sp>
+        <p:nvSpPr>
+          <p:cNvPr id="16" name="TextBox 15"/>
+          <p:cNvSpPr txBox="1"/>
+          <p:nvPr/>
+        </p:nvSpPr>
+        <p:spPr>
+          <a:xfrm>
+            <a:off x="10058400" y="3794760"/>
+            <a:ext cx="914400" cy="502920"/>
+          </a:xfrm>
+          <a:prstGeom prst="rect">
+            <a:avLst/>
+          </a:prstGeom>
+          <a:noFill/>
+        </p:spPr>
+        <p:txBody>
+          <a:bodyPr wrap="square" lIns="0" rIns="0" tIns="0" bIns="0">
+            <a:spAutoFit/>
+          </a:bodyPr>
+          <a:lstStyle/>
+          <a:p>
+            <a:pPr>
+              <a:spcAft>
+                <a:spcPts val="1000"/>
+              </a:spcAft>
+              <a:defRPr sz="2900" b="1">
+                <a:solidFill>
+                  <a:srgbClr val="43CEEF"/>
+                </a:solidFill>
+                <a:latin typeface="Aptos"/>
+              </a:defRPr>
+            </a:pPr>
+            <a:r>
+              <a:t>03</a:t>
+            </a:r>
+          </a:p>
+        </p:txBody>
+      </p:sp>
+      <p:sp>
+        <p:nvSpPr>
+          <p:cNvPr id="17" name="TextBox 16"/>
+          <p:cNvSpPr txBox="1"/>
+          <p:nvPr/>
+        </p:nvSpPr>
+        <p:spPr>
+          <a:xfrm>
+            <a:off x="10058400" y="4572000"/>
+            <a:ext cx="3749039" cy="777240"/>
+          </a:xfrm>
+          <a:prstGeom prst="rect">
+            <a:avLst/>
+          </a:prstGeom>
+          <a:noFill/>
+        </p:spPr>
+        <p:txBody>
+          <a:bodyPr wrap="square" lIns="0" rIns="0" tIns="0" bIns="0">
+            <a:spAutoFit/>
+          </a:bodyPr>
+          <a:lstStyle/>
+          <a:p>
+            <a:pPr>
+              <a:spcAft>
+                <a:spcPts val="1000"/>
+              </a:spcAft>
+              <a:defRPr sz="2300" b="1">
+                <a:solidFill>
+                  <a:srgbClr val="FFFFFF"/>
+                </a:solidFill>
+                <a:latin typeface="Aptos"/>
+              </a:defRPr>
+            </a:pPr>
+            <a:r>
+              <a:t>Impacto esperado</a:t>
+            </a:r>
+          </a:p>
+        </p:txBody>
+      </p:sp>
+      <p:sp>
+        <p:nvSpPr>
+          <p:cNvPr id="18" name="TextBox 17"/>
+          <p:cNvSpPr txBox="1"/>
+          <p:nvPr/>
+        </p:nvSpPr>
+        <p:spPr>
+          <a:xfrm>
+            <a:off x="10058400" y="5577840"/>
+            <a:ext cx="3749039" cy="1234440"/>
+          </a:xfrm>
+          <a:prstGeom prst="rect">
+            <a:avLst/>
+          </a:prstGeom>
+          <a:noFill/>
+        </p:spPr>
+        <p:txBody>
+          <a:bodyPr wrap="square" lIns="0" rIns="0" tIns="0" bIns="0">
+            <a:spAutoFit/>
+          </a:bodyPr>
+          <a:lstStyle/>
+          <a:p>
+            <a:pPr>
+              <a:spcAft>
+                <a:spcPts val="1000"/>
+              </a:spcAft>
+              <a:defRPr sz="2000" b="0">
+                <a:solidFill>
+                  <a:srgbClr val="A6BDCF"/>
+                </a:solidFill>
+                <a:latin typeface="Aptos"/>
+              </a:defRPr>
+            </a:pPr>
+            <a:r>
+              <a:t>Evitar esperas e retrabalho e melhorar o cumprimento dos prazos.</a:t>
+            </a:r>
+          </a:p>
+        </p:txBody>
+      </p:sp>
+      <p:sp>
+        <p:nvSpPr>
+          <p:cNvPr id="19" name="TextBox 18"/>
+          <p:cNvSpPr txBox="1"/>
+          <p:nvPr/>
+        </p:nvSpPr>
+        <p:spPr>
+          <a:xfrm>
+            <a:off x="13213080" y="7772400"/>
+            <a:ext cx="914400" cy="274320"/>
+          </a:xfrm>
+          <a:prstGeom prst="rect">
+            <a:avLst/>
+          </a:prstGeom>
+          <a:noFill/>
+        </p:spPr>
+        <p:txBody>
+          <a:bodyPr wrap="square" lIns="0" rIns="0" tIns="0" bIns="0">
+            <a:spAutoFit/>
+          </a:bodyPr>
+          <a:lstStyle/>
+          <a:p>
+            <a:pPr>
+              <a:spcAft>
+                <a:spcPts val="1000"/>
+              </a:spcAft>
+              <a:defRPr sz="1100" b="0">
+                <a:solidFill>
+                  <a:srgbClr val="A6BDCF"/>
+                </a:solidFill>
+                <a:latin typeface="Aptos"/>
+              </a:defRPr>
+            </a:pPr>
+            <a:r>
+              <a:t>03 / 41</a:t>
+            </a:r>
+          </a:p>
+        </p:txBody>
+      </p:sp>
+      <p:sp>
+        <p:nvSpPr>
+          <p:cNvPr id="20" name="Rectangle 19"/>
+          <p:cNvSpPr/>
+          <p:nvPr/>
+        </p:nvSpPr>
+        <p:spPr>
+          <a:xfrm>
+            <a:off x="502920" y="8156448"/>
+            <a:ext cx="996919" cy="41148"/>
+          </a:xfrm>
+          <a:prstGeom prst="rect">
+            <a:avLst/>
+          </a:prstGeom>
+          <a:solidFill>
+            <a:srgbClr val="43CEEF"/>
+          </a:solidFill>
+          <a:ln>
+            <a:noFill/>
+          </a:ln>
+        </p:spPr>
+        <p:style>
+          <a:lnRef idx="1">
+            <a:schemeClr val="accent1"/>
+          </a:lnRef>
+          <a:fillRef idx="3">
+            <a:schemeClr val="accent1"/>
+          </a:fillRef>
+          <a:effectRef idx="2">
+            <a:schemeClr val="accent1"/>
+          </a:effectRef>
+          <a:fontRef idx="minor">
+            <a:schemeClr val="lt1"/>
+          </a:fontRef>
+        </p:style>
+        <p:txBody>
+          <a:bodyPr rtlCol="0" anchor="ctr"/>
+          <a:lstStyle/>
+          <a:p>
+            <a:pPr algn="ctr"/>
+          </a:p>
+        </p:txBody>
+      </p:sp>
+    </p:spTree>
+  </p:cSld>
+  <p:clrMapOvr>
+    <a:masterClrMapping/>
+  </p:clrMapOvr>
+</p:sld>
+</file>
+
+<file path=ppt/slides/slide34.xml><?xml version="1.0" encoding="utf-8"?>
+<p:sld xmlns:a="http://schemas.openxmlformats.org/drawingml/2006/main" xmlns:p="http://schemas.openxmlformats.org/presentationml/2006/main" xmlns:r="http://schemas.openxmlformats.org/officeDocument/2006/relationships">
+  <p:cSld>
+    <p:bg>
+      <p:bgPr>
+        <a:solidFill>
+          <a:srgbClr val="071E35"/>
+        </a:solidFill>
+        <a:effectLst/>
+      </p:bgPr>
+    </p:bg>
+    <p:spTree>
+      <p:nvGrpSpPr>
+        <p:cNvPr id="1" name=""/>
+        <p:cNvGrpSpPr/>
+        <p:nvPr/>
+      </p:nvGrpSpPr>
+      <p:grpSpPr/>
+      <p:sp>
+        <p:nvSpPr>
+          <p:cNvPr id="2" name="TextBox 1"/>
+          <p:cNvSpPr txBox="1"/>
+          <p:nvPr/>
+        </p:nvSpPr>
+        <p:spPr>
+          <a:xfrm>
+            <a:off x="502920" y="256032"/>
+            <a:ext cx="4572000" cy="274320"/>
+          </a:xfrm>
+          <a:prstGeom prst="rect">
+            <a:avLst/>
+          </a:prstGeom>
+          <a:noFill/>
+        </p:spPr>
+        <p:txBody>
+          <a:bodyPr wrap="square" lIns="0" rIns="0" tIns="0" bIns="0">
+            <a:spAutoFit/>
+          </a:bodyPr>
+          <a:lstStyle/>
+          <a:p>
+            <a:pPr>
+              <a:spcAft>
+                <a:spcPts val="1000"/>
+              </a:spcAft>
+              <a:defRPr sz="1300" b="1">
+                <a:solidFill>
+                  <a:srgbClr val="43CEEF"/>
+                </a:solidFill>
+                <a:latin typeface="Aptos"/>
+              </a:defRPr>
+            </a:pPr>
+            <a:r>
+              <a:t>AZUL / SMARTCARGO</a:t>
+            </a:r>
+          </a:p>
+        </p:txBody>
+      </p:sp>
+      <p:sp>
+        <p:nvSpPr>
+          <p:cNvPr id="3" name="TextBox 2"/>
+          <p:cNvSpPr txBox="1"/>
+          <p:nvPr/>
+        </p:nvSpPr>
+        <p:spPr>
+          <a:xfrm>
+            <a:off x="10149840" y="256032"/>
+            <a:ext cx="3931920" cy="274320"/>
+          </a:xfrm>
+          <a:prstGeom prst="rect">
+            <a:avLst/>
+          </a:prstGeom>
+          <a:noFill/>
+        </p:spPr>
+        <p:txBody>
+          <a:bodyPr wrap="square" lIns="0" rIns="0" tIns="0" bIns="0">
+            <a:spAutoFit/>
+          </a:bodyPr>
+          <a:lstStyle/>
+          <a:p>
+            <a:pPr>
+              <a:spcAft>
+                <a:spcPts val="1000"/>
+              </a:spcAft>
+              <a:defRPr sz="1000" b="0">
+                <a:solidFill>
+                  <a:srgbClr val="A6BDCF"/>
+                </a:solidFill>
+                <a:latin typeface="Aptos"/>
+              </a:defRPr>
+            </a:pPr>
+            <a:r>
+              <a:t>FIAP  +  AZUL LOGÍSTICA  /  SPRINT 1</a:t>
+            </a:r>
+          </a:p>
+        </p:txBody>
+      </p:sp>
+      <p:sp>
+        <p:nvSpPr>
+          <p:cNvPr id="4" name="TextBox 3"/>
+          <p:cNvSpPr txBox="1"/>
+          <p:nvPr/>
+        </p:nvSpPr>
+        <p:spPr>
+          <a:xfrm>
+            <a:off x="640080" y="1143000"/>
+            <a:ext cx="13258800" cy="1005840"/>
+          </a:xfrm>
+          <a:prstGeom prst="rect">
+            <a:avLst/>
+          </a:prstGeom>
+          <a:noFill/>
+        </p:spPr>
+        <p:txBody>
+          <a:bodyPr wrap="square" lIns="0" rIns="0" tIns="0" bIns="0">
+            <a:spAutoFit/>
+          </a:bodyPr>
+          <a:lstStyle/>
+          <a:p>
+            <a:pPr>
+              <a:spcAft>
+                <a:spcPts val="1000"/>
+              </a:spcAft>
+              <a:defRPr sz="3400" b="1">
+                <a:solidFill>
+                  <a:srgbClr val="FFFFFF"/>
+                </a:solidFill>
+                <a:latin typeface="Aptos"/>
+              </a:defRPr>
+            </a:pPr>
+            <a:r>
+              <a:t>Quem usa e quem decide</a:t>
+            </a:r>
+          </a:p>
+        </p:txBody>
+      </p:sp>
+      <p:sp>
+        <p:nvSpPr>
+          <p:cNvPr id="5" name="TextBox 4"/>
+          <p:cNvSpPr txBox="1"/>
+          <p:nvPr/>
+        </p:nvSpPr>
+        <p:spPr>
+          <a:xfrm>
+            <a:off x="685800" y="2331720"/>
+            <a:ext cx="12984480" cy="822960"/>
+          </a:xfrm>
+          <a:prstGeom prst="rect">
+            <a:avLst/>
+          </a:prstGeom>
+          <a:noFill/>
+        </p:spPr>
+        <p:txBody>
+          <a:bodyPr wrap="square" lIns="0" rIns="0" tIns="0" bIns="0">
+            <a:spAutoFit/>
+          </a:bodyPr>
+          <a:lstStyle/>
+          <a:p>
+            <a:pPr>
+              <a:spcAft>
+                <a:spcPts val="1000"/>
+              </a:spcAft>
+              <a:defRPr sz="2100" b="0">
+                <a:solidFill>
+                  <a:srgbClr val="A6BDCF"/>
+                </a:solidFill>
+                <a:latin typeface="Aptos"/>
+              </a:defRPr>
+            </a:pPr>
+            <a:r>
+              <a:t>A solução é proposta para uso interno na operação logística de Viracopos.</a:t>
+            </a:r>
+          </a:p>
+        </p:txBody>
+      </p:sp>
+      <p:sp>
+        <p:nvSpPr>
+          <p:cNvPr id="6" name="TextBox 5"/>
+          <p:cNvSpPr txBox="1"/>
+          <p:nvPr/>
+        </p:nvSpPr>
+        <p:spPr>
+          <a:xfrm>
+            <a:off x="502920" y="7808975"/>
+            <a:ext cx="10972800" cy="228600"/>
+          </a:xfrm>
+          <a:prstGeom prst="rect">
+            <a:avLst/>
+          </a:prstGeom>
+          <a:noFill/>
+        </p:spPr>
+        <p:txBody>
+          <a:bodyPr wrap="square" lIns="0" rIns="0" tIns="0" bIns="0">
+            <a:spAutoFit/>
+          </a:bodyPr>
+          <a:lstStyle/>
+          <a:p>
+            <a:pPr>
+              <a:spcAft>
+                <a:spcPts val="1000"/>
+              </a:spcAft>
+              <a:defRPr sz="900" b="0">
+                <a:solidFill>
+                  <a:srgbClr val="A6BDCF"/>
+                </a:solidFill>
+                <a:latin typeface="Aptos"/>
+              </a:defRPr>
+            </a:pPr>
+            <a:r>
+              <a:t>PROTÓTIPO ACADÊMICO   /   HIPÓTESES DE NEGÓCIO A VALIDAR</a:t>
+            </a:r>
+          </a:p>
+        </p:txBody>
+      </p:sp>
+      <p:sp>
+        <p:nvSpPr>
+          <p:cNvPr id="7" name="Rounded Rectangle 6"/>
+          <p:cNvSpPr/>
+          <p:nvPr/>
+        </p:nvSpPr>
+        <p:spPr>
+          <a:xfrm>
+            <a:off x="685800" y="3566160"/>
+            <a:ext cx="4251960" cy="3474720"/>
+          </a:xfrm>
+          <a:prstGeom prst="roundRect">
+            <a:avLst>
+              <a:gd name="adj" fmla="val 8000"/>
+            </a:avLst>
+          </a:prstGeom>
+          <a:solidFill>
+            <a:srgbClr val="10314B"/>
+          </a:solidFill>
+          <a:ln>
+            <a:noFill/>
+          </a:ln>
+        </p:spPr>
+        <p:style>
+          <a:lnRef idx="1">
+            <a:schemeClr val="accent1"/>
+          </a:lnRef>
+          <a:fillRef idx="3">
+            <a:schemeClr val="accent1"/>
+          </a:fillRef>
+          <a:effectRef idx="2">
+            <a:schemeClr val="accent1"/>
+          </a:effectRef>
+          <a:fontRef idx="minor">
+            <a:schemeClr val="lt1"/>
+          </a:fontRef>
+        </p:style>
+        <p:txBody>
+          <a:bodyPr rtlCol="0" anchor="ctr"/>
+          <a:lstStyle/>
+          <a:p>
+            <a:pPr algn="ctr"/>
+          </a:p>
+        </p:txBody>
+      </p:sp>
+      <p:sp>
+        <p:nvSpPr>
+          <p:cNvPr id="8" name="TextBox 7"/>
+          <p:cNvSpPr txBox="1"/>
+          <p:nvPr/>
+        </p:nvSpPr>
+        <p:spPr>
+          <a:xfrm>
+            <a:off x="914400" y="3794760"/>
+            <a:ext cx="914400" cy="502920"/>
+          </a:xfrm>
+          <a:prstGeom prst="rect">
+            <a:avLst/>
+          </a:prstGeom>
+          <a:noFill/>
+        </p:spPr>
+        <p:txBody>
+          <a:bodyPr wrap="square" lIns="0" rIns="0" tIns="0" bIns="0">
+            <a:spAutoFit/>
+          </a:bodyPr>
+          <a:lstStyle/>
+          <a:p>
+            <a:pPr>
+              <a:spcAft>
+                <a:spcPts val="1000"/>
+              </a:spcAft>
+              <a:defRPr sz="2900" b="1">
+                <a:solidFill>
+                  <a:srgbClr val="43CEEF"/>
+                </a:solidFill>
+                <a:latin typeface="Aptos"/>
+              </a:defRPr>
+            </a:pPr>
+            <a:r>
+              <a:t>01</a:t>
+            </a:r>
+          </a:p>
+        </p:txBody>
+      </p:sp>
+      <p:sp>
+        <p:nvSpPr>
+          <p:cNvPr id="9" name="TextBox 8"/>
+          <p:cNvSpPr txBox="1"/>
+          <p:nvPr/>
+        </p:nvSpPr>
+        <p:spPr>
+          <a:xfrm>
+            <a:off x="914400" y="4572000"/>
+            <a:ext cx="3749039" cy="777240"/>
+          </a:xfrm>
+          <a:prstGeom prst="rect">
+            <a:avLst/>
+          </a:prstGeom>
+          <a:noFill/>
+        </p:spPr>
+        <p:txBody>
+          <a:bodyPr wrap="square" lIns="0" rIns="0" tIns="0" bIns="0">
+            <a:spAutoFit/>
+          </a:bodyPr>
+          <a:lstStyle/>
+          <a:p>
+            <a:pPr>
+              <a:spcAft>
+                <a:spcPts val="1000"/>
+              </a:spcAft>
+              <a:defRPr sz="2300" b="1">
+                <a:solidFill>
+                  <a:srgbClr val="FFFFFF"/>
+                </a:solidFill>
+                <a:latin typeface="Aptos"/>
+              </a:defRPr>
+            </a:pPr>
+            <a:r>
+              <a:t>Operador</a:t>
+            </a:r>
+          </a:p>
+        </p:txBody>
+      </p:sp>
+      <p:sp>
+        <p:nvSpPr>
+          <p:cNvPr id="10" name="TextBox 9"/>
+          <p:cNvSpPr txBox="1"/>
+          <p:nvPr/>
+        </p:nvSpPr>
+        <p:spPr>
+          <a:xfrm>
+            <a:off x="914400" y="5577840"/>
+            <a:ext cx="3749039" cy="1234440"/>
+          </a:xfrm>
+          <a:prstGeom prst="rect">
+            <a:avLst/>
+          </a:prstGeom>
+          <a:noFill/>
+        </p:spPr>
+        <p:txBody>
+          <a:bodyPr wrap="square" lIns="0" rIns="0" tIns="0" bIns="0">
+            <a:spAutoFit/>
+          </a:bodyPr>
+          <a:lstStyle/>
+          <a:p>
+            <a:pPr>
+              <a:spcAft>
+                <a:spcPts val="1000"/>
+              </a:spcAft>
+              <a:defRPr sz="2000" b="0">
+                <a:solidFill>
+                  <a:srgbClr val="A6BDCF"/>
+                </a:solidFill>
+                <a:latin typeface="Aptos"/>
+              </a:defRPr>
+            </a:pPr>
+            <a:r>
+              <a:t>Consulta a fila, aloca posições e registra o avanço de cada carga.</a:t>
+            </a:r>
+          </a:p>
+        </p:txBody>
+      </p:sp>
+      <p:sp>
+        <p:nvSpPr>
+          <p:cNvPr id="11" name="Rounded Rectangle 10"/>
+          <p:cNvSpPr/>
+          <p:nvPr/>
+        </p:nvSpPr>
+        <p:spPr>
+          <a:xfrm>
+            <a:off x="5257800" y="3566160"/>
+            <a:ext cx="4251960" cy="3474720"/>
+          </a:xfrm>
+          <a:prstGeom prst="roundRect">
+            <a:avLst>
+              <a:gd name="adj" fmla="val 8000"/>
+            </a:avLst>
+          </a:prstGeom>
+          <a:solidFill>
+            <a:srgbClr val="10314B"/>
+          </a:solidFill>
+          <a:ln>
+            <a:noFill/>
+          </a:ln>
+        </p:spPr>
+        <p:style>
+          <a:lnRef idx="1">
+            <a:schemeClr val="accent1"/>
+          </a:lnRef>
+          <a:fillRef idx="3">
+            <a:schemeClr val="accent1"/>
+          </a:fillRef>
+          <a:effectRef idx="2">
+            <a:schemeClr val="accent1"/>
+          </a:effectRef>
+          <a:fontRef idx="minor">
+            <a:schemeClr val="lt1"/>
+          </a:fontRef>
+        </p:style>
+        <p:txBody>
+          <a:bodyPr rtlCol="0" anchor="ctr"/>
+          <a:lstStyle/>
+          <a:p>
+            <a:pPr algn="ctr"/>
+          </a:p>
+        </p:txBody>
+      </p:sp>
+      <p:sp>
+        <p:nvSpPr>
+          <p:cNvPr id="12" name="TextBox 11"/>
+          <p:cNvSpPr txBox="1"/>
+          <p:nvPr/>
+        </p:nvSpPr>
+        <p:spPr>
+          <a:xfrm>
+            <a:off x="5486400" y="3794760"/>
+            <a:ext cx="914400" cy="502920"/>
+          </a:xfrm>
+          <a:prstGeom prst="rect">
+            <a:avLst/>
+          </a:prstGeom>
+          <a:noFill/>
+        </p:spPr>
+        <p:txBody>
+          <a:bodyPr wrap="square" lIns="0" rIns="0" tIns="0" bIns="0">
+            <a:spAutoFit/>
+          </a:bodyPr>
+          <a:lstStyle/>
+          <a:p>
+            <a:pPr>
+              <a:spcAft>
+                <a:spcPts val="1000"/>
+              </a:spcAft>
+              <a:defRPr sz="2900" b="1">
+                <a:solidFill>
+                  <a:srgbClr val="43CEEF"/>
+                </a:solidFill>
+                <a:latin typeface="Aptos"/>
+              </a:defRPr>
+            </a:pPr>
+            <a:r>
+              <a:t>02</a:t>
+            </a:r>
+          </a:p>
+        </p:txBody>
+      </p:sp>
+      <p:sp>
+        <p:nvSpPr>
+          <p:cNvPr id="13" name="TextBox 12"/>
+          <p:cNvSpPr txBox="1"/>
+          <p:nvPr/>
+        </p:nvSpPr>
+        <p:spPr>
+          <a:xfrm>
+            <a:off x="5486400" y="4572000"/>
+            <a:ext cx="3749039" cy="777240"/>
+          </a:xfrm>
+          <a:prstGeom prst="rect">
+            <a:avLst/>
+          </a:prstGeom>
+          <a:noFill/>
+        </p:spPr>
+        <p:txBody>
+          <a:bodyPr wrap="square" lIns="0" rIns="0" tIns="0" bIns="0">
+            <a:spAutoFit/>
+          </a:bodyPr>
+          <a:lstStyle/>
+          <a:p>
+            <a:pPr>
+              <a:spcAft>
+                <a:spcPts val="1000"/>
+              </a:spcAft>
+              <a:defRPr sz="2300" b="1">
+                <a:solidFill>
+                  <a:srgbClr val="FFFFFF"/>
+                </a:solidFill>
+                <a:latin typeface="Aptos"/>
+              </a:defRPr>
+            </a:pPr>
+            <a:r>
+              <a:t>Supervisor</a:t>
+            </a:r>
+          </a:p>
+        </p:txBody>
+      </p:sp>
+      <p:sp>
+        <p:nvSpPr>
+          <p:cNvPr id="14" name="TextBox 13"/>
+          <p:cNvSpPr txBox="1"/>
+          <p:nvPr/>
+        </p:nvSpPr>
+        <p:spPr>
+          <a:xfrm>
+            <a:off x="5486400" y="5577840"/>
+            <a:ext cx="3749039" cy="1234440"/>
+          </a:xfrm>
+          <a:prstGeom prst="rect">
+            <a:avLst/>
+          </a:prstGeom>
+          <a:noFill/>
+        </p:spPr>
+        <p:txBody>
+          <a:bodyPr wrap="square" lIns="0" rIns="0" tIns="0" bIns="0">
+            <a:spAutoFit/>
+          </a:bodyPr>
+          <a:lstStyle/>
+          <a:p>
+            <a:pPr>
+              <a:spcAft>
+                <a:spcPts val="1000"/>
+              </a:spcAft>
+              <a:defRPr sz="2000" b="0">
+                <a:solidFill>
+                  <a:srgbClr val="A6BDCF"/>
+                </a:solidFill>
+                <a:latin typeface="Aptos"/>
+              </a:defRPr>
+            </a:pPr>
+            <a:r>
+              <a:t>Trata exceções e acompanha gargalos e ocupação durante o turno.</a:t>
+            </a:r>
+          </a:p>
+        </p:txBody>
+      </p:sp>
+      <p:sp>
+        <p:nvSpPr>
+          <p:cNvPr id="15" name="Rounded Rectangle 14"/>
+          <p:cNvSpPr/>
+          <p:nvPr/>
+        </p:nvSpPr>
+        <p:spPr>
+          <a:xfrm>
+            <a:off x="9829800" y="3566160"/>
+            <a:ext cx="4251960" cy="3474720"/>
+          </a:xfrm>
+          <a:prstGeom prst="roundRect">
+            <a:avLst>
+              <a:gd name="adj" fmla="val 8000"/>
+            </a:avLst>
+          </a:prstGeom>
+          <a:solidFill>
+            <a:srgbClr val="10314B"/>
+          </a:solidFill>
+          <a:ln>
+            <a:noFill/>
+          </a:ln>
+        </p:spPr>
+        <p:style>
+          <a:lnRef idx="1">
+            <a:schemeClr val="accent1"/>
+          </a:lnRef>
+          <a:fillRef idx="3">
+            <a:schemeClr val="accent1"/>
+          </a:fillRef>
+          <a:effectRef idx="2">
+            <a:schemeClr val="accent1"/>
+          </a:effectRef>
+          <a:fontRef idx="minor">
+            <a:schemeClr val="lt1"/>
+          </a:fontRef>
+        </p:style>
+        <p:txBody>
+          <a:bodyPr rtlCol="0" anchor="ctr"/>
+          <a:lstStyle/>
+          <a:p>
+            <a:pPr algn="ctr"/>
+          </a:p>
+        </p:txBody>
+      </p:sp>
+      <p:sp>
+        <p:nvSpPr>
+          <p:cNvPr id="16" name="TextBox 15"/>
+          <p:cNvSpPr txBox="1"/>
+          <p:nvPr/>
+        </p:nvSpPr>
+        <p:spPr>
+          <a:xfrm>
+            <a:off x="10058400" y="3794760"/>
+            <a:ext cx="914400" cy="502920"/>
+          </a:xfrm>
+          <a:prstGeom prst="rect">
+            <a:avLst/>
+          </a:prstGeom>
+          <a:noFill/>
+        </p:spPr>
+        <p:txBody>
+          <a:bodyPr wrap="square" lIns="0" rIns="0" tIns="0" bIns="0">
+            <a:spAutoFit/>
+          </a:bodyPr>
+          <a:lstStyle/>
+          <a:p>
+            <a:pPr>
+              <a:spcAft>
+                <a:spcPts val="1000"/>
+              </a:spcAft>
+              <a:defRPr sz="2900" b="1">
+                <a:solidFill>
+                  <a:srgbClr val="43CEEF"/>
+                </a:solidFill>
+                <a:latin typeface="Aptos"/>
+              </a:defRPr>
+            </a:pPr>
+            <a:r>
+              <a:t>03</a:t>
+            </a:r>
+          </a:p>
+        </p:txBody>
+      </p:sp>
+      <p:sp>
+        <p:nvSpPr>
+          <p:cNvPr id="17" name="TextBox 16"/>
+          <p:cNvSpPr txBox="1"/>
+          <p:nvPr/>
+        </p:nvSpPr>
+        <p:spPr>
+          <a:xfrm>
+            <a:off x="10058400" y="4572000"/>
+            <a:ext cx="3749039" cy="777240"/>
+          </a:xfrm>
+          <a:prstGeom prst="rect">
+            <a:avLst/>
+          </a:prstGeom>
+          <a:noFill/>
+        </p:spPr>
+        <p:txBody>
+          <a:bodyPr wrap="square" lIns="0" rIns="0" tIns="0" bIns="0">
+            <a:spAutoFit/>
+          </a:bodyPr>
+          <a:lstStyle/>
+          <a:p>
+            <a:pPr>
+              <a:spcAft>
+                <a:spcPts val="1000"/>
+              </a:spcAft>
+              <a:defRPr sz="2300" b="1">
+                <a:solidFill>
+                  <a:srgbClr val="FFFFFF"/>
+                </a:solidFill>
+                <a:latin typeface="Aptos"/>
+              </a:defRPr>
+            </a:pPr>
+            <a:r>
+              <a:t>Gestor</a:t>
+            </a:r>
+          </a:p>
+        </p:txBody>
+      </p:sp>
+      <p:sp>
+        <p:nvSpPr>
+          <p:cNvPr id="18" name="TextBox 17"/>
+          <p:cNvSpPr txBox="1"/>
+          <p:nvPr/>
+        </p:nvSpPr>
+        <p:spPr>
+          <a:xfrm>
+            <a:off x="10058400" y="5577840"/>
+            <a:ext cx="3749039" cy="1234440"/>
+          </a:xfrm>
+          <a:prstGeom prst="rect">
+            <a:avLst/>
+          </a:prstGeom>
+          <a:noFill/>
+        </p:spPr>
+        <p:txBody>
+          <a:bodyPr wrap="square" lIns="0" rIns="0" tIns="0" bIns="0">
+            <a:spAutoFit/>
+          </a:bodyPr>
+          <a:lstStyle/>
+          <a:p>
+            <a:pPr>
+              <a:spcAft>
+                <a:spcPts val="1000"/>
+              </a:spcAft>
+              <a:defRPr sz="2000" b="0">
+                <a:solidFill>
+                  <a:srgbClr val="A6BDCF"/>
+                </a:solidFill>
+                <a:latin typeface="Aptos"/>
+              </a:defRPr>
+            </a:pPr>
+            <a:r>
+              <a:t>Avalia indicadores, custos e resultados para decidir sobre expansão.</a:t>
+            </a:r>
+          </a:p>
+        </p:txBody>
+      </p:sp>
+      <p:sp>
+        <p:nvSpPr>
+          <p:cNvPr id="19" name="TextBox 18"/>
+          <p:cNvSpPr txBox="1"/>
+          <p:nvPr/>
+        </p:nvSpPr>
+        <p:spPr>
+          <a:xfrm>
+            <a:off x="13213080" y="7772400"/>
+            <a:ext cx="914400" cy="274320"/>
+          </a:xfrm>
+          <a:prstGeom prst="rect">
+            <a:avLst/>
+          </a:prstGeom>
+          <a:noFill/>
+        </p:spPr>
+        <p:txBody>
+          <a:bodyPr wrap="square" lIns="0" rIns="0" tIns="0" bIns="0">
+            <a:spAutoFit/>
+          </a:bodyPr>
+          <a:lstStyle/>
+          <a:p>
+            <a:pPr>
+              <a:spcAft>
+                <a:spcPts val="1000"/>
+              </a:spcAft>
+              <a:defRPr sz="1100" b="0">
+                <a:solidFill>
+                  <a:srgbClr val="A6BDCF"/>
+                </a:solidFill>
+                <a:latin typeface="Aptos"/>
+              </a:defRPr>
+            </a:pPr>
+            <a:r>
+              <a:t>04 / 41</a:t>
+            </a:r>
+          </a:p>
+        </p:txBody>
+      </p:sp>
+      <p:sp>
+        <p:nvSpPr>
+          <p:cNvPr id="20" name="Rectangle 19"/>
+          <p:cNvSpPr/>
+          <p:nvPr/>
+        </p:nvSpPr>
+        <p:spPr>
+          <a:xfrm>
+            <a:off x="502920" y="8156448"/>
+            <a:ext cx="1329225" cy="41148"/>
+          </a:xfrm>
+          <a:prstGeom prst="rect">
+            <a:avLst/>
+          </a:prstGeom>
+          <a:solidFill>
+            <a:srgbClr val="43CEEF"/>
+          </a:solidFill>
+          <a:ln>
+            <a:noFill/>
+          </a:ln>
+        </p:spPr>
+        <p:style>
+          <a:lnRef idx="1">
+            <a:schemeClr val="accent1"/>
+          </a:lnRef>
+          <a:fillRef idx="3">
+            <a:schemeClr val="accent1"/>
+          </a:fillRef>
+          <a:effectRef idx="2">
+            <a:schemeClr val="accent1"/>
+          </a:effectRef>
+          <a:fontRef idx="minor">
+            <a:schemeClr val="lt1"/>
+          </a:fontRef>
+        </p:style>
+        <p:txBody>
+          <a:bodyPr rtlCol="0" anchor="ctr"/>
+          <a:lstStyle/>
+          <a:p>
+            <a:pPr algn="ctr"/>
+          </a:p>
+        </p:txBody>
+      </p:sp>
+    </p:spTree>
+  </p:cSld>
+  <p:clrMapOvr>
+    <a:masterClrMapping/>
+  </p:clrMapOvr>
+</p:sld>
+</file>
+
+<file path=ppt/slides/slide35.xml><?xml version="1.0" encoding="utf-8"?>
+<p:sld xmlns:a="http://schemas.openxmlformats.org/drawingml/2006/main" xmlns:p="http://schemas.openxmlformats.org/presentationml/2006/main" xmlns:r="http://schemas.openxmlformats.org/officeDocument/2006/relationships">
+  <p:cSld>
+    <p:bg>
+      <p:bgPr>
+        <a:solidFill>
+          <a:srgbClr val="071E35"/>
+        </a:solidFill>
+        <a:effectLst/>
+      </p:bgPr>
+    </p:bg>
+    <p:spTree>
+      <p:nvGrpSpPr>
+        <p:cNvPr id="1" name=""/>
+        <p:cNvGrpSpPr/>
+        <p:nvPr/>
+      </p:nvGrpSpPr>
+      <p:grpSpPr/>
+      <p:sp>
+        <p:nvSpPr>
+          <p:cNvPr id="2" name="TextBox 1"/>
+          <p:cNvSpPr txBox="1"/>
+          <p:nvPr/>
+        </p:nvSpPr>
+        <p:spPr>
+          <a:xfrm>
+            <a:off x="502920" y="256032"/>
+            <a:ext cx="4572000" cy="274320"/>
+          </a:xfrm>
+          <a:prstGeom prst="rect">
+            <a:avLst/>
+          </a:prstGeom>
+          <a:noFill/>
+        </p:spPr>
+        <p:txBody>
+          <a:bodyPr wrap="square" lIns="0" rIns="0" tIns="0" bIns="0">
+            <a:spAutoFit/>
+          </a:bodyPr>
+          <a:lstStyle/>
+          <a:p>
+            <a:pPr>
+              <a:spcAft>
+                <a:spcPts val="1000"/>
+              </a:spcAft>
+              <a:defRPr sz="1300" b="1">
+                <a:solidFill>
+                  <a:srgbClr val="43CEEF"/>
+                </a:solidFill>
+                <a:latin typeface="Aptos"/>
+              </a:defRPr>
+            </a:pPr>
+            <a:r>
+              <a:t>AZUL / SMARTCARGO</a:t>
+            </a:r>
+          </a:p>
+        </p:txBody>
+      </p:sp>
+      <p:sp>
+        <p:nvSpPr>
+          <p:cNvPr id="3" name="TextBox 2"/>
+          <p:cNvSpPr txBox="1"/>
+          <p:nvPr/>
+        </p:nvSpPr>
+        <p:spPr>
+          <a:xfrm>
+            <a:off x="10149840" y="256032"/>
+            <a:ext cx="3931920" cy="274320"/>
+          </a:xfrm>
+          <a:prstGeom prst="rect">
+            <a:avLst/>
+          </a:prstGeom>
+          <a:noFill/>
+        </p:spPr>
+        <p:txBody>
+          <a:bodyPr wrap="square" lIns="0" rIns="0" tIns="0" bIns="0">
+            <a:spAutoFit/>
+          </a:bodyPr>
+          <a:lstStyle/>
+          <a:p>
+            <a:pPr>
+              <a:spcAft>
+                <a:spcPts val="1000"/>
+              </a:spcAft>
+              <a:defRPr sz="1000" b="0">
+                <a:solidFill>
+                  <a:srgbClr val="A6BDCF"/>
+                </a:solidFill>
+                <a:latin typeface="Aptos"/>
+              </a:defRPr>
+            </a:pPr>
+            <a:r>
+              <a:t>FIAP  +  AZUL LOGÍSTICA  /  SPRINT 1</a:t>
+            </a:r>
+          </a:p>
+        </p:txBody>
+      </p:sp>
+      <p:sp>
+        <p:nvSpPr>
+          <p:cNvPr id="4" name="TextBox 3"/>
+          <p:cNvSpPr txBox="1"/>
+          <p:nvPr/>
+        </p:nvSpPr>
+        <p:spPr>
+          <a:xfrm>
+            <a:off x="640080" y="1143000"/>
+            <a:ext cx="13258800" cy="1005840"/>
+          </a:xfrm>
+          <a:prstGeom prst="rect">
+            <a:avLst/>
+          </a:prstGeom>
+          <a:noFill/>
+        </p:spPr>
+        <p:txBody>
+          <a:bodyPr wrap="square" lIns="0" rIns="0" tIns="0" bIns="0">
+            <a:spAutoFit/>
+          </a:bodyPr>
+          <a:lstStyle/>
+          <a:p>
+            <a:pPr>
+              <a:spcAft>
+                <a:spcPts val="1000"/>
+              </a:spcAft>
+              <a:defRPr sz="3400" b="1">
+                <a:solidFill>
+                  <a:srgbClr val="FFFFFF"/>
+                </a:solidFill>
+                <a:latin typeface="Aptos"/>
+              </a:defRPr>
+            </a:pPr>
+            <a:r>
+              <a:t>Proposta de valor</a:t>
+            </a:r>
+          </a:p>
+        </p:txBody>
+      </p:sp>
+      <p:sp>
+        <p:nvSpPr>
+          <p:cNvPr id="5" name="TextBox 4"/>
+          <p:cNvSpPr txBox="1"/>
+          <p:nvPr/>
+        </p:nvSpPr>
+        <p:spPr>
+          <a:xfrm>
+            <a:off x="685800" y="2331720"/>
+            <a:ext cx="12984480" cy="822960"/>
+          </a:xfrm>
+          <a:prstGeom prst="rect">
+            <a:avLst/>
+          </a:prstGeom>
+          <a:noFill/>
+        </p:spPr>
+        <p:txBody>
+          <a:bodyPr wrap="square" lIns="0" rIns="0" tIns="0" bIns="0">
+            <a:spAutoFit/>
+          </a:bodyPr>
+          <a:lstStyle/>
+          <a:p>
+            <a:pPr>
+              <a:spcAft>
+                <a:spcPts val="1000"/>
+              </a:spcAft>
+              <a:defRPr sz="2100" b="0">
+                <a:solidFill>
+                  <a:srgbClr val="A6BDCF"/>
+                </a:solidFill>
+                <a:latin typeface="Aptos"/>
+              </a:defRPr>
+            </a:pPr>
+            <a:r>
+              <a:t>Apoiar a decisão certa, no momento certo, com o espaço disponível.</a:t>
+            </a:r>
+          </a:p>
+        </p:txBody>
+      </p:sp>
+      <p:sp>
+        <p:nvSpPr>
+          <p:cNvPr id="6" name="TextBox 5"/>
+          <p:cNvSpPr txBox="1"/>
+          <p:nvPr/>
+        </p:nvSpPr>
+        <p:spPr>
+          <a:xfrm>
+            <a:off x="502920" y="7808975"/>
+            <a:ext cx="10972800" cy="228600"/>
+          </a:xfrm>
+          <a:prstGeom prst="rect">
+            <a:avLst/>
+          </a:prstGeom>
+          <a:noFill/>
+        </p:spPr>
+        <p:txBody>
+          <a:bodyPr wrap="square" lIns="0" rIns="0" tIns="0" bIns="0">
+            <a:spAutoFit/>
+          </a:bodyPr>
+          <a:lstStyle/>
+          <a:p>
+            <a:pPr>
+              <a:spcAft>
+                <a:spcPts val="1000"/>
+              </a:spcAft>
+              <a:defRPr sz="900" b="0">
+                <a:solidFill>
+                  <a:srgbClr val="A6BDCF"/>
+                </a:solidFill>
+                <a:latin typeface="Aptos"/>
+              </a:defRPr>
+            </a:pPr>
+            <a:r>
+              <a:t>PROTÓTIPO ACADÊMICO   /   HIPÓTESES DE NEGÓCIO A VALIDAR</a:t>
+            </a:r>
+          </a:p>
+        </p:txBody>
+      </p:sp>
+      <p:sp>
+        <p:nvSpPr>
+          <p:cNvPr id="7" name="Rounded Rectangle 6"/>
+          <p:cNvSpPr/>
+          <p:nvPr/>
+        </p:nvSpPr>
+        <p:spPr>
+          <a:xfrm>
+            <a:off x="685800" y="3566160"/>
+            <a:ext cx="4251960" cy="3474720"/>
+          </a:xfrm>
+          <a:prstGeom prst="roundRect">
+            <a:avLst>
+              <a:gd name="adj" fmla="val 8000"/>
+            </a:avLst>
+          </a:prstGeom>
+          <a:solidFill>
+            <a:srgbClr val="10314B"/>
+          </a:solidFill>
+          <a:ln>
+            <a:noFill/>
+          </a:ln>
+        </p:spPr>
+        <p:style>
+          <a:lnRef idx="1">
+            <a:schemeClr val="accent1"/>
+          </a:lnRef>
+          <a:fillRef idx="3">
+            <a:schemeClr val="accent1"/>
+          </a:fillRef>
+          <a:effectRef idx="2">
+            <a:schemeClr val="accent1"/>
+          </a:effectRef>
+          <a:fontRef idx="minor">
+            <a:schemeClr val="lt1"/>
+          </a:fontRef>
+        </p:style>
+        <p:txBody>
+          <a:bodyPr rtlCol="0" anchor="ctr"/>
+          <a:lstStyle/>
+          <a:p>
+            <a:pPr algn="ctr"/>
+          </a:p>
+        </p:txBody>
+      </p:sp>
+      <p:sp>
+        <p:nvSpPr>
+          <p:cNvPr id="8" name="TextBox 7"/>
+          <p:cNvSpPr txBox="1"/>
+          <p:nvPr/>
+        </p:nvSpPr>
+        <p:spPr>
+          <a:xfrm>
+            <a:off x="914400" y="3794760"/>
+            <a:ext cx="914400" cy="502920"/>
+          </a:xfrm>
+          <a:prstGeom prst="rect">
+            <a:avLst/>
+          </a:prstGeom>
+          <a:noFill/>
+        </p:spPr>
+        <p:txBody>
+          <a:bodyPr wrap="square" lIns="0" rIns="0" tIns="0" bIns="0">
+            <a:spAutoFit/>
+          </a:bodyPr>
+          <a:lstStyle/>
+          <a:p>
+            <a:pPr>
+              <a:spcAft>
+                <a:spcPts val="1000"/>
+              </a:spcAft>
+              <a:defRPr sz="2900" b="1">
+                <a:solidFill>
+                  <a:srgbClr val="43CEEF"/>
+                </a:solidFill>
+                <a:latin typeface="Aptos"/>
+              </a:defRPr>
+            </a:pPr>
+            <a:r>
+              <a:t>01</a:t>
+            </a:r>
+          </a:p>
+        </p:txBody>
+      </p:sp>
+      <p:sp>
+        <p:nvSpPr>
+          <p:cNvPr id="9" name="TextBox 8"/>
+          <p:cNvSpPr txBox="1"/>
+          <p:nvPr/>
+        </p:nvSpPr>
+        <p:spPr>
+          <a:xfrm>
+            <a:off x="914400" y="4572000"/>
+            <a:ext cx="3749039" cy="777240"/>
+          </a:xfrm>
+          <a:prstGeom prst="rect">
+            <a:avLst/>
+          </a:prstGeom>
+          <a:noFill/>
+        </p:spPr>
+        <p:txBody>
+          <a:bodyPr wrap="square" lIns="0" rIns="0" tIns="0" bIns="0">
+            <a:spAutoFit/>
+          </a:bodyPr>
+          <a:lstStyle/>
+          <a:p>
+            <a:pPr>
+              <a:spcAft>
+                <a:spcPts val="1000"/>
+              </a:spcAft>
+              <a:defRPr sz="2300" b="1">
+                <a:solidFill>
+                  <a:srgbClr val="FFFFFF"/>
+                </a:solidFill>
+                <a:latin typeface="Aptos"/>
+              </a:defRPr>
+            </a:pPr>
+            <a:r>
+              <a:t>Prioridade explicável</a:t>
+            </a:r>
+          </a:p>
+        </p:txBody>
+      </p:sp>
+      <p:sp>
+        <p:nvSpPr>
+          <p:cNvPr id="10" name="TextBox 9"/>
+          <p:cNvSpPr txBox="1"/>
+          <p:nvPr/>
+        </p:nvSpPr>
+        <p:spPr>
+          <a:xfrm>
+            <a:off x="914400" y="5577840"/>
+            <a:ext cx="3749039" cy="1234440"/>
+          </a:xfrm>
+          <a:prstGeom prst="rect">
+            <a:avLst/>
+          </a:prstGeom>
+          <a:noFill/>
+        </p:spPr>
+        <p:txBody>
+          <a:bodyPr wrap="square" lIns="0" rIns="0" tIns="0" bIns="0">
+            <a:spAutoFit/>
+          </a:bodyPr>
+          <a:lstStyle/>
+          <a:p>
+            <a:pPr>
+              <a:spcAft>
+                <a:spcPts val="1000"/>
+              </a:spcAft>
+              <a:defRPr sz="2000" b="0">
+                <a:solidFill>
+                  <a:srgbClr val="A6BDCF"/>
+                </a:solidFill>
+                <a:latin typeface="Aptos"/>
+              </a:defRPr>
+            </a:pPr>
+            <a:r>
+              <a:t>Prazo menos estimativa define a urgência e mostra sua justificativa.</a:t>
+            </a:r>
+          </a:p>
+        </p:txBody>
+      </p:sp>
+      <p:sp>
+        <p:nvSpPr>
+          <p:cNvPr id="11" name="Rounded Rectangle 10"/>
+          <p:cNvSpPr/>
+          <p:nvPr/>
+        </p:nvSpPr>
+        <p:spPr>
+          <a:xfrm>
+            <a:off x="5257800" y="3566160"/>
+            <a:ext cx="4251960" cy="3474720"/>
+          </a:xfrm>
+          <a:prstGeom prst="roundRect">
+            <a:avLst>
+              <a:gd name="adj" fmla="val 8000"/>
+            </a:avLst>
+          </a:prstGeom>
+          <a:solidFill>
+            <a:srgbClr val="10314B"/>
+          </a:solidFill>
+          <a:ln>
+            <a:noFill/>
+          </a:ln>
+        </p:spPr>
+        <p:style>
+          <a:lnRef idx="1">
+            <a:schemeClr val="accent1"/>
+          </a:lnRef>
+          <a:fillRef idx="3">
+            <a:schemeClr val="accent1"/>
+          </a:fillRef>
+          <a:effectRef idx="2">
+            <a:schemeClr val="accent1"/>
+          </a:effectRef>
+          <a:fontRef idx="minor">
+            <a:schemeClr val="lt1"/>
+          </a:fontRef>
+        </p:style>
+        <p:txBody>
+          <a:bodyPr rtlCol="0" anchor="ctr"/>
+          <a:lstStyle/>
+          <a:p>
+            <a:pPr algn="ctr"/>
+          </a:p>
+        </p:txBody>
+      </p:sp>
+      <p:sp>
+        <p:nvSpPr>
+          <p:cNvPr id="12" name="TextBox 11"/>
+          <p:cNvSpPr txBox="1"/>
+          <p:nvPr/>
+        </p:nvSpPr>
+        <p:spPr>
+          <a:xfrm>
+            <a:off x="5486400" y="3794760"/>
+            <a:ext cx="914400" cy="502920"/>
+          </a:xfrm>
+          <a:prstGeom prst="rect">
+            <a:avLst/>
+          </a:prstGeom>
+          <a:noFill/>
+        </p:spPr>
+        <p:txBody>
+          <a:bodyPr wrap="square" lIns="0" rIns="0" tIns="0" bIns="0">
+            <a:spAutoFit/>
+          </a:bodyPr>
+          <a:lstStyle/>
+          <a:p>
+            <a:pPr>
+              <a:spcAft>
+                <a:spcPts val="1000"/>
+              </a:spcAft>
+              <a:defRPr sz="2900" b="1">
+                <a:solidFill>
+                  <a:srgbClr val="43CEEF"/>
+                </a:solidFill>
+                <a:latin typeface="Aptos"/>
+              </a:defRPr>
+            </a:pPr>
+            <a:r>
+              <a:t>02</a:t>
+            </a:r>
+          </a:p>
+        </p:txBody>
+      </p:sp>
+      <p:sp>
+        <p:nvSpPr>
+          <p:cNvPr id="13" name="TextBox 12"/>
+          <p:cNvSpPr txBox="1"/>
+          <p:nvPr/>
+        </p:nvSpPr>
+        <p:spPr>
+          <a:xfrm>
+            <a:off x="5486400" y="4572000"/>
+            <a:ext cx="3749039" cy="777240"/>
+          </a:xfrm>
+          <a:prstGeom prst="rect">
+            <a:avLst/>
+          </a:prstGeom>
+          <a:noFill/>
+        </p:spPr>
+        <p:txBody>
+          <a:bodyPr wrap="square" lIns="0" rIns="0" tIns="0" bIns="0">
+            <a:spAutoFit/>
+          </a:bodyPr>
+          <a:lstStyle/>
+          <a:p>
+            <a:pPr>
+              <a:spcAft>
+                <a:spcPts val="1000"/>
+              </a:spcAft>
+              <a:defRPr sz="2300" b="1">
+                <a:solidFill>
+                  <a:srgbClr val="FFFFFF"/>
+                </a:solidFill>
+                <a:latin typeface="Aptos"/>
+              </a:defRPr>
+            </a:pPr>
+            <a:r>
+              <a:t>Capacidade visível</a:t>
+            </a:r>
+          </a:p>
+        </p:txBody>
+      </p:sp>
+      <p:sp>
+        <p:nvSpPr>
+          <p:cNvPr id="14" name="TextBox 13"/>
+          <p:cNvSpPr txBox="1"/>
+          <p:nvPr/>
+        </p:nvSpPr>
+        <p:spPr>
+          <a:xfrm>
+            <a:off x="5486400" y="5577840"/>
+            <a:ext cx="3749039" cy="1234440"/>
+          </a:xfrm>
+          <a:prstGeom prst="rect">
+            <a:avLst/>
+          </a:prstGeom>
+          <a:noFill/>
+        </p:spPr>
+        <p:txBody>
+          <a:bodyPr wrap="square" lIns="0" rIns="0" tIns="0" bIns="0">
+            <a:spAutoFit/>
+          </a:bodyPr>
+          <a:lstStyle/>
+          <a:p>
+            <a:pPr>
+              <a:spcAft>
+                <a:spcPts val="1000"/>
+              </a:spcAft>
+              <a:defRPr sz="2000" b="0">
+                <a:solidFill>
+                  <a:srgbClr val="A6BDCF"/>
+                </a:solidFill>
+                <a:latin typeface="Aptos"/>
+              </a:defRPr>
+            </a:pPr>
+            <a:r>
+              <a:t>O operador simula a alocação antes de ocupar posições.</a:t>
+            </a:r>
+          </a:p>
+        </p:txBody>
+      </p:sp>
+      <p:sp>
+        <p:nvSpPr>
+          <p:cNvPr id="15" name="Rounded Rectangle 14"/>
+          <p:cNvSpPr/>
+          <p:nvPr/>
+        </p:nvSpPr>
+        <p:spPr>
+          <a:xfrm>
+            <a:off x="9829800" y="3566160"/>
+            <a:ext cx="4251960" cy="3474720"/>
+          </a:xfrm>
+          <a:prstGeom prst="roundRect">
+            <a:avLst>
+              <a:gd name="adj" fmla="val 8000"/>
+            </a:avLst>
+          </a:prstGeom>
+          <a:solidFill>
+            <a:srgbClr val="10314B"/>
+          </a:solidFill>
+          <a:ln>
+            <a:noFill/>
+          </a:ln>
+        </p:spPr>
+        <p:style>
+          <a:lnRef idx="1">
+            <a:schemeClr val="accent1"/>
+          </a:lnRef>
+          <a:fillRef idx="3">
+            <a:schemeClr val="accent1"/>
+          </a:fillRef>
+          <a:effectRef idx="2">
+            <a:schemeClr val="accent1"/>
+          </a:effectRef>
+          <a:fontRef idx="minor">
+            <a:schemeClr val="lt1"/>
+          </a:fontRef>
+        </p:style>
+        <p:txBody>
+          <a:bodyPr rtlCol="0" anchor="ctr"/>
+          <a:lstStyle/>
+          <a:p>
+            <a:pPr algn="ctr"/>
+          </a:p>
+        </p:txBody>
+      </p:sp>
+      <p:sp>
+        <p:nvSpPr>
+          <p:cNvPr id="16" name="TextBox 15"/>
+          <p:cNvSpPr txBox="1"/>
+          <p:nvPr/>
+        </p:nvSpPr>
+        <p:spPr>
+          <a:xfrm>
+            <a:off x="10058400" y="3794760"/>
+            <a:ext cx="914400" cy="502920"/>
+          </a:xfrm>
+          <a:prstGeom prst="rect">
+            <a:avLst/>
+          </a:prstGeom>
+          <a:noFill/>
+        </p:spPr>
+        <p:txBody>
+          <a:bodyPr wrap="square" lIns="0" rIns="0" tIns="0" bIns="0">
+            <a:spAutoFit/>
+          </a:bodyPr>
+          <a:lstStyle/>
+          <a:p>
+            <a:pPr>
+              <a:spcAft>
+                <a:spcPts val="1000"/>
+              </a:spcAft>
+              <a:defRPr sz="2900" b="1">
+                <a:solidFill>
+                  <a:srgbClr val="43CEEF"/>
+                </a:solidFill>
+                <a:latin typeface="Aptos"/>
+              </a:defRPr>
+            </a:pPr>
+            <a:r>
+              <a:t>03</a:t>
+            </a:r>
+          </a:p>
+        </p:txBody>
+      </p:sp>
+      <p:sp>
+        <p:nvSpPr>
+          <p:cNvPr id="17" name="TextBox 16"/>
+          <p:cNvSpPr txBox="1"/>
+          <p:nvPr/>
+        </p:nvSpPr>
+        <p:spPr>
+          <a:xfrm>
+            <a:off x="10058400" y="4572000"/>
+            <a:ext cx="3749039" cy="777240"/>
+          </a:xfrm>
+          <a:prstGeom prst="rect">
+            <a:avLst/>
+          </a:prstGeom>
+          <a:noFill/>
+        </p:spPr>
+        <p:txBody>
+          <a:bodyPr wrap="square" lIns="0" rIns="0" tIns="0" bIns="0">
+            <a:spAutoFit/>
+          </a:bodyPr>
+          <a:lstStyle/>
+          <a:p>
+            <a:pPr>
+              <a:spcAft>
+                <a:spcPts val="1000"/>
+              </a:spcAft>
+              <a:defRPr sz="2300" b="1">
+                <a:solidFill>
+                  <a:srgbClr val="FFFFFF"/>
+                </a:solidFill>
+                <a:latin typeface="Aptos"/>
+              </a:defRPr>
+            </a:pPr>
+            <a:r>
+              <a:t>Rastreabilidade</a:t>
+            </a:r>
+          </a:p>
+        </p:txBody>
+      </p:sp>
+      <p:sp>
+        <p:nvSpPr>
+          <p:cNvPr id="18" name="TextBox 17"/>
+          <p:cNvSpPr txBox="1"/>
+          <p:nvPr/>
+        </p:nvSpPr>
+        <p:spPr>
+          <a:xfrm>
+            <a:off x="10058400" y="5577840"/>
+            <a:ext cx="3749039" cy="1234440"/>
+          </a:xfrm>
+          <a:prstGeom prst="rect">
+            <a:avLst/>
+          </a:prstGeom>
+          <a:noFill/>
+        </p:spPr>
+        <p:txBody>
+          <a:bodyPr wrap="square" lIns="0" rIns="0" tIns="0" bIns="0">
+            <a:spAutoFit/>
+          </a:bodyPr>
+          <a:lstStyle/>
+          <a:p>
+            <a:pPr>
+              <a:spcAft>
+                <a:spcPts val="1000"/>
+              </a:spcAft>
+              <a:defRPr sz="2000" b="0">
+                <a:solidFill>
+                  <a:srgbClr val="A6BDCF"/>
+                </a:solidFill>
+                <a:latin typeface="Aptos"/>
+              </a:defRPr>
+            </a:pPr>
+            <a:r>
+              <a:t>Etapas, responsáveis e ocorrências compõem o histórico operacional.</a:t>
+            </a:r>
+          </a:p>
+        </p:txBody>
+      </p:sp>
+      <p:sp>
+        <p:nvSpPr>
+          <p:cNvPr id="19" name="TextBox 18"/>
+          <p:cNvSpPr txBox="1"/>
+          <p:nvPr/>
+        </p:nvSpPr>
+        <p:spPr>
+          <a:xfrm>
+            <a:off x="13213080" y="7772400"/>
+            <a:ext cx="914400" cy="274320"/>
+          </a:xfrm>
+          <a:prstGeom prst="rect">
+            <a:avLst/>
+          </a:prstGeom>
+          <a:noFill/>
+        </p:spPr>
+        <p:txBody>
+          <a:bodyPr wrap="square" lIns="0" rIns="0" tIns="0" bIns="0">
+            <a:spAutoFit/>
+          </a:bodyPr>
+          <a:lstStyle/>
+          <a:p>
+            <a:pPr>
+              <a:spcAft>
+                <a:spcPts val="1000"/>
+              </a:spcAft>
+              <a:defRPr sz="1100" b="0">
+                <a:solidFill>
+                  <a:srgbClr val="A6BDCF"/>
+                </a:solidFill>
+                <a:latin typeface="Aptos"/>
+              </a:defRPr>
+            </a:pPr>
+            <a:r>
+              <a:t>05 / 41</a:t>
+            </a:r>
+          </a:p>
+        </p:txBody>
+      </p:sp>
+      <p:sp>
+        <p:nvSpPr>
+          <p:cNvPr id="20" name="Rectangle 19"/>
+          <p:cNvSpPr/>
+          <p:nvPr/>
+        </p:nvSpPr>
+        <p:spPr>
+          <a:xfrm>
+            <a:off x="502920" y="8156448"/>
+            <a:ext cx="1661531" cy="41148"/>
+          </a:xfrm>
+          <a:prstGeom prst="rect">
+            <a:avLst/>
+          </a:prstGeom>
+          <a:solidFill>
+            <a:srgbClr val="43CEEF"/>
+          </a:solidFill>
+          <a:ln>
+            <a:noFill/>
+          </a:ln>
+        </p:spPr>
+        <p:style>
+          <a:lnRef idx="1">
+            <a:schemeClr val="accent1"/>
+          </a:lnRef>
+          <a:fillRef idx="3">
+            <a:schemeClr val="accent1"/>
+          </a:fillRef>
+          <a:effectRef idx="2">
+            <a:schemeClr val="accent1"/>
+          </a:effectRef>
+          <a:fontRef idx="minor">
+            <a:schemeClr val="lt1"/>
+          </a:fontRef>
+        </p:style>
+        <p:txBody>
+          <a:bodyPr rtlCol="0" anchor="ctr"/>
+          <a:lstStyle/>
+          <a:p>
+            <a:pPr algn="ctr"/>
+          </a:p>
+        </p:txBody>
+      </p:sp>
+    </p:spTree>
+  </p:cSld>
+  <p:clrMapOvr>
+    <a:masterClrMapping/>
+  </p:clrMapOvr>
+</p:sld>
+</file>
+
+<file path=ppt/slides/slide36.xml><?xml version="1.0" encoding="utf-8"?>
+<p:sld xmlns:a="http://schemas.openxmlformats.org/drawingml/2006/main" xmlns:p="http://schemas.openxmlformats.org/presentationml/2006/main" xmlns:r="http://schemas.openxmlformats.org/officeDocument/2006/relationships">
+  <p:cSld>
+    <p:bg>
+      <p:bgPr>
+        <a:solidFill>
+          <a:srgbClr val="071E35"/>
+        </a:solidFill>
+        <a:effectLst/>
+      </p:bgPr>
+    </p:bg>
+    <p:spTree>
+      <p:nvGrpSpPr>
+        <p:cNvPr id="1" name=""/>
+        <p:cNvGrpSpPr/>
+        <p:nvPr/>
+      </p:nvGrpSpPr>
+      <p:grpSpPr/>
+      <p:sp>
+        <p:nvSpPr>
+          <p:cNvPr id="2" name="TextBox 1"/>
+          <p:cNvSpPr txBox="1"/>
+          <p:nvPr/>
+        </p:nvSpPr>
+        <p:spPr>
+          <a:xfrm>
+            <a:off x="502920" y="256032"/>
+            <a:ext cx="4572000" cy="274320"/>
+          </a:xfrm>
+          <a:prstGeom prst="rect">
+            <a:avLst/>
+          </a:prstGeom>
+          <a:noFill/>
+        </p:spPr>
+        <p:txBody>
+          <a:bodyPr wrap="square" lIns="0" rIns="0" tIns="0" bIns="0">
+            <a:spAutoFit/>
+          </a:bodyPr>
+          <a:lstStyle/>
+          <a:p>
+            <a:pPr>
+              <a:spcAft>
+                <a:spcPts val="1000"/>
+              </a:spcAft>
+              <a:defRPr sz="1300" b="1">
+                <a:solidFill>
+                  <a:srgbClr val="43CEEF"/>
+                </a:solidFill>
+                <a:latin typeface="Aptos"/>
+              </a:defRPr>
+            </a:pPr>
+            <a:r>
+              <a:t>AZUL / SMARTCARGO</a:t>
+            </a:r>
+          </a:p>
+        </p:txBody>
+      </p:sp>
+      <p:sp>
+        <p:nvSpPr>
+          <p:cNvPr id="3" name="TextBox 2"/>
+          <p:cNvSpPr txBox="1"/>
+          <p:nvPr/>
+        </p:nvSpPr>
+        <p:spPr>
+          <a:xfrm>
+            <a:off x="10149840" y="256032"/>
+            <a:ext cx="3931920" cy="274320"/>
+          </a:xfrm>
+          <a:prstGeom prst="rect">
+            <a:avLst/>
+          </a:prstGeom>
+          <a:noFill/>
+        </p:spPr>
+        <p:txBody>
+          <a:bodyPr wrap="square" lIns="0" rIns="0" tIns="0" bIns="0">
+            <a:spAutoFit/>
+          </a:bodyPr>
+          <a:lstStyle/>
+          <a:p>
+            <a:pPr>
+              <a:spcAft>
+                <a:spcPts val="1000"/>
+              </a:spcAft>
+              <a:defRPr sz="1000" b="0">
+                <a:solidFill>
+                  <a:srgbClr val="A6BDCF"/>
+                </a:solidFill>
+                <a:latin typeface="Aptos"/>
+              </a:defRPr>
+            </a:pPr>
+            <a:r>
+              <a:t>FIAP  +  AZUL LOGÍSTICA  /  SPRINT 1</a:t>
+            </a:r>
+          </a:p>
+        </p:txBody>
+      </p:sp>
+      <p:sp>
+        <p:nvSpPr>
+          <p:cNvPr id="4" name="TextBox 3"/>
+          <p:cNvSpPr txBox="1"/>
+          <p:nvPr/>
+        </p:nvSpPr>
+        <p:spPr>
+          <a:xfrm>
+            <a:off x="640080" y="1143000"/>
+            <a:ext cx="13258800" cy="1005840"/>
+          </a:xfrm>
+          <a:prstGeom prst="rect">
+            <a:avLst/>
+          </a:prstGeom>
+          <a:noFill/>
+        </p:spPr>
+        <p:txBody>
+          <a:bodyPr wrap="square" lIns="0" rIns="0" tIns="0" bIns="0">
+            <a:spAutoFit/>
+          </a:bodyPr>
+          <a:lstStyle/>
+          <a:p>
+            <a:pPr>
+              <a:spcAft>
+                <a:spcPts val="1000"/>
+              </a:spcAft>
+              <a:defRPr sz="3400" b="1">
+                <a:solidFill>
+                  <a:srgbClr val="FFFFFF"/>
+                </a:solidFill>
+                <a:latin typeface="Aptos"/>
+              </a:defRPr>
+            </a:pPr>
+            <a:r>
+              <a:t>Como a proposta muda a decisão</a:t>
+            </a:r>
+          </a:p>
+        </p:txBody>
+      </p:sp>
+      <p:sp>
+        <p:nvSpPr>
+          <p:cNvPr id="5" name="TextBox 4"/>
+          <p:cNvSpPr txBox="1"/>
+          <p:nvPr/>
+        </p:nvSpPr>
+        <p:spPr>
+          <a:xfrm>
+            <a:off x="685800" y="2331720"/>
+            <a:ext cx="12984480" cy="822960"/>
+          </a:xfrm>
+          <a:prstGeom prst="rect">
+            <a:avLst/>
+          </a:prstGeom>
+          <a:noFill/>
+        </p:spPr>
+        <p:txBody>
+          <a:bodyPr wrap="square" lIns="0" rIns="0" tIns="0" bIns="0">
+            <a:spAutoFit/>
+          </a:bodyPr>
+          <a:lstStyle/>
+          <a:p>
+            <a:pPr>
+              <a:spcAft>
+                <a:spcPts val="1000"/>
+              </a:spcAft>
+              <a:defRPr sz="2100" b="0">
+                <a:solidFill>
+                  <a:srgbClr val="A6BDCF"/>
+                </a:solidFill>
+                <a:latin typeface="Aptos"/>
+              </a:defRPr>
+            </a:pPr>
+            <a:r>
+              <a:t>Comparação conceitual para validar em campo; não é um diagnóstico do processo atual.</a:t>
+            </a:r>
+          </a:p>
+        </p:txBody>
+      </p:sp>
+      <p:sp>
+        <p:nvSpPr>
+          <p:cNvPr id="6" name="TextBox 5"/>
+          <p:cNvSpPr txBox="1"/>
+          <p:nvPr/>
+        </p:nvSpPr>
+        <p:spPr>
+          <a:xfrm>
+            <a:off x="502920" y="7808975"/>
+            <a:ext cx="10972800" cy="228600"/>
+          </a:xfrm>
+          <a:prstGeom prst="rect">
+            <a:avLst/>
+          </a:prstGeom>
+          <a:noFill/>
+        </p:spPr>
+        <p:txBody>
+          <a:bodyPr wrap="square" lIns="0" rIns="0" tIns="0" bIns="0">
+            <a:spAutoFit/>
+          </a:bodyPr>
+          <a:lstStyle/>
+          <a:p>
+            <a:pPr>
+              <a:spcAft>
+                <a:spcPts val="1000"/>
+              </a:spcAft>
+              <a:defRPr sz="900" b="0">
+                <a:solidFill>
+                  <a:srgbClr val="A6BDCF"/>
+                </a:solidFill>
+                <a:latin typeface="Aptos"/>
+              </a:defRPr>
+            </a:pPr>
+            <a:r>
+              <a:t>PROTÓTIPO ACADÊMICO   /   HIPÓTESES DE NEGÓCIO A VALIDAR</a:t>
+            </a:r>
+          </a:p>
+        </p:txBody>
+      </p:sp>
+      <p:sp>
+        <p:nvSpPr>
+          <p:cNvPr id="7" name="Rounded Rectangle 6"/>
+          <p:cNvSpPr/>
+          <p:nvPr/>
+        </p:nvSpPr>
+        <p:spPr>
+          <a:xfrm>
+            <a:off x="685800" y="3429000"/>
+            <a:ext cx="6035040" cy="960120"/>
+          </a:xfrm>
+          <a:prstGeom prst="roundRect">
+            <a:avLst>
+              <a:gd name="adj" fmla="val 8000"/>
+            </a:avLst>
+          </a:prstGeom>
+          <a:solidFill>
+            <a:srgbClr val="10314B"/>
+          </a:solidFill>
+          <a:ln>
+            <a:noFill/>
+          </a:ln>
+        </p:spPr>
+        <p:style>
+          <a:lnRef idx="1">
+            <a:schemeClr val="accent1"/>
+          </a:lnRef>
+          <a:fillRef idx="3">
+            <a:schemeClr val="accent1"/>
+          </a:fillRef>
+          <a:effectRef idx="2">
+            <a:schemeClr val="accent1"/>
+          </a:effectRef>
+          <a:fontRef idx="minor">
+            <a:schemeClr val="lt1"/>
+          </a:fontRef>
+        </p:style>
+        <p:txBody>
+          <a:bodyPr rtlCol="0" anchor="ctr"/>
+          <a:lstStyle/>
+          <a:p>
+            <a:pPr algn="ctr"/>
+          </a:p>
+        </p:txBody>
+      </p:sp>
+      <p:sp>
+        <p:nvSpPr>
+          <p:cNvPr id="8" name="Rounded Rectangle 7"/>
+          <p:cNvSpPr/>
+          <p:nvPr/>
+        </p:nvSpPr>
+        <p:spPr>
+          <a:xfrm>
+            <a:off x="7406640" y="3429000"/>
+            <a:ext cx="6492240" cy="960120"/>
+          </a:xfrm>
+          <a:prstGeom prst="roundRect">
+            <a:avLst>
+              <a:gd name="adj" fmla="val 8000"/>
+            </a:avLst>
+          </a:prstGeom>
+          <a:solidFill>
+            <a:srgbClr val="10314B"/>
+          </a:solidFill>
+          <a:ln>
+            <a:noFill/>
+          </a:ln>
+        </p:spPr>
+        <p:style>
+          <a:lnRef idx="1">
+            <a:schemeClr val="accent1"/>
+          </a:lnRef>
+          <a:fillRef idx="3">
+            <a:schemeClr val="accent1"/>
+          </a:fillRef>
+          <a:effectRef idx="2">
+            <a:schemeClr val="accent1"/>
+          </a:effectRef>
+          <a:fontRef idx="minor">
+            <a:schemeClr val="lt1"/>
+          </a:fontRef>
+        </p:style>
+        <p:txBody>
+          <a:bodyPr rtlCol="0" anchor="ctr"/>
+          <a:lstStyle/>
+          <a:p>
+            <a:pPr algn="ctr"/>
+          </a:p>
+        </p:txBody>
+      </p:sp>
+      <p:sp>
+        <p:nvSpPr>
+          <p:cNvPr id="9" name="TextBox 8"/>
+          <p:cNvSpPr txBox="1"/>
+          <p:nvPr/>
+        </p:nvSpPr>
+        <p:spPr>
+          <a:xfrm>
+            <a:off x="914400" y="3630168"/>
+            <a:ext cx="5486400" cy="548640"/>
+          </a:xfrm>
+          <a:prstGeom prst="rect">
+            <a:avLst/>
+          </a:prstGeom>
+          <a:noFill/>
+        </p:spPr>
+        <p:txBody>
+          <a:bodyPr wrap="square" lIns="0" rIns="0" tIns="0" bIns="0">
+            <a:spAutoFit/>
+          </a:bodyPr>
+          <a:lstStyle/>
+          <a:p>
+            <a:pPr>
+              <a:spcAft>
+                <a:spcPts val="1000"/>
+              </a:spcAft>
+              <a:defRPr sz="2200" b="0">
+                <a:solidFill>
+                  <a:srgbClr val="A6BDCF"/>
+                </a:solidFill>
+                <a:latin typeface="Aptos"/>
+              </a:defRPr>
+            </a:pPr>
+            <a:r>
+              <a:t>Urgência pouco visível</a:t>
+            </a:r>
+          </a:p>
+        </p:txBody>
+      </p:sp>
+      <p:sp>
+        <p:nvSpPr>
+          <p:cNvPr id="10" name="TextBox 9"/>
+          <p:cNvSpPr txBox="1"/>
+          <p:nvPr/>
+        </p:nvSpPr>
+        <p:spPr>
+          <a:xfrm>
+            <a:off x="6903720" y="3630168"/>
+            <a:ext cx="457200" cy="457200"/>
+          </a:xfrm>
+          <a:prstGeom prst="rect">
+            <a:avLst/>
+          </a:prstGeom>
+          <a:noFill/>
+        </p:spPr>
+        <p:txBody>
+          <a:bodyPr wrap="square" lIns="0" rIns="0" tIns="0" bIns="0">
+            <a:spAutoFit/>
+          </a:bodyPr>
+          <a:lstStyle/>
+          <a:p>
+            <a:pPr>
+              <a:spcAft>
+                <a:spcPts val="1000"/>
+              </a:spcAft>
+              <a:defRPr sz="2600" b="1">
+                <a:solidFill>
+                  <a:srgbClr val="43CEEF"/>
+                </a:solidFill>
+                <a:latin typeface="Aptos"/>
+              </a:defRPr>
+            </a:pPr>
+            <a:r>
+              <a:t>→</a:t>
+            </a:r>
+          </a:p>
+        </p:txBody>
+      </p:sp>
+      <p:sp>
+        <p:nvSpPr>
+          <p:cNvPr id="11" name="TextBox 10"/>
+          <p:cNvSpPr txBox="1"/>
+          <p:nvPr/>
+        </p:nvSpPr>
+        <p:spPr>
+          <a:xfrm>
+            <a:off x="7635240" y="3630168"/>
+            <a:ext cx="6035040" cy="548640"/>
+          </a:xfrm>
+          <a:prstGeom prst="rect">
+            <a:avLst/>
+          </a:prstGeom>
+          <a:noFill/>
+        </p:spPr>
+        <p:txBody>
+          <a:bodyPr wrap="square" lIns="0" rIns="0" tIns="0" bIns="0">
+            <a:spAutoFit/>
+          </a:bodyPr>
+          <a:lstStyle/>
+          <a:p>
+            <a:pPr>
+              <a:spcAft>
+                <a:spcPts val="1000"/>
+              </a:spcAft>
+              <a:defRPr sz="2200" b="1">
+                <a:solidFill>
+                  <a:srgbClr val="FFFFFF"/>
+                </a:solidFill>
+                <a:latin typeface="Aptos"/>
+              </a:defRPr>
+            </a:pPr>
+            <a:r>
+              <a:t>Fila com margem e justificativa</a:t>
+            </a:r>
+          </a:p>
+        </p:txBody>
+      </p:sp>
+      <p:sp>
+        <p:nvSpPr>
+          <p:cNvPr id="12" name="Rounded Rectangle 11"/>
+          <p:cNvSpPr/>
+          <p:nvPr/>
+        </p:nvSpPr>
+        <p:spPr>
+          <a:xfrm>
+            <a:off x="685800" y="4663440"/>
+            <a:ext cx="6035040" cy="960120"/>
+          </a:xfrm>
+          <a:prstGeom prst="roundRect">
+            <a:avLst>
+              <a:gd name="adj" fmla="val 8000"/>
+            </a:avLst>
+          </a:prstGeom>
+          <a:solidFill>
+            <a:srgbClr val="10314B"/>
+          </a:solidFill>
+          <a:ln>
+            <a:noFill/>
+          </a:ln>
+        </p:spPr>
+        <p:style>
+          <a:lnRef idx="1">
+            <a:schemeClr val="accent1"/>
+          </a:lnRef>
+          <a:fillRef idx="3">
+            <a:schemeClr val="accent1"/>
+          </a:fillRef>
+          <a:effectRef idx="2">
+            <a:schemeClr val="accent1"/>
+          </a:effectRef>
+          <a:fontRef idx="minor">
+            <a:schemeClr val="lt1"/>
+          </a:fontRef>
+        </p:style>
+        <p:txBody>
+          <a:bodyPr rtlCol="0" anchor="ctr"/>
+          <a:lstStyle/>
+          <a:p>
+            <a:pPr algn="ctr"/>
+          </a:p>
+        </p:txBody>
+      </p:sp>
+      <p:sp>
+        <p:nvSpPr>
+          <p:cNvPr id="13" name="Rounded Rectangle 12"/>
+          <p:cNvSpPr/>
+          <p:nvPr/>
+        </p:nvSpPr>
+        <p:spPr>
+          <a:xfrm>
+            <a:off x="7406640" y="4663440"/>
+            <a:ext cx="6492240" cy="960120"/>
+          </a:xfrm>
+          <a:prstGeom prst="roundRect">
+            <a:avLst>
+              <a:gd name="adj" fmla="val 8000"/>
+            </a:avLst>
+          </a:prstGeom>
+          <a:solidFill>
+            <a:srgbClr val="10314B"/>
+          </a:solidFill>
+          <a:ln>
+            <a:noFill/>
+          </a:ln>
+        </p:spPr>
+        <p:style>
+          <a:lnRef idx="1">
+            <a:schemeClr val="accent1"/>
+          </a:lnRef>
+          <a:fillRef idx="3">
+            <a:schemeClr val="accent1"/>
+          </a:fillRef>
+          <a:effectRef idx="2">
+            <a:schemeClr val="accent1"/>
+          </a:effectRef>
+          <a:fontRef idx="minor">
+            <a:schemeClr val="lt1"/>
+          </a:fontRef>
+        </p:style>
+        <p:txBody>
+          <a:bodyPr rtlCol="0" anchor="ctr"/>
+          <a:lstStyle/>
+          <a:p>
+            <a:pPr algn="ctr"/>
+          </a:p>
+        </p:txBody>
+      </p:sp>
+      <p:sp>
+        <p:nvSpPr>
+          <p:cNvPr id="14" name="TextBox 13"/>
+          <p:cNvSpPr txBox="1"/>
+          <p:nvPr/>
+        </p:nvSpPr>
+        <p:spPr>
+          <a:xfrm>
+            <a:off x="914400" y="4864607"/>
+            <a:ext cx="5486400" cy="548640"/>
+          </a:xfrm>
+          <a:prstGeom prst="rect">
+            <a:avLst/>
+          </a:prstGeom>
+          <a:noFill/>
+        </p:spPr>
+        <p:txBody>
+          <a:bodyPr wrap="square" lIns="0" rIns="0" tIns="0" bIns="0">
+            <a:spAutoFit/>
+          </a:bodyPr>
+          <a:lstStyle/>
+          <a:p>
+            <a:pPr>
+              <a:spcAft>
+                <a:spcPts val="1000"/>
+              </a:spcAft>
+              <a:defRPr sz="2200" b="0">
+                <a:solidFill>
+                  <a:srgbClr val="A6BDCF"/>
+                </a:solidFill>
+                <a:latin typeface="Aptos"/>
+              </a:defRPr>
+            </a:pPr>
+            <a:r>
+              <a:t>Espaço verificado tardiamente</a:t>
+            </a:r>
+          </a:p>
+        </p:txBody>
+      </p:sp>
+      <p:sp>
+        <p:nvSpPr>
+          <p:cNvPr id="15" name="TextBox 14"/>
+          <p:cNvSpPr txBox="1"/>
+          <p:nvPr/>
+        </p:nvSpPr>
+        <p:spPr>
+          <a:xfrm>
+            <a:off x="6903720" y="4864607"/>
+            <a:ext cx="457200" cy="457200"/>
+          </a:xfrm>
+          <a:prstGeom prst="rect">
+            <a:avLst/>
+          </a:prstGeom>
+          <a:noFill/>
+        </p:spPr>
+        <p:txBody>
+          <a:bodyPr wrap="square" lIns="0" rIns="0" tIns="0" bIns="0">
+            <a:spAutoFit/>
+          </a:bodyPr>
+          <a:lstStyle/>
+          <a:p>
+            <a:pPr>
+              <a:spcAft>
+                <a:spcPts val="1000"/>
+              </a:spcAft>
+              <a:defRPr sz="2600" b="1">
+                <a:solidFill>
+                  <a:srgbClr val="43CEEF"/>
+                </a:solidFill>
+                <a:latin typeface="Aptos"/>
+              </a:defRPr>
+            </a:pPr>
+            <a:r>
+              <a:t>→</a:t>
+            </a:r>
+          </a:p>
+        </p:txBody>
+      </p:sp>
+      <p:sp>
+        <p:nvSpPr>
+          <p:cNvPr id="16" name="TextBox 15"/>
+          <p:cNvSpPr txBox="1"/>
+          <p:nvPr/>
+        </p:nvSpPr>
+        <p:spPr>
+          <a:xfrm>
+            <a:off x="7635240" y="4864607"/>
+            <a:ext cx="6035040" cy="548640"/>
+          </a:xfrm>
+          <a:prstGeom prst="rect">
+            <a:avLst/>
+          </a:prstGeom>
+          <a:noFill/>
+        </p:spPr>
+        <p:txBody>
+          <a:bodyPr wrap="square" lIns="0" rIns="0" tIns="0" bIns="0">
+            <a:spAutoFit/>
+          </a:bodyPr>
+          <a:lstStyle/>
+          <a:p>
+            <a:pPr>
+              <a:spcAft>
+                <a:spcPts val="1000"/>
+              </a:spcAft>
+              <a:defRPr sz="2200" b="1">
+                <a:solidFill>
+                  <a:srgbClr val="FFFFFF"/>
+                </a:solidFill>
+                <a:latin typeface="Aptos"/>
+              </a:defRPr>
+            </a:pPr>
+            <a:r>
+              <a:t>Simulação antes da alocação</a:t>
+            </a:r>
+          </a:p>
+        </p:txBody>
+      </p:sp>
+      <p:sp>
+        <p:nvSpPr>
+          <p:cNvPr id="17" name="Rounded Rectangle 16"/>
+          <p:cNvSpPr/>
+          <p:nvPr/>
+        </p:nvSpPr>
+        <p:spPr>
+          <a:xfrm>
+            <a:off x="685800" y="5897880"/>
+            <a:ext cx="6035040" cy="960120"/>
+          </a:xfrm>
+          <a:prstGeom prst="roundRect">
+            <a:avLst>
+              <a:gd name="adj" fmla="val 8000"/>
+            </a:avLst>
+          </a:prstGeom>
+          <a:solidFill>
+            <a:srgbClr val="10314B"/>
+          </a:solidFill>
+          <a:ln>
+            <a:noFill/>
+          </a:ln>
+        </p:spPr>
+        <p:style>
+          <a:lnRef idx="1">
+            <a:schemeClr val="accent1"/>
+          </a:lnRef>
+          <a:fillRef idx="3">
+            <a:schemeClr val="accent1"/>
+          </a:fillRef>
+          <a:effectRef idx="2">
+            <a:schemeClr val="accent1"/>
+          </a:effectRef>
+          <a:fontRef idx="minor">
+            <a:schemeClr val="lt1"/>
+          </a:fontRef>
+        </p:style>
+        <p:txBody>
+          <a:bodyPr rtlCol="0" anchor="ctr"/>
+          <a:lstStyle/>
+          <a:p>
+            <a:pPr algn="ctr"/>
+          </a:p>
+        </p:txBody>
+      </p:sp>
+      <p:sp>
+        <p:nvSpPr>
+          <p:cNvPr id="18" name="Rounded Rectangle 17"/>
+          <p:cNvSpPr/>
+          <p:nvPr/>
+        </p:nvSpPr>
+        <p:spPr>
+          <a:xfrm>
+            <a:off x="7406640" y="5897880"/>
+            <a:ext cx="6492240" cy="960120"/>
+          </a:xfrm>
+          <a:prstGeom prst="roundRect">
+            <a:avLst>
+              <a:gd name="adj" fmla="val 8000"/>
+            </a:avLst>
+          </a:prstGeom>
+          <a:solidFill>
+            <a:srgbClr val="10314B"/>
+          </a:solidFill>
+          <a:ln>
+            <a:noFill/>
+          </a:ln>
+        </p:spPr>
+        <p:style>
+          <a:lnRef idx="1">
+            <a:schemeClr val="accent1"/>
+          </a:lnRef>
+          <a:fillRef idx="3">
+            <a:schemeClr val="accent1"/>
+          </a:fillRef>
+          <a:effectRef idx="2">
+            <a:schemeClr val="accent1"/>
+          </a:effectRef>
+          <a:fontRef idx="minor">
+            <a:schemeClr val="lt1"/>
+          </a:fontRef>
+        </p:style>
+        <p:txBody>
+          <a:bodyPr rtlCol="0" anchor="ctr"/>
+          <a:lstStyle/>
+          <a:p>
+            <a:pPr algn="ctr"/>
+          </a:p>
+        </p:txBody>
+      </p:sp>
+      <p:sp>
+        <p:nvSpPr>
+          <p:cNvPr id="19" name="TextBox 18"/>
+          <p:cNvSpPr txBox="1"/>
+          <p:nvPr/>
+        </p:nvSpPr>
+        <p:spPr>
+          <a:xfrm>
+            <a:off x="914400" y="6099048"/>
+            <a:ext cx="5486400" cy="548640"/>
+          </a:xfrm>
+          <a:prstGeom prst="rect">
+            <a:avLst/>
+          </a:prstGeom>
+          <a:noFill/>
+        </p:spPr>
+        <p:txBody>
+          <a:bodyPr wrap="square" lIns="0" rIns="0" tIns="0" bIns="0">
+            <a:spAutoFit/>
+          </a:bodyPr>
+          <a:lstStyle/>
+          <a:p>
+            <a:pPr>
+              <a:spcAft>
+                <a:spcPts val="1000"/>
+              </a:spcAft>
+              <a:defRPr sz="2200" b="0">
+                <a:solidFill>
+                  <a:srgbClr val="A6BDCF"/>
+                </a:solidFill>
+                <a:latin typeface="Aptos"/>
+              </a:defRPr>
+            </a:pPr>
+            <a:r>
+              <a:t>Etapas sem visão compartilhada</a:t>
+            </a:r>
+          </a:p>
+        </p:txBody>
+      </p:sp>
+      <p:sp>
+        <p:nvSpPr>
+          <p:cNvPr id="20" name="TextBox 19"/>
+          <p:cNvSpPr txBox="1"/>
+          <p:nvPr/>
+        </p:nvSpPr>
+        <p:spPr>
+          <a:xfrm>
+            <a:off x="6903720" y="6099048"/>
+            <a:ext cx="457200" cy="457200"/>
+          </a:xfrm>
+          <a:prstGeom prst="rect">
+            <a:avLst/>
+          </a:prstGeom>
+          <a:noFill/>
+        </p:spPr>
+        <p:txBody>
+          <a:bodyPr wrap="square" lIns="0" rIns="0" tIns="0" bIns="0">
+            <a:spAutoFit/>
+          </a:bodyPr>
+          <a:lstStyle/>
+          <a:p>
+            <a:pPr>
+              <a:spcAft>
+                <a:spcPts val="1000"/>
+              </a:spcAft>
+              <a:defRPr sz="2600" b="1">
+                <a:solidFill>
+                  <a:srgbClr val="43CEEF"/>
+                </a:solidFill>
+                <a:latin typeface="Aptos"/>
+              </a:defRPr>
+            </a:pPr>
+            <a:r>
+              <a:t>→</a:t>
+            </a:r>
+          </a:p>
+        </p:txBody>
+      </p:sp>
+      <p:sp>
+        <p:nvSpPr>
+          <p:cNvPr id="21" name="TextBox 20"/>
+          <p:cNvSpPr txBox="1"/>
+          <p:nvPr/>
+        </p:nvSpPr>
+        <p:spPr>
+          <a:xfrm>
+            <a:off x="7635240" y="6099048"/>
+            <a:ext cx="6035040" cy="548640"/>
+          </a:xfrm>
+          <a:prstGeom prst="rect">
+            <a:avLst/>
+          </a:prstGeom>
+          <a:noFill/>
+        </p:spPr>
+        <p:txBody>
+          <a:bodyPr wrap="square" lIns="0" rIns="0" tIns="0" bIns="0">
+            <a:spAutoFit/>
+          </a:bodyPr>
+          <a:lstStyle/>
+          <a:p>
+            <a:pPr>
+              <a:spcAft>
+                <a:spcPts val="1000"/>
+              </a:spcAft>
+              <a:defRPr sz="2200" b="1">
+                <a:solidFill>
+                  <a:srgbClr val="FFFFFF"/>
+                </a:solidFill>
+                <a:latin typeface="Aptos"/>
+              </a:defRPr>
+            </a:pPr>
+            <a:r>
+              <a:t>Linha do tempo e histórico</a:t>
+            </a:r>
+          </a:p>
+        </p:txBody>
+      </p:sp>
+      <p:sp>
+        <p:nvSpPr>
+          <p:cNvPr id="22" name="TextBox 21"/>
+          <p:cNvSpPr txBox="1"/>
+          <p:nvPr/>
+        </p:nvSpPr>
+        <p:spPr>
+          <a:xfrm>
+            <a:off x="731520" y="7269480"/>
+            <a:ext cx="11887200" cy="320040"/>
+          </a:xfrm>
+          <a:prstGeom prst="rect">
+            <a:avLst/>
+          </a:prstGeom>
+          <a:noFill/>
+        </p:spPr>
+        <p:txBody>
+          <a:bodyPr wrap="square" lIns="0" rIns="0" tIns="0" bIns="0">
+            <a:spAutoFit/>
+          </a:bodyPr>
+          <a:lstStyle/>
+          <a:p>
+            <a:pPr>
+              <a:spcAft>
+                <a:spcPts val="1000"/>
+              </a:spcAft>
+              <a:defRPr sz="1100" b="1">
+                <a:solidFill>
+                  <a:srgbClr val="43CEEF"/>
+                </a:solidFill>
+                <a:latin typeface="Aptos"/>
+              </a:defRPr>
+            </a:pPr>
+            <a:r>
+              <a:t>RISCO HIPOTÉTICO                                         DECISÃO APOIADA PELO SMARTCARGO</a:t>
+            </a:r>
+          </a:p>
+        </p:txBody>
+      </p:sp>
+      <p:sp>
+        <p:nvSpPr>
+          <p:cNvPr id="23" name="TextBox 22"/>
+          <p:cNvSpPr txBox="1"/>
+          <p:nvPr/>
+        </p:nvSpPr>
+        <p:spPr>
+          <a:xfrm>
+            <a:off x="13213080" y="7772400"/>
+            <a:ext cx="914400" cy="274320"/>
+          </a:xfrm>
+          <a:prstGeom prst="rect">
+            <a:avLst/>
+          </a:prstGeom>
+          <a:noFill/>
+        </p:spPr>
+        <p:txBody>
+          <a:bodyPr wrap="square" lIns="0" rIns="0" tIns="0" bIns="0">
+            <a:spAutoFit/>
+          </a:bodyPr>
+          <a:lstStyle/>
+          <a:p>
+            <a:pPr>
+              <a:spcAft>
+                <a:spcPts val="1000"/>
+              </a:spcAft>
+              <a:defRPr sz="1100" b="0">
+                <a:solidFill>
+                  <a:srgbClr val="A6BDCF"/>
+                </a:solidFill>
+                <a:latin typeface="Aptos"/>
+              </a:defRPr>
+            </a:pPr>
+            <a:r>
+              <a:t>06 / 41</a:t>
+            </a:r>
+          </a:p>
+        </p:txBody>
+      </p:sp>
+      <p:sp>
+        <p:nvSpPr>
+          <p:cNvPr id="24" name="Rectangle 23"/>
+          <p:cNvSpPr/>
+          <p:nvPr/>
+        </p:nvSpPr>
+        <p:spPr>
+          <a:xfrm>
+            <a:off x="502920" y="8156448"/>
+            <a:ext cx="1993838" cy="41148"/>
+          </a:xfrm>
+          <a:prstGeom prst="rect">
+            <a:avLst/>
+          </a:prstGeom>
+          <a:solidFill>
+            <a:srgbClr val="43CEEF"/>
+          </a:solidFill>
+          <a:ln>
+            <a:noFill/>
+          </a:ln>
+        </p:spPr>
+        <p:style>
+          <a:lnRef idx="1">
+            <a:schemeClr val="accent1"/>
+          </a:lnRef>
+          <a:fillRef idx="3">
+            <a:schemeClr val="accent1"/>
+          </a:fillRef>
+          <a:effectRef idx="2">
+            <a:schemeClr val="accent1"/>
+          </a:effectRef>
+          <a:fontRef idx="minor">
+            <a:schemeClr val="lt1"/>
+          </a:fontRef>
+        </p:style>
+        <p:txBody>
+          <a:bodyPr rtlCol="0" anchor="ctr"/>
+          <a:lstStyle/>
+          <a:p>
+            <a:pPr algn="ctr"/>
+          </a:p>
+        </p:txBody>
+      </p:sp>
+    </p:spTree>
+  </p:cSld>
+  <p:clrMapOvr>
+    <a:masterClrMapping/>
+  </p:clrMapOvr>
+</p:sld>
+</file>
+
+<file path=ppt/slides/slide37.xml><?xml version="1.0" encoding="utf-8"?>
+<p:sld xmlns:a="http://schemas.openxmlformats.org/drawingml/2006/main" xmlns:p="http://schemas.openxmlformats.org/presentationml/2006/main" xmlns:r="http://schemas.openxmlformats.org/officeDocument/2006/relationships">
+  <p:cSld>
+    <p:bg>
+      <p:bgPr>
+        <a:solidFill>
+          <a:srgbClr val="071E35"/>
+        </a:solidFill>
+        <a:effectLst/>
+      </p:bgPr>
+    </p:bg>
+    <p:spTree>
+      <p:nvGrpSpPr>
+        <p:cNvPr id="1" name=""/>
+        <p:cNvGrpSpPr/>
+        <p:nvPr/>
+      </p:nvGrpSpPr>
+      <p:grpSpPr/>
+      <p:sp>
+        <p:nvSpPr>
+          <p:cNvPr id="2" name="TextBox 1"/>
+          <p:cNvSpPr txBox="1"/>
+          <p:nvPr/>
+        </p:nvSpPr>
+        <p:spPr>
+          <a:xfrm>
+            <a:off x="502920" y="256032"/>
+            <a:ext cx="4572000" cy="274320"/>
+          </a:xfrm>
+          <a:prstGeom prst="rect">
+            <a:avLst/>
+          </a:prstGeom>
+          <a:noFill/>
+        </p:spPr>
+        <p:txBody>
+          <a:bodyPr wrap="square" lIns="0" rIns="0" tIns="0" bIns="0">
+            <a:spAutoFit/>
+          </a:bodyPr>
+          <a:lstStyle/>
+          <a:p>
+            <a:pPr>
+              <a:spcAft>
+                <a:spcPts val="1000"/>
+              </a:spcAft>
+              <a:defRPr sz="1300" b="1">
+                <a:solidFill>
+                  <a:srgbClr val="43CEEF"/>
+                </a:solidFill>
+                <a:latin typeface="Aptos"/>
+              </a:defRPr>
+            </a:pPr>
+            <a:r>
+              <a:t>AZUL / SMARTCARGO</a:t>
+            </a:r>
+          </a:p>
+        </p:txBody>
+      </p:sp>
+      <p:sp>
+        <p:nvSpPr>
+          <p:cNvPr id="3" name="TextBox 2"/>
+          <p:cNvSpPr txBox="1"/>
+          <p:nvPr/>
+        </p:nvSpPr>
+        <p:spPr>
+          <a:xfrm>
+            <a:off x="10149840" y="256032"/>
+            <a:ext cx="3931920" cy="274320"/>
+          </a:xfrm>
+          <a:prstGeom prst="rect">
+            <a:avLst/>
+          </a:prstGeom>
+          <a:noFill/>
+        </p:spPr>
+        <p:txBody>
+          <a:bodyPr wrap="square" lIns="0" rIns="0" tIns="0" bIns="0">
+            <a:spAutoFit/>
+          </a:bodyPr>
+          <a:lstStyle/>
+          <a:p>
+            <a:pPr>
+              <a:spcAft>
+                <a:spcPts val="1000"/>
+              </a:spcAft>
+              <a:defRPr sz="1000" b="0">
+                <a:solidFill>
+                  <a:srgbClr val="A6BDCF"/>
+                </a:solidFill>
+                <a:latin typeface="Aptos"/>
+              </a:defRPr>
+            </a:pPr>
+            <a:r>
+              <a:t>FIAP  +  AZUL LOGÍSTICA  /  SPRINT 1</a:t>
+            </a:r>
+          </a:p>
+        </p:txBody>
+      </p:sp>
+      <p:sp>
+        <p:nvSpPr>
+          <p:cNvPr id="4" name="TextBox 3"/>
+          <p:cNvSpPr txBox="1"/>
+          <p:nvPr/>
+        </p:nvSpPr>
+        <p:spPr>
+          <a:xfrm>
+            <a:off x="640080" y="1143000"/>
+            <a:ext cx="13258800" cy="1005840"/>
+          </a:xfrm>
+          <a:prstGeom prst="rect">
+            <a:avLst/>
+          </a:prstGeom>
+          <a:noFill/>
+        </p:spPr>
+        <p:txBody>
+          <a:bodyPr wrap="square" lIns="0" rIns="0" tIns="0" bIns="0">
+            <a:spAutoFit/>
+          </a:bodyPr>
+          <a:lstStyle/>
+          <a:p>
+            <a:pPr>
+              <a:spcAft>
+                <a:spcPts val="1000"/>
+              </a:spcAft>
+              <a:defRPr sz="3400" b="1">
+                <a:solidFill>
+                  <a:srgbClr val="FFFFFF"/>
+                </a:solidFill>
+                <a:latin typeface="Aptos"/>
+              </a:defRPr>
+            </a:pPr>
+            <a:r>
+              <a:t>Benefícios esperados e seus mecanismos</a:t>
+            </a:r>
+          </a:p>
+        </p:txBody>
+      </p:sp>
+      <p:sp>
+        <p:nvSpPr>
+          <p:cNvPr id="5" name="TextBox 4"/>
+          <p:cNvSpPr txBox="1"/>
+          <p:nvPr/>
+        </p:nvSpPr>
+        <p:spPr>
+          <a:xfrm>
+            <a:off x="685800" y="2331720"/>
+            <a:ext cx="12984480" cy="822960"/>
+          </a:xfrm>
+          <a:prstGeom prst="rect">
+            <a:avLst/>
+          </a:prstGeom>
+          <a:noFill/>
+        </p:spPr>
+        <p:txBody>
+          <a:bodyPr wrap="square" lIns="0" rIns="0" tIns="0" bIns="0">
+            <a:spAutoFit/>
+          </a:bodyPr>
+          <a:lstStyle/>
+          <a:p>
+            <a:pPr>
+              <a:spcAft>
+                <a:spcPts val="1000"/>
+              </a:spcAft>
+              <a:defRPr sz="2100" b="0">
+                <a:solidFill>
+                  <a:srgbClr val="A6BDCF"/>
+                </a:solidFill>
+                <a:latin typeface="Aptos"/>
+              </a:defRPr>
+            </a:pPr>
+            <a:r>
+              <a:t>Cada benefício precisa ser associado a uma mudança observável na operação.</a:t>
+            </a:r>
+          </a:p>
+        </p:txBody>
+      </p:sp>
+      <p:sp>
+        <p:nvSpPr>
+          <p:cNvPr id="6" name="TextBox 5"/>
+          <p:cNvSpPr txBox="1"/>
+          <p:nvPr/>
+        </p:nvSpPr>
+        <p:spPr>
+          <a:xfrm>
+            <a:off x="502920" y="7808975"/>
+            <a:ext cx="10972800" cy="228600"/>
+          </a:xfrm>
+          <a:prstGeom prst="rect">
+            <a:avLst/>
+          </a:prstGeom>
+          <a:noFill/>
+        </p:spPr>
+        <p:txBody>
+          <a:bodyPr wrap="square" lIns="0" rIns="0" tIns="0" bIns="0">
+            <a:spAutoFit/>
+          </a:bodyPr>
+          <a:lstStyle/>
+          <a:p>
+            <a:pPr>
+              <a:spcAft>
+                <a:spcPts val="1000"/>
+              </a:spcAft>
+              <a:defRPr sz="900" b="0">
+                <a:solidFill>
+                  <a:srgbClr val="A6BDCF"/>
+                </a:solidFill>
+                <a:latin typeface="Aptos"/>
+              </a:defRPr>
+            </a:pPr>
+            <a:r>
+              <a:t>PROTÓTIPO ACADÊMICO   /   HIPÓTESES DE NEGÓCIO A VALIDAR</a:t>
+            </a:r>
+          </a:p>
+        </p:txBody>
+      </p:sp>
+      <p:sp>
+        <p:nvSpPr>
+          <p:cNvPr id="7" name="Rounded Rectangle 6"/>
+          <p:cNvSpPr/>
+          <p:nvPr/>
+        </p:nvSpPr>
+        <p:spPr>
+          <a:xfrm>
+            <a:off x="685800" y="3566160"/>
+            <a:ext cx="4251960" cy="3474720"/>
+          </a:xfrm>
+          <a:prstGeom prst="roundRect">
+            <a:avLst>
+              <a:gd name="adj" fmla="val 8000"/>
+            </a:avLst>
+          </a:prstGeom>
+          <a:solidFill>
+            <a:srgbClr val="10314B"/>
+          </a:solidFill>
+          <a:ln>
+            <a:noFill/>
+          </a:ln>
+        </p:spPr>
+        <p:style>
+          <a:lnRef idx="1">
+            <a:schemeClr val="accent1"/>
+          </a:lnRef>
+          <a:fillRef idx="3">
+            <a:schemeClr val="accent1"/>
+          </a:fillRef>
+          <a:effectRef idx="2">
+            <a:schemeClr val="accent1"/>
+          </a:effectRef>
+          <a:fontRef idx="minor">
+            <a:schemeClr val="lt1"/>
+          </a:fontRef>
+        </p:style>
+        <p:txBody>
+          <a:bodyPr rtlCol="0" anchor="ctr"/>
+          <a:lstStyle/>
+          <a:p>
+            <a:pPr algn="ctr"/>
+          </a:p>
+        </p:txBody>
+      </p:sp>
+      <p:sp>
+        <p:nvSpPr>
+          <p:cNvPr id="8" name="TextBox 7"/>
+          <p:cNvSpPr txBox="1"/>
+          <p:nvPr/>
+        </p:nvSpPr>
+        <p:spPr>
+          <a:xfrm>
+            <a:off x="914400" y="3794760"/>
+            <a:ext cx="914400" cy="502920"/>
+          </a:xfrm>
+          <a:prstGeom prst="rect">
+            <a:avLst/>
+          </a:prstGeom>
+          <a:noFill/>
+        </p:spPr>
+        <p:txBody>
+          <a:bodyPr wrap="square" lIns="0" rIns="0" tIns="0" bIns="0">
+            <a:spAutoFit/>
+          </a:bodyPr>
+          <a:lstStyle/>
+          <a:p>
+            <a:pPr>
+              <a:spcAft>
+                <a:spcPts val="1000"/>
+              </a:spcAft>
+              <a:defRPr sz="2900" b="1">
+                <a:solidFill>
+                  <a:srgbClr val="43CEEF"/>
+                </a:solidFill>
+                <a:latin typeface="Aptos"/>
+              </a:defRPr>
+            </a:pPr>
+            <a:r>
+              <a:t>01</a:t>
+            </a:r>
+          </a:p>
+        </p:txBody>
+      </p:sp>
+      <p:sp>
+        <p:nvSpPr>
+          <p:cNvPr id="9" name="TextBox 8"/>
+          <p:cNvSpPr txBox="1"/>
+          <p:nvPr/>
+        </p:nvSpPr>
+        <p:spPr>
+          <a:xfrm>
+            <a:off x="914400" y="4572000"/>
+            <a:ext cx="3749039" cy="777240"/>
+          </a:xfrm>
+          <a:prstGeom prst="rect">
+            <a:avLst/>
+          </a:prstGeom>
+          <a:noFill/>
+        </p:spPr>
+        <p:txBody>
+          <a:bodyPr wrap="square" lIns="0" rIns="0" tIns="0" bIns="0">
+            <a:spAutoFit/>
+          </a:bodyPr>
+          <a:lstStyle/>
+          <a:p>
+            <a:pPr>
+              <a:spcAft>
+                <a:spcPts val="1000"/>
+              </a:spcAft>
+              <a:defRPr sz="2300" b="1">
+                <a:solidFill>
+                  <a:srgbClr val="FFFFFF"/>
+                </a:solidFill>
+                <a:latin typeface="Aptos"/>
+              </a:defRPr>
+            </a:pPr>
+            <a:r>
+              <a:t>Mais pontualidade</a:t>
+            </a:r>
+          </a:p>
+        </p:txBody>
+      </p:sp>
+      <p:sp>
+        <p:nvSpPr>
+          <p:cNvPr id="10" name="TextBox 9"/>
+          <p:cNvSpPr txBox="1"/>
+          <p:nvPr/>
+        </p:nvSpPr>
+        <p:spPr>
+          <a:xfrm>
+            <a:off x="914400" y="5577840"/>
+            <a:ext cx="3749039" cy="1234440"/>
+          </a:xfrm>
+          <a:prstGeom prst="rect">
+            <a:avLst/>
+          </a:prstGeom>
+          <a:noFill/>
+        </p:spPr>
+        <p:txBody>
+          <a:bodyPr wrap="square" lIns="0" rIns="0" tIns="0" bIns="0">
+            <a:spAutoFit/>
+          </a:bodyPr>
+          <a:lstStyle/>
+          <a:p>
+            <a:pPr>
+              <a:spcAft>
+                <a:spcPts val="1000"/>
+              </a:spcAft>
+              <a:defRPr sz="2000" b="0">
+                <a:solidFill>
+                  <a:srgbClr val="A6BDCF"/>
+                </a:solidFill>
+                <a:latin typeface="Aptos"/>
+              </a:defRPr>
+            </a:pPr>
+            <a:r>
+              <a:t>Priorizar menor margem pode reduzir a espera de cargas urgentes.</a:t>
+            </a:r>
+          </a:p>
+        </p:txBody>
+      </p:sp>
+      <p:sp>
+        <p:nvSpPr>
+          <p:cNvPr id="11" name="Rounded Rectangle 10"/>
+          <p:cNvSpPr/>
+          <p:nvPr/>
+        </p:nvSpPr>
+        <p:spPr>
+          <a:xfrm>
+            <a:off x="5257800" y="3566160"/>
+            <a:ext cx="4251960" cy="3474720"/>
+          </a:xfrm>
+          <a:prstGeom prst="roundRect">
+            <a:avLst>
+              <a:gd name="adj" fmla="val 8000"/>
+            </a:avLst>
+          </a:prstGeom>
+          <a:solidFill>
+            <a:srgbClr val="10314B"/>
+          </a:solidFill>
+          <a:ln>
+            <a:noFill/>
+          </a:ln>
+        </p:spPr>
+        <p:style>
+          <a:lnRef idx="1">
+            <a:schemeClr val="accent1"/>
+          </a:lnRef>
+          <a:fillRef idx="3">
+            <a:schemeClr val="accent1"/>
+          </a:fillRef>
+          <a:effectRef idx="2">
+            <a:schemeClr val="accent1"/>
+          </a:effectRef>
+          <a:fontRef idx="minor">
+            <a:schemeClr val="lt1"/>
+          </a:fontRef>
+        </p:style>
+        <p:txBody>
+          <a:bodyPr rtlCol="0" anchor="ctr"/>
+          <a:lstStyle/>
+          <a:p>
+            <a:pPr algn="ctr"/>
+          </a:p>
+        </p:txBody>
+      </p:sp>
+      <p:sp>
+        <p:nvSpPr>
+          <p:cNvPr id="12" name="TextBox 11"/>
+          <p:cNvSpPr txBox="1"/>
+          <p:nvPr/>
+        </p:nvSpPr>
+        <p:spPr>
+          <a:xfrm>
+            <a:off x="5486400" y="3794760"/>
+            <a:ext cx="914400" cy="502920"/>
+          </a:xfrm>
+          <a:prstGeom prst="rect">
+            <a:avLst/>
+          </a:prstGeom>
+          <a:noFill/>
+        </p:spPr>
+        <p:txBody>
+          <a:bodyPr wrap="square" lIns="0" rIns="0" tIns="0" bIns="0">
+            <a:spAutoFit/>
+          </a:bodyPr>
+          <a:lstStyle/>
+          <a:p>
+            <a:pPr>
+              <a:spcAft>
+                <a:spcPts val="1000"/>
+              </a:spcAft>
+              <a:defRPr sz="2900" b="1">
+                <a:solidFill>
+                  <a:srgbClr val="43CEEF"/>
+                </a:solidFill>
+                <a:latin typeface="Aptos"/>
+              </a:defRPr>
+            </a:pPr>
+            <a:r>
+              <a:t>02</a:t>
+            </a:r>
+          </a:p>
+        </p:txBody>
+      </p:sp>
+      <p:sp>
+        <p:nvSpPr>
+          <p:cNvPr id="13" name="TextBox 12"/>
+          <p:cNvSpPr txBox="1"/>
+          <p:nvPr/>
+        </p:nvSpPr>
+        <p:spPr>
+          <a:xfrm>
+            <a:off x="5486400" y="4572000"/>
+            <a:ext cx="3749039" cy="777240"/>
+          </a:xfrm>
+          <a:prstGeom prst="rect">
+            <a:avLst/>
+          </a:prstGeom>
+          <a:noFill/>
+        </p:spPr>
+        <p:txBody>
+          <a:bodyPr wrap="square" lIns="0" rIns="0" tIns="0" bIns="0">
+            <a:spAutoFit/>
+          </a:bodyPr>
+          <a:lstStyle/>
+          <a:p>
+            <a:pPr>
+              <a:spcAft>
+                <a:spcPts val="1000"/>
+              </a:spcAft>
+              <a:defRPr sz="2300" b="1">
+                <a:solidFill>
+                  <a:srgbClr val="FFFFFF"/>
+                </a:solidFill>
+                <a:latin typeface="Aptos"/>
+              </a:defRPr>
+            </a:pPr>
+            <a:r>
+              <a:t>Melhor uso do espaço</a:t>
+            </a:r>
+          </a:p>
+        </p:txBody>
+      </p:sp>
+      <p:sp>
+        <p:nvSpPr>
+          <p:cNvPr id="14" name="TextBox 13"/>
+          <p:cNvSpPr txBox="1"/>
+          <p:nvPr/>
+        </p:nvSpPr>
+        <p:spPr>
+          <a:xfrm>
+            <a:off x="5486400" y="5577840"/>
+            <a:ext cx="3749039" cy="1234440"/>
+          </a:xfrm>
+          <a:prstGeom prst="rect">
+            <a:avLst/>
+          </a:prstGeom>
+          <a:noFill/>
+        </p:spPr>
+        <p:txBody>
+          <a:bodyPr wrap="square" lIns="0" rIns="0" tIns="0" bIns="0">
+            <a:spAutoFit/>
+          </a:bodyPr>
+          <a:lstStyle/>
+          <a:p>
+            <a:pPr>
+              <a:spcAft>
+                <a:spcPts val="1000"/>
+              </a:spcAft>
+              <a:defRPr sz="2000" b="0">
+                <a:solidFill>
+                  <a:srgbClr val="A6BDCF"/>
+                </a:solidFill>
+                <a:latin typeface="Aptos"/>
+              </a:defRPr>
+            </a:pPr>
+            <a:r>
+              <a:t>Simular e bloquear excessos pode evitar movimentações desnecessárias.</a:t>
+            </a:r>
+          </a:p>
+        </p:txBody>
+      </p:sp>
+      <p:sp>
+        <p:nvSpPr>
+          <p:cNvPr id="15" name="Rounded Rectangle 14"/>
+          <p:cNvSpPr/>
+          <p:nvPr/>
+        </p:nvSpPr>
+        <p:spPr>
+          <a:xfrm>
+            <a:off x="9829800" y="3566160"/>
+            <a:ext cx="4251960" cy="3474720"/>
+          </a:xfrm>
+          <a:prstGeom prst="roundRect">
+            <a:avLst>
+              <a:gd name="adj" fmla="val 8000"/>
+            </a:avLst>
+          </a:prstGeom>
+          <a:solidFill>
+            <a:srgbClr val="10314B"/>
+          </a:solidFill>
+          <a:ln>
+            <a:noFill/>
+          </a:ln>
+        </p:spPr>
+        <p:style>
+          <a:lnRef idx="1">
+            <a:schemeClr val="accent1"/>
+          </a:lnRef>
+          <a:fillRef idx="3">
+            <a:schemeClr val="accent1"/>
+          </a:fillRef>
+          <a:effectRef idx="2">
+            <a:schemeClr val="accent1"/>
+          </a:effectRef>
+          <a:fontRef idx="minor">
+            <a:schemeClr val="lt1"/>
+          </a:fontRef>
+        </p:style>
+        <p:txBody>
+          <a:bodyPr rtlCol="0" anchor="ctr"/>
+          <a:lstStyle/>
+          <a:p>
+            <a:pPr algn="ctr"/>
+          </a:p>
+        </p:txBody>
+      </p:sp>
+      <p:sp>
+        <p:nvSpPr>
+          <p:cNvPr id="16" name="TextBox 15"/>
+          <p:cNvSpPr txBox="1"/>
+          <p:nvPr/>
+        </p:nvSpPr>
+        <p:spPr>
+          <a:xfrm>
+            <a:off x="10058400" y="3794760"/>
+            <a:ext cx="914400" cy="502920"/>
+          </a:xfrm>
+          <a:prstGeom prst="rect">
+            <a:avLst/>
+          </a:prstGeom>
+          <a:noFill/>
+        </p:spPr>
+        <p:txBody>
+          <a:bodyPr wrap="square" lIns="0" rIns="0" tIns="0" bIns="0">
+            <a:spAutoFit/>
+          </a:bodyPr>
+          <a:lstStyle/>
+          <a:p>
+            <a:pPr>
+              <a:spcAft>
+                <a:spcPts val="1000"/>
+              </a:spcAft>
+              <a:defRPr sz="2900" b="1">
+                <a:solidFill>
+                  <a:srgbClr val="43CEEF"/>
+                </a:solidFill>
+                <a:latin typeface="Aptos"/>
+              </a:defRPr>
+            </a:pPr>
+            <a:r>
+              <a:t>03</a:t>
+            </a:r>
+          </a:p>
+        </p:txBody>
+      </p:sp>
+      <p:sp>
+        <p:nvSpPr>
+          <p:cNvPr id="17" name="TextBox 16"/>
+          <p:cNvSpPr txBox="1"/>
+          <p:nvPr/>
+        </p:nvSpPr>
+        <p:spPr>
+          <a:xfrm>
+            <a:off x="10058400" y="4572000"/>
+            <a:ext cx="3749039" cy="777240"/>
+          </a:xfrm>
+          <a:prstGeom prst="rect">
+            <a:avLst/>
+          </a:prstGeom>
+          <a:noFill/>
+        </p:spPr>
+        <p:txBody>
+          <a:bodyPr wrap="square" lIns="0" rIns="0" tIns="0" bIns="0">
+            <a:spAutoFit/>
+          </a:bodyPr>
+          <a:lstStyle/>
+          <a:p>
+            <a:pPr>
+              <a:spcAft>
+                <a:spcPts val="1000"/>
+              </a:spcAft>
+              <a:defRPr sz="2300" b="1">
+                <a:solidFill>
+                  <a:srgbClr val="FFFFFF"/>
+                </a:solidFill>
+                <a:latin typeface="Aptos"/>
+              </a:defRPr>
+            </a:pPr>
+            <a:r>
+              <a:t>Mais previsibilidade</a:t>
+            </a:r>
+          </a:p>
+        </p:txBody>
+      </p:sp>
+      <p:sp>
+        <p:nvSpPr>
+          <p:cNvPr id="18" name="TextBox 17"/>
+          <p:cNvSpPr txBox="1"/>
+          <p:nvPr/>
+        </p:nvSpPr>
+        <p:spPr>
+          <a:xfrm>
+            <a:off x="10058400" y="5577840"/>
+            <a:ext cx="3749039" cy="1234440"/>
+          </a:xfrm>
+          <a:prstGeom prst="rect">
+            <a:avLst/>
+          </a:prstGeom>
+          <a:noFill/>
+        </p:spPr>
+        <p:txBody>
+          <a:bodyPr wrap="square" lIns="0" rIns="0" tIns="0" bIns="0">
+            <a:spAutoFit/>
+          </a:bodyPr>
+          <a:lstStyle/>
+          <a:p>
+            <a:pPr>
+              <a:spcAft>
+                <a:spcPts val="1000"/>
+              </a:spcAft>
+              <a:defRPr sz="2000" b="0">
+                <a:solidFill>
+                  <a:srgbClr val="A6BDCF"/>
+                </a:solidFill>
+                <a:latin typeface="Aptos"/>
+              </a:defRPr>
+            </a:pPr>
+            <a:r>
+              <a:t>Etapas registradas facilitam localizar pendências e tratar exceções.</a:t>
+            </a:r>
+          </a:p>
+        </p:txBody>
+      </p:sp>
+      <p:sp>
+        <p:nvSpPr>
+          <p:cNvPr id="19" name="TextBox 18"/>
+          <p:cNvSpPr txBox="1"/>
+          <p:nvPr/>
+        </p:nvSpPr>
+        <p:spPr>
+          <a:xfrm>
+            <a:off x="13213080" y="7772400"/>
+            <a:ext cx="914400" cy="274320"/>
+          </a:xfrm>
+          <a:prstGeom prst="rect">
+            <a:avLst/>
+          </a:prstGeom>
+          <a:noFill/>
+        </p:spPr>
+        <p:txBody>
+          <a:bodyPr wrap="square" lIns="0" rIns="0" tIns="0" bIns="0">
+            <a:spAutoFit/>
+          </a:bodyPr>
+          <a:lstStyle/>
+          <a:p>
+            <a:pPr>
+              <a:spcAft>
+                <a:spcPts val="1000"/>
+              </a:spcAft>
+              <a:defRPr sz="1100" b="0">
+                <a:solidFill>
+                  <a:srgbClr val="A6BDCF"/>
+                </a:solidFill>
+                <a:latin typeface="Aptos"/>
+              </a:defRPr>
+            </a:pPr>
+            <a:r>
+              <a:t>07 / 41</a:t>
+            </a:r>
+          </a:p>
+        </p:txBody>
+      </p:sp>
+      <p:sp>
+        <p:nvSpPr>
+          <p:cNvPr id="20" name="Rectangle 19"/>
+          <p:cNvSpPr/>
+          <p:nvPr/>
+        </p:nvSpPr>
+        <p:spPr>
+          <a:xfrm>
+            <a:off x="502920" y="8156448"/>
+            <a:ext cx="2326144" cy="41148"/>
+          </a:xfrm>
+          <a:prstGeom prst="rect">
+            <a:avLst/>
+          </a:prstGeom>
+          <a:solidFill>
+            <a:srgbClr val="43CEEF"/>
+          </a:solidFill>
+          <a:ln>
+            <a:noFill/>
+          </a:ln>
+        </p:spPr>
+        <p:style>
+          <a:lnRef idx="1">
+            <a:schemeClr val="accent1"/>
+          </a:lnRef>
+          <a:fillRef idx="3">
+            <a:schemeClr val="accent1"/>
+          </a:fillRef>
+          <a:effectRef idx="2">
+            <a:schemeClr val="accent1"/>
+          </a:effectRef>
+          <a:fontRef idx="minor">
+            <a:schemeClr val="lt1"/>
+          </a:fontRef>
+        </p:style>
+        <p:txBody>
+          <a:bodyPr rtlCol="0" anchor="ctr"/>
+          <a:lstStyle/>
+          <a:p>
+            <a:pPr algn="ctr"/>
+          </a:p>
+        </p:txBody>
+      </p:sp>
+    </p:spTree>
+  </p:cSld>
+  <p:clrMapOvr>
+    <a:masterClrMapping/>
+  </p:clrMapOvr>
+</p:sld>
+</file>
+
+<file path=ppt/slides/slide38.xml><?xml version="1.0" encoding="utf-8"?>
+<p:sld xmlns:a="http://schemas.openxmlformats.org/drawingml/2006/main" xmlns:p="http://schemas.openxmlformats.org/presentationml/2006/main" xmlns:r="http://schemas.openxmlformats.org/officeDocument/2006/relationships">
+  <p:cSld>
+    <p:bg>
+      <p:bgPr>
+        <a:solidFill>
+          <a:srgbClr val="071E35"/>
+        </a:solidFill>
+        <a:effectLst/>
+      </p:bgPr>
+    </p:bg>
+    <p:spTree>
+      <p:nvGrpSpPr>
+        <p:cNvPr id="1" name=""/>
+        <p:cNvGrpSpPr/>
+        <p:nvPr/>
+      </p:nvGrpSpPr>
+      <p:grpSpPr/>
+      <p:sp>
+        <p:nvSpPr>
+          <p:cNvPr id="2" name="TextBox 1"/>
+          <p:cNvSpPr txBox="1"/>
+          <p:nvPr/>
+        </p:nvSpPr>
+        <p:spPr>
+          <a:xfrm>
+            <a:off x="502920" y="256032"/>
+            <a:ext cx="4572000" cy="274320"/>
+          </a:xfrm>
+          <a:prstGeom prst="rect">
+            <a:avLst/>
+          </a:prstGeom>
+          <a:noFill/>
+        </p:spPr>
+        <p:txBody>
+          <a:bodyPr wrap="square" lIns="0" rIns="0" tIns="0" bIns="0">
+            <a:spAutoFit/>
+          </a:bodyPr>
+          <a:lstStyle/>
+          <a:p>
+            <a:pPr>
+              <a:spcAft>
+                <a:spcPts val="1000"/>
+              </a:spcAft>
+              <a:defRPr sz="1300" b="1">
+                <a:solidFill>
+                  <a:srgbClr val="43CEEF"/>
+                </a:solidFill>
+                <a:latin typeface="Aptos"/>
+              </a:defRPr>
+            </a:pPr>
+            <a:r>
+              <a:t>AZUL / SMARTCARGO</a:t>
+            </a:r>
+          </a:p>
+        </p:txBody>
+      </p:sp>
+      <p:sp>
+        <p:nvSpPr>
+          <p:cNvPr id="3" name="TextBox 2"/>
+          <p:cNvSpPr txBox="1"/>
+          <p:nvPr/>
+        </p:nvSpPr>
+        <p:spPr>
+          <a:xfrm>
+            <a:off x="10149840" y="256032"/>
+            <a:ext cx="3931920" cy="274320"/>
+          </a:xfrm>
+          <a:prstGeom prst="rect">
+            <a:avLst/>
+          </a:prstGeom>
+          <a:noFill/>
+        </p:spPr>
+        <p:txBody>
+          <a:bodyPr wrap="square" lIns="0" rIns="0" tIns="0" bIns="0">
+            <a:spAutoFit/>
+          </a:bodyPr>
+          <a:lstStyle/>
+          <a:p>
+            <a:pPr>
+              <a:spcAft>
+                <a:spcPts val="1000"/>
+              </a:spcAft>
+              <a:defRPr sz="1000" b="0">
+                <a:solidFill>
+                  <a:srgbClr val="A6BDCF"/>
+                </a:solidFill>
+                <a:latin typeface="Aptos"/>
+              </a:defRPr>
+            </a:pPr>
+            <a:r>
+              <a:t>FIAP  +  AZUL LOGÍSTICA  /  SPRINT 1</a:t>
+            </a:r>
+          </a:p>
+        </p:txBody>
+      </p:sp>
+      <p:sp>
+        <p:nvSpPr>
+          <p:cNvPr id="4" name="TextBox 3"/>
+          <p:cNvSpPr txBox="1"/>
+          <p:nvPr/>
+        </p:nvSpPr>
+        <p:spPr>
+          <a:xfrm>
+            <a:off x="640080" y="1143000"/>
+            <a:ext cx="13258800" cy="1005840"/>
+          </a:xfrm>
+          <a:prstGeom prst="rect">
+            <a:avLst/>
+          </a:prstGeom>
+          <a:noFill/>
+        </p:spPr>
+        <p:txBody>
+          <a:bodyPr wrap="square" lIns="0" rIns="0" tIns="0" bIns="0">
+            <a:spAutoFit/>
+          </a:bodyPr>
+          <a:lstStyle/>
+          <a:p>
+            <a:pPr>
+              <a:spcAft>
+                <a:spcPts val="1000"/>
+              </a:spcAft>
+              <a:defRPr sz="3400" b="1">
+                <a:solidFill>
+                  <a:srgbClr val="FFFFFF"/>
+                </a:solidFill>
+                <a:latin typeface="Aptos"/>
+              </a:defRPr>
+            </a:pPr>
+            <a:r>
+              <a:t>Como medir se a solução funciona</a:t>
+            </a:r>
+          </a:p>
+        </p:txBody>
+      </p:sp>
+      <p:sp>
+        <p:nvSpPr>
+          <p:cNvPr id="5" name="TextBox 4"/>
+          <p:cNvSpPr txBox="1"/>
+          <p:nvPr/>
+        </p:nvSpPr>
+        <p:spPr>
+          <a:xfrm>
+            <a:off x="685800" y="2331720"/>
+            <a:ext cx="12984480" cy="822960"/>
+          </a:xfrm>
+          <a:prstGeom prst="rect">
+            <a:avLst/>
+          </a:prstGeom>
+          <a:noFill/>
+        </p:spPr>
+        <p:txBody>
+          <a:bodyPr wrap="square" lIns="0" rIns="0" tIns="0" bIns="0">
+            <a:spAutoFit/>
+          </a:bodyPr>
+          <a:lstStyle/>
+          <a:p>
+            <a:pPr>
+              <a:spcAft>
+                <a:spcPts val="1000"/>
+              </a:spcAft>
+              <a:defRPr sz="2100" b="0">
+                <a:solidFill>
+                  <a:srgbClr val="A6BDCF"/>
+                </a:solidFill>
+                <a:latin typeface="Aptos"/>
+              </a:defRPr>
+            </a:pPr>
+            <a:r>
+              <a:t>Coletar uma linha de base e comparar turnos com perfil operacional semelhante.</a:t>
+            </a:r>
+          </a:p>
+        </p:txBody>
+      </p:sp>
+      <p:sp>
+        <p:nvSpPr>
+          <p:cNvPr id="6" name="TextBox 5"/>
+          <p:cNvSpPr txBox="1"/>
+          <p:nvPr/>
+        </p:nvSpPr>
+        <p:spPr>
+          <a:xfrm>
+            <a:off x="502920" y="7808975"/>
+            <a:ext cx="10972800" cy="228600"/>
+          </a:xfrm>
+          <a:prstGeom prst="rect">
+            <a:avLst/>
+          </a:prstGeom>
+          <a:noFill/>
+        </p:spPr>
+        <p:txBody>
+          <a:bodyPr wrap="square" lIns="0" rIns="0" tIns="0" bIns="0">
+            <a:spAutoFit/>
+          </a:bodyPr>
+          <a:lstStyle/>
+          <a:p>
+            <a:pPr>
+              <a:spcAft>
+                <a:spcPts val="1000"/>
+              </a:spcAft>
+              <a:defRPr sz="900" b="0">
+                <a:solidFill>
+                  <a:srgbClr val="A6BDCF"/>
+                </a:solidFill>
+                <a:latin typeface="Aptos"/>
+              </a:defRPr>
+            </a:pPr>
+            <a:r>
+              <a:t>PROTÓTIPO ACADÊMICO   /   HIPÓTESES DE NEGÓCIO A VALIDAR</a:t>
+            </a:r>
+          </a:p>
+        </p:txBody>
+      </p:sp>
+      <p:sp>
+        <p:nvSpPr>
+          <p:cNvPr id="7" name="Rounded Rectangle 6"/>
+          <p:cNvSpPr/>
+          <p:nvPr/>
+        </p:nvSpPr>
+        <p:spPr>
+          <a:xfrm>
+            <a:off x="685800" y="3337560"/>
+            <a:ext cx="13258800" cy="685800"/>
+          </a:xfrm>
+          <a:prstGeom prst="roundRect">
+            <a:avLst>
+              <a:gd name="adj" fmla="val 8000"/>
+            </a:avLst>
+          </a:prstGeom>
+          <a:solidFill>
+            <a:srgbClr val="10314B"/>
+          </a:solidFill>
+          <a:ln>
+            <a:noFill/>
+          </a:ln>
+        </p:spPr>
+        <p:style>
+          <a:lnRef idx="1">
+            <a:schemeClr val="accent1"/>
+          </a:lnRef>
+          <a:fillRef idx="3">
+            <a:schemeClr val="accent1"/>
+          </a:fillRef>
+          <a:effectRef idx="2">
+            <a:schemeClr val="accent1"/>
+          </a:effectRef>
+          <a:fontRef idx="minor">
+            <a:schemeClr val="lt1"/>
+          </a:fontRef>
+        </p:style>
+        <p:txBody>
+          <a:bodyPr rtlCol="0" anchor="ctr"/>
+          <a:lstStyle/>
+          <a:p>
+            <a:pPr algn="ctr"/>
+          </a:p>
+        </p:txBody>
+      </p:sp>
+      <p:sp>
+        <p:nvSpPr>
+          <p:cNvPr id="8" name="TextBox 7"/>
+          <p:cNvSpPr txBox="1"/>
+          <p:nvPr/>
+        </p:nvSpPr>
+        <p:spPr>
+          <a:xfrm>
+            <a:off x="914400" y="3502152"/>
+            <a:ext cx="3291840" cy="411480"/>
+          </a:xfrm>
+          <a:prstGeom prst="rect">
+            <a:avLst/>
+          </a:prstGeom>
+          <a:noFill/>
+        </p:spPr>
+        <p:txBody>
+          <a:bodyPr wrap="square" lIns="0" rIns="0" tIns="0" bIns="0">
+            <a:spAutoFit/>
+          </a:bodyPr>
+          <a:lstStyle/>
+          <a:p>
+            <a:pPr>
+              <a:spcAft>
+                <a:spcPts val="1000"/>
+              </a:spcAft>
+              <a:defRPr sz="1900" b="1">
+                <a:solidFill>
+                  <a:srgbClr val="FFFFFF"/>
+                </a:solidFill>
+                <a:latin typeface="Aptos"/>
+              </a:defRPr>
+            </a:pPr>
+            <a:r>
+              <a:t>Pontualidade</a:t>
+            </a:r>
+          </a:p>
+        </p:txBody>
+      </p:sp>
+      <p:sp>
+        <p:nvSpPr>
+          <p:cNvPr id="9" name="TextBox 8"/>
+          <p:cNvSpPr txBox="1"/>
+          <p:nvPr/>
+        </p:nvSpPr>
+        <p:spPr>
+          <a:xfrm>
+            <a:off x="4526280" y="3502152"/>
+            <a:ext cx="6400800" cy="411480"/>
+          </a:xfrm>
+          <a:prstGeom prst="rect">
+            <a:avLst/>
+          </a:prstGeom>
+          <a:noFill/>
+        </p:spPr>
+        <p:txBody>
+          <a:bodyPr wrap="square" lIns="0" rIns="0" tIns="0" bIns="0">
+            <a:spAutoFit/>
+          </a:bodyPr>
+          <a:lstStyle/>
+          <a:p>
+            <a:pPr>
+              <a:spcAft>
+                <a:spcPts val="1000"/>
+              </a:spcAft>
+              <a:defRPr sz="1800" b="0">
+                <a:solidFill>
+                  <a:srgbClr val="A6BDCF"/>
+                </a:solidFill>
+                <a:latin typeface="Aptos"/>
+              </a:defRPr>
+            </a:pPr>
+            <a:r>
+              <a:t>Concluídas no prazo ÷ concluídas</a:t>
+            </a:r>
+          </a:p>
+        </p:txBody>
+      </p:sp>
+      <p:sp>
+        <p:nvSpPr>
+          <p:cNvPr id="10" name="TextBox 9"/>
+          <p:cNvSpPr txBox="1"/>
+          <p:nvPr/>
+        </p:nvSpPr>
+        <p:spPr>
+          <a:xfrm>
+            <a:off x="11430000" y="3502152"/>
+            <a:ext cx="2240280" cy="411480"/>
+          </a:xfrm>
+          <a:prstGeom prst="rect">
+            <a:avLst/>
+          </a:prstGeom>
+          <a:noFill/>
+        </p:spPr>
+        <p:txBody>
+          <a:bodyPr wrap="square" lIns="0" rIns="0" tIns="0" bIns="0">
+            <a:spAutoFit/>
+          </a:bodyPr>
+          <a:lstStyle/>
+          <a:p>
+            <a:pPr>
+              <a:spcAft>
+                <a:spcPts val="1000"/>
+              </a:spcAft>
+              <a:defRPr sz="1700" b="1">
+                <a:solidFill>
+                  <a:srgbClr val="43CEEF"/>
+                </a:solidFill>
+                <a:latin typeface="Aptos"/>
+              </a:defRPr>
+            </a:pPr>
+            <a:r>
+              <a:t>Aumentar</a:t>
+            </a:r>
+          </a:p>
+        </p:txBody>
+      </p:sp>
+      <p:sp>
+        <p:nvSpPr>
+          <p:cNvPr id="11" name="Rounded Rectangle 10"/>
+          <p:cNvSpPr/>
+          <p:nvPr/>
+        </p:nvSpPr>
+        <p:spPr>
+          <a:xfrm>
+            <a:off x="685800" y="4169663"/>
+            <a:ext cx="13258800" cy="685800"/>
+          </a:xfrm>
+          <a:prstGeom prst="roundRect">
+            <a:avLst>
+              <a:gd name="adj" fmla="val 8000"/>
+            </a:avLst>
+          </a:prstGeom>
+          <a:solidFill>
+            <a:srgbClr val="10314B"/>
+          </a:solidFill>
+          <a:ln>
+            <a:noFill/>
+          </a:ln>
+        </p:spPr>
+        <p:style>
+          <a:lnRef idx="1">
+            <a:schemeClr val="accent1"/>
+          </a:lnRef>
+          <a:fillRef idx="3">
+            <a:schemeClr val="accent1"/>
+          </a:fillRef>
+          <a:effectRef idx="2">
+            <a:schemeClr val="accent1"/>
+          </a:effectRef>
+          <a:fontRef idx="minor">
+            <a:schemeClr val="lt1"/>
+          </a:fontRef>
+        </p:style>
+        <p:txBody>
+          <a:bodyPr rtlCol="0" anchor="ctr"/>
+          <a:lstStyle/>
+          <a:p>
+            <a:pPr algn="ctr"/>
+          </a:p>
+        </p:txBody>
+      </p:sp>
+      <p:sp>
+        <p:nvSpPr>
+          <p:cNvPr id="12" name="TextBox 11"/>
+          <p:cNvSpPr txBox="1"/>
+          <p:nvPr/>
+        </p:nvSpPr>
+        <p:spPr>
+          <a:xfrm>
+            <a:off x="914400" y="4334255"/>
+            <a:ext cx="3291840" cy="411480"/>
+          </a:xfrm>
+          <a:prstGeom prst="rect">
+            <a:avLst/>
+          </a:prstGeom>
+          <a:noFill/>
+        </p:spPr>
+        <p:txBody>
+          <a:bodyPr wrap="square" lIns="0" rIns="0" tIns="0" bIns="0">
+            <a:spAutoFit/>
+          </a:bodyPr>
+          <a:lstStyle/>
+          <a:p>
+            <a:pPr>
+              <a:spcAft>
+                <a:spcPts val="1000"/>
+              </a:spcAft>
+              <a:defRPr sz="1900" b="1">
+                <a:solidFill>
+                  <a:srgbClr val="FFFFFF"/>
+                </a:solidFill>
+                <a:latin typeface="Aptos"/>
+              </a:defRPr>
+            </a:pPr>
+            <a:r>
+              <a:t>Tempo de processamento</a:t>
+            </a:r>
+          </a:p>
+        </p:txBody>
+      </p:sp>
+      <p:sp>
+        <p:nvSpPr>
+          <p:cNvPr id="13" name="TextBox 12"/>
+          <p:cNvSpPr txBox="1"/>
+          <p:nvPr/>
+        </p:nvSpPr>
+        <p:spPr>
+          <a:xfrm>
+            <a:off x="4526280" y="4334255"/>
+            <a:ext cx="6400800" cy="411480"/>
+          </a:xfrm>
+          <a:prstGeom prst="rect">
+            <a:avLst/>
+          </a:prstGeom>
+          <a:noFill/>
+        </p:spPr>
+        <p:txBody>
+          <a:bodyPr wrap="square" lIns="0" rIns="0" tIns="0" bIns="0">
+            <a:spAutoFit/>
+          </a:bodyPr>
+          <a:lstStyle/>
+          <a:p>
+            <a:pPr>
+              <a:spcAft>
+                <a:spcPts val="1000"/>
+              </a:spcAft>
+              <a:defRPr sz="1800" b="0">
+                <a:solidFill>
+                  <a:srgbClr val="A6BDCF"/>
+                </a:solidFill>
+                <a:latin typeface="Aptos"/>
+              </a:defRPr>
+            </a:pPr>
+            <a:r>
+              <a:t>Média de pronta − recebida</a:t>
+            </a:r>
+          </a:p>
+        </p:txBody>
+      </p:sp>
+      <p:sp>
+        <p:nvSpPr>
+          <p:cNvPr id="14" name="TextBox 13"/>
+          <p:cNvSpPr txBox="1"/>
+          <p:nvPr/>
+        </p:nvSpPr>
+        <p:spPr>
+          <a:xfrm>
+            <a:off x="11430000" y="4334255"/>
+            <a:ext cx="2240280" cy="411480"/>
+          </a:xfrm>
+          <a:prstGeom prst="rect">
+            <a:avLst/>
+          </a:prstGeom>
+          <a:noFill/>
+        </p:spPr>
+        <p:txBody>
+          <a:bodyPr wrap="square" lIns="0" rIns="0" tIns="0" bIns="0">
+            <a:spAutoFit/>
+          </a:bodyPr>
+          <a:lstStyle/>
+          <a:p>
+            <a:pPr>
+              <a:spcAft>
+                <a:spcPts val="1000"/>
+              </a:spcAft>
+              <a:defRPr sz="1700" b="1">
+                <a:solidFill>
+                  <a:srgbClr val="43CEEF"/>
+                </a:solidFill>
+                <a:latin typeface="Aptos"/>
+              </a:defRPr>
+            </a:pPr>
+            <a:r>
+              <a:t>Reduzir</a:t>
+            </a:r>
+          </a:p>
+        </p:txBody>
+      </p:sp>
+      <p:sp>
+        <p:nvSpPr>
+          <p:cNvPr id="15" name="Rounded Rectangle 14"/>
+          <p:cNvSpPr/>
+          <p:nvPr/>
+        </p:nvSpPr>
+        <p:spPr>
+          <a:xfrm>
+            <a:off x="685800" y="5001768"/>
+            <a:ext cx="13258800" cy="685800"/>
+          </a:xfrm>
+          <a:prstGeom prst="roundRect">
+            <a:avLst>
+              <a:gd name="adj" fmla="val 8000"/>
+            </a:avLst>
+          </a:prstGeom>
+          <a:solidFill>
+            <a:srgbClr val="10314B"/>
+          </a:solidFill>
+          <a:ln>
+            <a:noFill/>
+          </a:ln>
+        </p:spPr>
+        <p:style>
+          <a:lnRef idx="1">
+            <a:schemeClr val="accent1"/>
+          </a:lnRef>
+          <a:fillRef idx="3">
+            <a:schemeClr val="accent1"/>
+          </a:fillRef>
+          <a:effectRef idx="2">
+            <a:schemeClr val="accent1"/>
+          </a:effectRef>
+          <a:fontRef idx="minor">
+            <a:schemeClr val="lt1"/>
+          </a:fontRef>
+        </p:style>
+        <p:txBody>
+          <a:bodyPr rtlCol="0" anchor="ctr"/>
+          <a:lstStyle/>
+          <a:p>
+            <a:pPr algn="ctr"/>
+          </a:p>
+        </p:txBody>
+      </p:sp>
+      <p:sp>
+        <p:nvSpPr>
+          <p:cNvPr id="16" name="TextBox 15"/>
+          <p:cNvSpPr txBox="1"/>
+          <p:nvPr/>
+        </p:nvSpPr>
+        <p:spPr>
+          <a:xfrm>
+            <a:off x="914400" y="5166359"/>
+            <a:ext cx="3291840" cy="411480"/>
+          </a:xfrm>
+          <a:prstGeom prst="rect">
+            <a:avLst/>
+          </a:prstGeom>
+          <a:noFill/>
+        </p:spPr>
+        <p:txBody>
+          <a:bodyPr wrap="square" lIns="0" rIns="0" tIns="0" bIns="0">
+            <a:spAutoFit/>
+          </a:bodyPr>
+          <a:lstStyle/>
+          <a:p>
+            <a:pPr>
+              <a:spcAft>
+                <a:spcPts val="1000"/>
+              </a:spcAft>
+              <a:defRPr sz="1900" b="1">
+                <a:solidFill>
+                  <a:srgbClr val="FFFFFF"/>
+                </a:solidFill>
+                <a:latin typeface="Aptos"/>
+              </a:defRPr>
+            </a:pPr>
+            <a:r>
+              <a:t>Ocupação das áreas</a:t>
+            </a:r>
+          </a:p>
+        </p:txBody>
+      </p:sp>
+      <p:sp>
+        <p:nvSpPr>
+          <p:cNvPr id="17" name="TextBox 16"/>
+          <p:cNvSpPr txBox="1"/>
+          <p:nvPr/>
+        </p:nvSpPr>
+        <p:spPr>
+          <a:xfrm>
+            <a:off x="4526280" y="5166359"/>
+            <a:ext cx="6400800" cy="411480"/>
+          </a:xfrm>
+          <a:prstGeom prst="rect">
+            <a:avLst/>
+          </a:prstGeom>
+          <a:noFill/>
+        </p:spPr>
+        <p:txBody>
+          <a:bodyPr wrap="square" lIns="0" rIns="0" tIns="0" bIns="0">
+            <a:spAutoFit/>
+          </a:bodyPr>
+          <a:lstStyle/>
+          <a:p>
+            <a:pPr>
+              <a:spcAft>
+                <a:spcPts val="1000"/>
+              </a:spcAft>
+              <a:defRPr sz="1800" b="0">
+                <a:solidFill>
+                  <a:srgbClr val="A6BDCF"/>
+                </a:solidFill>
+                <a:latin typeface="Aptos"/>
+              </a:defRPr>
+            </a:pPr>
+            <a:r>
+              <a:t>Posições ocupadas ÷ capacidade</a:t>
+            </a:r>
+          </a:p>
+        </p:txBody>
+      </p:sp>
+      <p:sp>
+        <p:nvSpPr>
+          <p:cNvPr id="18" name="TextBox 17"/>
+          <p:cNvSpPr txBox="1"/>
+          <p:nvPr/>
+        </p:nvSpPr>
+        <p:spPr>
+          <a:xfrm>
+            <a:off x="11430000" y="5166359"/>
+            <a:ext cx="2240280" cy="411480"/>
+          </a:xfrm>
+          <a:prstGeom prst="rect">
+            <a:avLst/>
+          </a:prstGeom>
+          <a:noFill/>
+        </p:spPr>
+        <p:txBody>
+          <a:bodyPr wrap="square" lIns="0" rIns="0" tIns="0" bIns="0">
+            <a:spAutoFit/>
+          </a:bodyPr>
+          <a:lstStyle/>
+          <a:p>
+            <a:pPr>
+              <a:spcAft>
+                <a:spcPts val="1000"/>
+              </a:spcAft>
+              <a:defRPr sz="1700" b="1">
+                <a:solidFill>
+                  <a:srgbClr val="43CEEF"/>
+                </a:solidFill>
+                <a:latin typeface="Aptos"/>
+              </a:defRPr>
+            </a:pPr>
+            <a:r>
+              <a:t>Evitar saturação</a:t>
+            </a:r>
+          </a:p>
+        </p:txBody>
+      </p:sp>
+      <p:sp>
+        <p:nvSpPr>
+          <p:cNvPr id="19" name="Rounded Rectangle 18"/>
+          <p:cNvSpPr/>
+          <p:nvPr/>
+        </p:nvSpPr>
+        <p:spPr>
+          <a:xfrm>
+            <a:off x="685800" y="5833872"/>
+            <a:ext cx="13258800" cy="685800"/>
+          </a:xfrm>
+          <a:prstGeom prst="roundRect">
+            <a:avLst>
+              <a:gd name="adj" fmla="val 8000"/>
+            </a:avLst>
+          </a:prstGeom>
+          <a:solidFill>
+            <a:srgbClr val="10314B"/>
+          </a:solidFill>
+          <a:ln>
+            <a:noFill/>
+          </a:ln>
+        </p:spPr>
+        <p:style>
+          <a:lnRef idx="1">
+            <a:schemeClr val="accent1"/>
+          </a:lnRef>
+          <a:fillRef idx="3">
+            <a:schemeClr val="accent1"/>
+          </a:fillRef>
+          <a:effectRef idx="2">
+            <a:schemeClr val="accent1"/>
+          </a:effectRef>
+          <a:fontRef idx="minor">
+            <a:schemeClr val="lt1"/>
+          </a:fontRef>
+        </p:style>
+        <p:txBody>
+          <a:bodyPr rtlCol="0" anchor="ctr"/>
+          <a:lstStyle/>
+          <a:p>
+            <a:pPr algn="ctr"/>
+          </a:p>
+        </p:txBody>
+      </p:sp>
+      <p:sp>
+        <p:nvSpPr>
+          <p:cNvPr id="20" name="TextBox 19"/>
+          <p:cNvSpPr txBox="1"/>
+          <p:nvPr/>
+        </p:nvSpPr>
+        <p:spPr>
+          <a:xfrm>
+            <a:off x="914400" y="5998464"/>
+            <a:ext cx="3291840" cy="411480"/>
+          </a:xfrm>
+          <a:prstGeom prst="rect">
+            <a:avLst/>
+          </a:prstGeom>
+          <a:noFill/>
+        </p:spPr>
+        <p:txBody>
+          <a:bodyPr wrap="square" lIns="0" rIns="0" tIns="0" bIns="0">
+            <a:spAutoFit/>
+          </a:bodyPr>
+          <a:lstStyle/>
+          <a:p>
+            <a:pPr>
+              <a:spcAft>
+                <a:spcPts val="1000"/>
+              </a:spcAft>
+              <a:defRPr sz="1900" b="1">
+                <a:solidFill>
+                  <a:srgbClr val="FFFFFF"/>
+                </a:solidFill>
+                <a:latin typeface="Aptos"/>
+              </a:defRPr>
+            </a:pPr>
+            <a:r>
+              <a:t>Críticas ativas</a:t>
+            </a:r>
+          </a:p>
+        </p:txBody>
+      </p:sp>
+      <p:sp>
+        <p:nvSpPr>
+          <p:cNvPr id="21" name="TextBox 20"/>
+          <p:cNvSpPr txBox="1"/>
+          <p:nvPr/>
+        </p:nvSpPr>
+        <p:spPr>
+          <a:xfrm>
+            <a:off x="4526280" y="5998464"/>
+            <a:ext cx="6400800" cy="411480"/>
+          </a:xfrm>
+          <a:prstGeom prst="rect">
+            <a:avLst/>
+          </a:prstGeom>
+          <a:noFill/>
+        </p:spPr>
+        <p:txBody>
+          <a:bodyPr wrap="square" lIns="0" rIns="0" tIns="0" bIns="0">
+            <a:spAutoFit/>
+          </a:bodyPr>
+          <a:lstStyle/>
+          <a:p>
+            <a:pPr>
+              <a:spcAft>
+                <a:spcPts val="1000"/>
+              </a:spcAft>
+              <a:defRPr sz="1800" b="0">
+                <a:solidFill>
+                  <a:srgbClr val="A6BDCF"/>
+                </a:solidFill>
+                <a:latin typeface="Aptos"/>
+              </a:defRPr>
+            </a:pPr>
+            <a:r>
+              <a:t>Quantidade com margem negativa</a:t>
+            </a:r>
+          </a:p>
+        </p:txBody>
+      </p:sp>
+      <p:sp>
+        <p:nvSpPr>
+          <p:cNvPr id="22" name="TextBox 21"/>
+          <p:cNvSpPr txBox="1"/>
+          <p:nvPr/>
+        </p:nvSpPr>
+        <p:spPr>
+          <a:xfrm>
+            <a:off x="11430000" y="5998464"/>
+            <a:ext cx="2240280" cy="411480"/>
+          </a:xfrm>
+          <a:prstGeom prst="rect">
+            <a:avLst/>
+          </a:prstGeom>
+          <a:noFill/>
+        </p:spPr>
+        <p:txBody>
+          <a:bodyPr wrap="square" lIns="0" rIns="0" tIns="0" bIns="0">
+            <a:spAutoFit/>
+          </a:bodyPr>
+          <a:lstStyle/>
+          <a:p>
+            <a:pPr>
+              <a:spcAft>
+                <a:spcPts val="1000"/>
+              </a:spcAft>
+              <a:defRPr sz="1700" b="1">
+                <a:solidFill>
+                  <a:srgbClr val="43CEEF"/>
+                </a:solidFill>
+                <a:latin typeface="Aptos"/>
+              </a:defRPr>
+            </a:pPr>
+            <a:r>
+              <a:t>Reduzir pendências</a:t>
+            </a:r>
+          </a:p>
+        </p:txBody>
+      </p:sp>
+      <p:sp>
+        <p:nvSpPr>
+          <p:cNvPr id="23" name="TextBox 22"/>
+          <p:cNvSpPr txBox="1"/>
+          <p:nvPr/>
+        </p:nvSpPr>
+        <p:spPr>
+          <a:xfrm>
+            <a:off x="731520" y="6995160"/>
+            <a:ext cx="12801600" cy="411480"/>
+          </a:xfrm>
+          <a:prstGeom prst="rect">
+            <a:avLst/>
+          </a:prstGeom>
+          <a:noFill/>
+        </p:spPr>
+        <p:txBody>
+          <a:bodyPr wrap="square" lIns="0" rIns="0" tIns="0" bIns="0">
+            <a:spAutoFit/>
+          </a:bodyPr>
+          <a:lstStyle/>
+          <a:p>
+            <a:pPr>
+              <a:spcAft>
+                <a:spcPts val="1000"/>
+              </a:spcAft>
+              <a:defRPr sz="1600" b="0">
+                <a:solidFill>
+                  <a:srgbClr val="A6BDCF"/>
+                </a:solidFill>
+                <a:latin typeface="Aptos"/>
+              </a:defRPr>
+            </a:pPr>
+            <a:r>
+              <a:t>Metas a pactuar após a linha de base. Volume, destino, peso e turno devem ser considerados.</a:t>
+            </a:r>
+          </a:p>
+        </p:txBody>
+      </p:sp>
+      <p:sp>
+        <p:nvSpPr>
+          <p:cNvPr id="24" name="TextBox 23"/>
+          <p:cNvSpPr txBox="1"/>
+          <p:nvPr/>
+        </p:nvSpPr>
+        <p:spPr>
+          <a:xfrm>
+            <a:off x="13213080" y="7772400"/>
+            <a:ext cx="914400" cy="274320"/>
+          </a:xfrm>
+          <a:prstGeom prst="rect">
+            <a:avLst/>
+          </a:prstGeom>
+          <a:noFill/>
+        </p:spPr>
+        <p:txBody>
+          <a:bodyPr wrap="square" lIns="0" rIns="0" tIns="0" bIns="0">
+            <a:spAutoFit/>
+          </a:bodyPr>
+          <a:lstStyle/>
+          <a:p>
+            <a:pPr>
+              <a:spcAft>
+                <a:spcPts val="1000"/>
+              </a:spcAft>
+              <a:defRPr sz="1100" b="0">
+                <a:solidFill>
+                  <a:srgbClr val="A6BDCF"/>
+                </a:solidFill>
+                <a:latin typeface="Aptos"/>
+              </a:defRPr>
+            </a:pPr>
+            <a:r>
+              <a:t>08 / 41</a:t>
+            </a:r>
+          </a:p>
+        </p:txBody>
+      </p:sp>
+      <p:sp>
+        <p:nvSpPr>
+          <p:cNvPr id="25" name="Rectangle 24"/>
+          <p:cNvSpPr/>
+          <p:nvPr/>
+        </p:nvSpPr>
+        <p:spPr>
+          <a:xfrm>
+            <a:off x="502920" y="8156448"/>
+            <a:ext cx="2658450" cy="41148"/>
+          </a:xfrm>
+          <a:prstGeom prst="rect">
+            <a:avLst/>
+          </a:prstGeom>
+          <a:solidFill>
+            <a:srgbClr val="43CEEF"/>
+          </a:solidFill>
+          <a:ln>
+            <a:noFill/>
+          </a:ln>
+        </p:spPr>
+        <p:style>
+          <a:lnRef idx="1">
+            <a:schemeClr val="accent1"/>
+          </a:lnRef>
+          <a:fillRef idx="3">
+            <a:schemeClr val="accent1"/>
+          </a:fillRef>
+          <a:effectRef idx="2">
+            <a:schemeClr val="accent1"/>
+          </a:effectRef>
+          <a:fontRef idx="minor">
+            <a:schemeClr val="lt1"/>
+          </a:fontRef>
+        </p:style>
+        <p:txBody>
+          <a:bodyPr rtlCol="0" anchor="ctr"/>
+          <a:lstStyle/>
+          <a:p>
+            <a:pPr algn="ctr"/>
+          </a:p>
+        </p:txBody>
+      </p:sp>
+    </p:spTree>
+  </p:cSld>
+  <p:clrMapOvr>
+    <a:masterClrMapping/>
+  </p:clrMapOvr>
+</p:sld>
+</file>
+
+<file path=ppt/slides/slide39.xml><?xml version="1.0" encoding="utf-8"?>
+<p:sld xmlns:a="http://schemas.openxmlformats.org/drawingml/2006/main" xmlns:p="http://schemas.openxmlformats.org/presentationml/2006/main" xmlns:r="http://schemas.openxmlformats.org/officeDocument/2006/relationships">
+  <p:cSld>
+    <p:bg>
+      <p:bgPr>
+        <a:solidFill>
+          <a:srgbClr val="071E35"/>
+        </a:solidFill>
+        <a:effectLst/>
+      </p:bgPr>
+    </p:bg>
+    <p:spTree>
+      <p:nvGrpSpPr>
+        <p:cNvPr id="1" name=""/>
+        <p:cNvGrpSpPr/>
+        <p:nvPr/>
+      </p:nvGrpSpPr>
+      <p:grpSpPr/>
+      <p:sp>
+        <p:nvSpPr>
+          <p:cNvPr id="2" name="TextBox 1"/>
+          <p:cNvSpPr txBox="1"/>
+          <p:nvPr/>
+        </p:nvSpPr>
+        <p:spPr>
+          <a:xfrm>
+            <a:off x="502920" y="256032"/>
+            <a:ext cx="4572000" cy="274320"/>
+          </a:xfrm>
+          <a:prstGeom prst="rect">
+            <a:avLst/>
+          </a:prstGeom>
+          <a:noFill/>
+        </p:spPr>
+        <p:txBody>
+          <a:bodyPr wrap="square" lIns="0" rIns="0" tIns="0" bIns="0">
+            <a:spAutoFit/>
+          </a:bodyPr>
+          <a:lstStyle/>
+          <a:p>
+            <a:pPr>
+              <a:spcAft>
+                <a:spcPts val="1000"/>
+              </a:spcAft>
+              <a:defRPr sz="1300" b="1">
+                <a:solidFill>
+                  <a:srgbClr val="43CEEF"/>
+                </a:solidFill>
+                <a:latin typeface="Aptos"/>
+              </a:defRPr>
+            </a:pPr>
+            <a:r>
+              <a:t>AZUL / SMARTCARGO</a:t>
+            </a:r>
+          </a:p>
+        </p:txBody>
+      </p:sp>
+      <p:sp>
+        <p:nvSpPr>
+          <p:cNvPr id="3" name="TextBox 2"/>
+          <p:cNvSpPr txBox="1"/>
+          <p:nvPr/>
+        </p:nvSpPr>
+        <p:spPr>
+          <a:xfrm>
+            <a:off x="10149840" y="256032"/>
+            <a:ext cx="3931920" cy="274320"/>
+          </a:xfrm>
+          <a:prstGeom prst="rect">
+            <a:avLst/>
+          </a:prstGeom>
+          <a:noFill/>
+        </p:spPr>
+        <p:txBody>
+          <a:bodyPr wrap="square" lIns="0" rIns="0" tIns="0" bIns="0">
+            <a:spAutoFit/>
+          </a:bodyPr>
+          <a:lstStyle/>
+          <a:p>
+            <a:pPr>
+              <a:spcAft>
+                <a:spcPts val="1000"/>
+              </a:spcAft>
+              <a:defRPr sz="1000" b="0">
+                <a:solidFill>
+                  <a:srgbClr val="A6BDCF"/>
+                </a:solidFill>
+                <a:latin typeface="Aptos"/>
+              </a:defRPr>
+            </a:pPr>
+            <a:r>
+              <a:t>FIAP  +  AZUL LOGÍSTICA  /  SPRINT 1</a:t>
+            </a:r>
+          </a:p>
+        </p:txBody>
+      </p:sp>
+      <p:sp>
+        <p:nvSpPr>
+          <p:cNvPr id="4" name="TextBox 3"/>
+          <p:cNvSpPr txBox="1"/>
+          <p:nvPr/>
+        </p:nvSpPr>
+        <p:spPr>
+          <a:xfrm>
+            <a:off x="640080" y="1143000"/>
+            <a:ext cx="13258800" cy="1005840"/>
+          </a:xfrm>
+          <a:prstGeom prst="rect">
+            <a:avLst/>
+          </a:prstGeom>
+          <a:noFill/>
+        </p:spPr>
+        <p:txBody>
+          <a:bodyPr wrap="square" lIns="0" rIns="0" tIns="0" bIns="0">
+            <a:spAutoFit/>
+          </a:bodyPr>
+          <a:lstStyle/>
+          <a:p>
+            <a:pPr>
+              <a:spcAft>
+                <a:spcPts val="1000"/>
+              </a:spcAft>
+              <a:defRPr sz="3400" b="1">
+                <a:solidFill>
+                  <a:srgbClr val="FFFFFF"/>
+                </a:solidFill>
+                <a:latin typeface="Aptos"/>
+              </a:defRPr>
+            </a:pPr>
+            <a:r>
+              <a:t>Viabilidade e retorno do investimento</a:t>
+            </a:r>
+          </a:p>
+        </p:txBody>
+      </p:sp>
+      <p:sp>
+        <p:nvSpPr>
+          <p:cNvPr id="5" name="TextBox 4"/>
+          <p:cNvSpPr txBox="1"/>
+          <p:nvPr/>
+        </p:nvSpPr>
+        <p:spPr>
+          <a:xfrm>
+            <a:off x="685800" y="2331720"/>
+            <a:ext cx="12984480" cy="822960"/>
+          </a:xfrm>
+          <a:prstGeom prst="rect">
+            <a:avLst/>
+          </a:prstGeom>
+          <a:noFill/>
+        </p:spPr>
+        <p:txBody>
+          <a:bodyPr wrap="square" lIns="0" rIns="0" tIns="0" bIns="0">
+            <a:spAutoFit/>
+          </a:bodyPr>
+          <a:lstStyle/>
+          <a:p>
+            <a:pPr>
+              <a:spcAft>
+                <a:spcPts val="1000"/>
+              </a:spcAft>
+              <a:defRPr sz="2100" b="0">
+                <a:solidFill>
+                  <a:srgbClr val="A6BDCF"/>
+                </a:solidFill>
+                <a:latin typeface="Aptos"/>
+              </a:defRPr>
+            </a:pPr>
+            <a:r>
+              <a:t>Modelo de eficiência interna: o valor deve superar implantação e manutenção.</a:t>
+            </a:r>
+          </a:p>
+        </p:txBody>
+      </p:sp>
+      <p:sp>
+        <p:nvSpPr>
+          <p:cNvPr id="6" name="TextBox 5"/>
+          <p:cNvSpPr txBox="1"/>
+          <p:nvPr/>
+        </p:nvSpPr>
+        <p:spPr>
+          <a:xfrm>
+            <a:off x="502920" y="7808975"/>
+            <a:ext cx="10972800" cy="228600"/>
+          </a:xfrm>
+          <a:prstGeom prst="rect">
+            <a:avLst/>
+          </a:prstGeom>
+          <a:noFill/>
+        </p:spPr>
+        <p:txBody>
+          <a:bodyPr wrap="square" lIns="0" rIns="0" tIns="0" bIns="0">
+            <a:spAutoFit/>
+          </a:bodyPr>
+          <a:lstStyle/>
+          <a:p>
+            <a:pPr>
+              <a:spcAft>
+                <a:spcPts val="1000"/>
+              </a:spcAft>
+              <a:defRPr sz="900" b="0">
+                <a:solidFill>
+                  <a:srgbClr val="A6BDCF"/>
+                </a:solidFill>
+                <a:latin typeface="Aptos"/>
+              </a:defRPr>
+            </a:pPr>
+            <a:r>
+              <a:t>PROTÓTIPO ACADÊMICO   /   HIPÓTESES DE NEGÓCIO A VALIDAR</a:t>
+            </a:r>
+          </a:p>
+        </p:txBody>
+      </p:sp>
+      <p:sp>
+        <p:nvSpPr>
+          <p:cNvPr id="7" name="Rounded Rectangle 6"/>
+          <p:cNvSpPr/>
+          <p:nvPr/>
+        </p:nvSpPr>
+        <p:spPr>
+          <a:xfrm>
+            <a:off x="685800" y="3474720"/>
+            <a:ext cx="6400800" cy="3474720"/>
+          </a:xfrm>
+          <a:prstGeom prst="roundRect">
+            <a:avLst>
+              <a:gd name="adj" fmla="val 8000"/>
+            </a:avLst>
+          </a:prstGeom>
+          <a:solidFill>
+            <a:srgbClr val="10314B"/>
+          </a:solidFill>
+          <a:ln>
+            <a:noFill/>
+          </a:ln>
+        </p:spPr>
+        <p:style>
+          <a:lnRef idx="1">
+            <a:schemeClr val="accent1"/>
+          </a:lnRef>
+          <a:fillRef idx="3">
+            <a:schemeClr val="accent1"/>
+          </a:fillRef>
+          <a:effectRef idx="2">
+            <a:schemeClr val="accent1"/>
+          </a:effectRef>
+          <a:fontRef idx="minor">
+            <a:schemeClr val="lt1"/>
+          </a:fontRef>
+        </p:style>
+        <p:txBody>
+          <a:bodyPr rtlCol="0" anchor="ctr"/>
+          <a:lstStyle/>
+          <a:p>
+            <a:pPr algn="ctr"/>
+          </a:p>
+        </p:txBody>
+      </p:sp>
+      <p:sp>
+        <p:nvSpPr>
+          <p:cNvPr id="8" name="TextBox 7"/>
+          <p:cNvSpPr txBox="1"/>
+          <p:nvPr/>
+        </p:nvSpPr>
+        <p:spPr>
+          <a:xfrm>
+            <a:off x="914400" y="3749039"/>
+            <a:ext cx="5943600" cy="457200"/>
+          </a:xfrm>
+          <a:prstGeom prst="rect">
+            <a:avLst/>
+          </a:prstGeom>
+          <a:noFill/>
+        </p:spPr>
+        <p:txBody>
+          <a:bodyPr wrap="square" lIns="0" rIns="0" tIns="0" bIns="0">
+            <a:spAutoFit/>
+          </a:bodyPr>
+          <a:lstStyle/>
+          <a:p>
+            <a:pPr>
+              <a:spcAft>
+                <a:spcPts val="1000"/>
+              </a:spcAft>
+              <a:defRPr sz="1400" b="1">
+                <a:solidFill>
+                  <a:srgbClr val="43CEEF"/>
+                </a:solidFill>
+                <a:latin typeface="Aptos"/>
+              </a:defRPr>
+            </a:pPr>
+            <a:r>
+              <a:t>VALOR A ESTIMAR</a:t>
+            </a:r>
+          </a:p>
+        </p:txBody>
+      </p:sp>
+      <p:sp>
+        <p:nvSpPr>
+          <p:cNvPr id="9" name="TextBox 8"/>
+          <p:cNvSpPr txBox="1"/>
+          <p:nvPr/>
+        </p:nvSpPr>
+        <p:spPr>
+          <a:xfrm>
+            <a:off x="914400" y="4434840"/>
+            <a:ext cx="5852160" cy="2011680"/>
+          </a:xfrm>
+          <a:prstGeom prst="rect">
+            <a:avLst/>
+          </a:prstGeom>
+          <a:noFill/>
+        </p:spPr>
+        <p:txBody>
+          <a:bodyPr wrap="square" lIns="0" rIns="0" tIns="0" bIns="0">
+            <a:spAutoFit/>
+          </a:bodyPr>
+          <a:lstStyle/>
+          <a:p>
+            <a:pPr>
+              <a:spcAft>
+                <a:spcPts val="1000"/>
+              </a:spcAft>
+              <a:defRPr sz="2500" b="1">
+                <a:solidFill>
+                  <a:srgbClr val="FFFFFF"/>
+                </a:solidFill>
+                <a:latin typeface="Aptos"/>
+              </a:defRPr>
+            </a:pPr>
+            <a:r>
+              <a:t>Horas poupadas × custo/hora</a:t>
+            </a:r>
+          </a:p>
+          <a:p>
+            <a:pPr>
+              <a:spcAft>
+                <a:spcPts val="1000"/>
+              </a:spcAft>
+              <a:defRPr sz="2500" b="1">
+                <a:solidFill>
+                  <a:srgbClr val="FFFFFF"/>
+                </a:solidFill>
+                <a:latin typeface="Aptos"/>
+              </a:defRPr>
+            </a:pPr>
+            <a:r>
+              <a:t>+ custos evitados comprovados</a:t>
+            </a:r>
+          </a:p>
+          <a:p>
+            <a:pPr>
+              <a:spcAft>
+                <a:spcPts val="1000"/>
+              </a:spcAft>
+              <a:defRPr sz="2500" b="1">
+                <a:solidFill>
+                  <a:srgbClr val="FFFFFF"/>
+                </a:solidFill>
+                <a:latin typeface="Aptos"/>
+              </a:defRPr>
+            </a:pPr>
+            <a:r>
+              <a:t>− custos operacionais adicionais</a:t>
+            </a:r>
+          </a:p>
+        </p:txBody>
+      </p:sp>
+      <p:sp>
+        <p:nvSpPr>
+          <p:cNvPr id="10" name="Rounded Rectangle 9"/>
+          <p:cNvSpPr/>
+          <p:nvPr/>
+        </p:nvSpPr>
+        <p:spPr>
+          <a:xfrm>
+            <a:off x="7406640" y="3474720"/>
+            <a:ext cx="6492240" cy="3474720"/>
+          </a:xfrm>
+          <a:prstGeom prst="roundRect">
+            <a:avLst>
+              <a:gd name="adj" fmla="val 8000"/>
+            </a:avLst>
+          </a:prstGeom>
+          <a:solidFill>
+            <a:srgbClr val="10314B"/>
+          </a:solidFill>
+          <a:ln>
+            <a:noFill/>
+          </a:ln>
+        </p:spPr>
+        <p:style>
+          <a:lnRef idx="1">
+            <a:schemeClr val="accent1"/>
+          </a:lnRef>
+          <a:fillRef idx="3">
+            <a:schemeClr val="accent1"/>
+          </a:fillRef>
+          <a:effectRef idx="2">
+            <a:schemeClr val="accent1"/>
+          </a:effectRef>
+          <a:fontRef idx="minor">
+            <a:schemeClr val="lt1"/>
+          </a:fontRef>
+        </p:style>
+        <p:txBody>
+          <a:bodyPr rtlCol="0" anchor="ctr"/>
+          <a:lstStyle/>
+          <a:p>
+            <a:pPr algn="ctr"/>
+          </a:p>
+        </p:txBody>
+      </p:sp>
+      <p:sp>
+        <p:nvSpPr>
+          <p:cNvPr id="11" name="TextBox 10"/>
+          <p:cNvSpPr txBox="1"/>
+          <p:nvPr/>
+        </p:nvSpPr>
+        <p:spPr>
+          <a:xfrm>
+            <a:off x="7635240" y="3749039"/>
+            <a:ext cx="5943600" cy="457200"/>
+          </a:xfrm>
+          <a:prstGeom prst="rect">
+            <a:avLst/>
+          </a:prstGeom>
+          <a:noFill/>
+        </p:spPr>
+        <p:txBody>
+          <a:bodyPr wrap="square" lIns="0" rIns="0" tIns="0" bIns="0">
+            <a:spAutoFit/>
+          </a:bodyPr>
+          <a:lstStyle/>
+          <a:p>
+            <a:pPr>
+              <a:spcAft>
+                <a:spcPts val="1000"/>
+              </a:spcAft>
+              <a:defRPr sz="1400" b="1">
+                <a:solidFill>
+                  <a:srgbClr val="43CEEF"/>
+                </a:solidFill>
+                <a:latin typeface="Aptos"/>
+              </a:defRPr>
+            </a:pPr>
+            <a:r>
+              <a:t>CUSTOS A LEVANTAR</a:t>
+            </a:r>
+          </a:p>
+        </p:txBody>
+      </p:sp>
+      <p:sp>
+        <p:nvSpPr>
+          <p:cNvPr id="12" name="TextBox 11"/>
+          <p:cNvSpPr txBox="1"/>
+          <p:nvPr/>
+        </p:nvSpPr>
+        <p:spPr>
+          <a:xfrm>
+            <a:off x="7635240" y="4434840"/>
+            <a:ext cx="5760720" cy="2057400"/>
+          </a:xfrm>
+          <a:prstGeom prst="rect">
+            <a:avLst/>
+          </a:prstGeom>
+          <a:noFill/>
+        </p:spPr>
+        <p:txBody>
+          <a:bodyPr wrap="square" lIns="0" rIns="0" tIns="0" bIns="0">
+            <a:spAutoFit/>
+          </a:bodyPr>
+          <a:lstStyle/>
+          <a:p>
+            <a:pPr>
+              <a:spcAft>
+                <a:spcPts val="1000"/>
+              </a:spcAft>
+              <a:defRPr sz="2500" b="1">
+                <a:solidFill>
+                  <a:srgbClr val="FFFFFF"/>
+                </a:solidFill>
+                <a:latin typeface="Aptos"/>
+              </a:defRPr>
+            </a:pPr>
+            <a:r>
+              <a:t>Desenvolvimento e integração</a:t>
+            </a:r>
+          </a:p>
+          <a:p>
+            <a:pPr>
+              <a:spcAft>
+                <a:spcPts val="1000"/>
+              </a:spcAft>
+              <a:defRPr sz="2500" b="1">
+                <a:solidFill>
+                  <a:srgbClr val="FFFFFF"/>
+                </a:solidFill>
+                <a:latin typeface="Aptos"/>
+              </a:defRPr>
+            </a:pPr>
+            <a:r>
+              <a:t>Infraestrutura e suporte</a:t>
+            </a:r>
+          </a:p>
+          <a:p>
+            <a:pPr>
+              <a:spcAft>
+                <a:spcPts val="1000"/>
+              </a:spcAft>
+              <a:defRPr sz="2500" b="1">
+                <a:solidFill>
+                  <a:srgbClr val="FFFFFF"/>
+                </a:solidFill>
+                <a:latin typeface="Aptos"/>
+              </a:defRPr>
+            </a:pPr>
+            <a:r>
+              <a:t>Treinamento e adoção</a:t>
+            </a:r>
+          </a:p>
+        </p:txBody>
+      </p:sp>
+      <p:sp>
+        <p:nvSpPr>
+          <p:cNvPr id="13" name="TextBox 12"/>
+          <p:cNvSpPr txBox="1"/>
+          <p:nvPr/>
+        </p:nvSpPr>
+        <p:spPr>
+          <a:xfrm>
+            <a:off x="731520" y="7223760"/>
+            <a:ext cx="12801600" cy="365760"/>
+          </a:xfrm>
+          <a:prstGeom prst="rect">
+            <a:avLst/>
+          </a:prstGeom>
+          <a:noFill/>
+        </p:spPr>
+        <p:txBody>
+          <a:bodyPr wrap="square" lIns="0" rIns="0" tIns="0" bIns="0">
+            <a:spAutoFit/>
+          </a:bodyPr>
+          <a:lstStyle/>
+          <a:p>
+            <a:pPr>
+              <a:spcAft>
+                <a:spcPts val="1000"/>
+              </a:spcAft>
+              <a:defRPr sz="1600" b="0">
+                <a:solidFill>
+                  <a:srgbClr val="A6BDCF"/>
+                </a:solidFill>
+                <a:latin typeface="Aptos"/>
+              </a:defRPr>
+            </a:pPr>
+            <a:r>
+              <a:t>ROI = (benefícios monetizados − custos totais) ÷ custos totais, no mesmo período.</a:t>
+            </a:r>
+          </a:p>
+        </p:txBody>
+      </p:sp>
+      <p:sp>
+        <p:nvSpPr>
+          <p:cNvPr id="14" name="TextBox 13"/>
+          <p:cNvSpPr txBox="1"/>
+          <p:nvPr/>
+        </p:nvSpPr>
+        <p:spPr>
+          <a:xfrm>
+            <a:off x="13213080" y="7772400"/>
+            <a:ext cx="914400" cy="274320"/>
+          </a:xfrm>
+          <a:prstGeom prst="rect">
+            <a:avLst/>
+          </a:prstGeom>
+          <a:noFill/>
+        </p:spPr>
+        <p:txBody>
+          <a:bodyPr wrap="square" lIns="0" rIns="0" tIns="0" bIns="0">
+            <a:spAutoFit/>
+          </a:bodyPr>
+          <a:lstStyle/>
+          <a:p>
+            <a:pPr>
+              <a:spcAft>
+                <a:spcPts val="1000"/>
+              </a:spcAft>
+              <a:defRPr sz="1100" b="0">
+                <a:solidFill>
+                  <a:srgbClr val="A6BDCF"/>
+                </a:solidFill>
+                <a:latin typeface="Aptos"/>
+              </a:defRPr>
+            </a:pPr>
+            <a:r>
+              <a:t>09 / 41</a:t>
+            </a:r>
+          </a:p>
+        </p:txBody>
+      </p:sp>
+      <p:sp>
+        <p:nvSpPr>
+          <p:cNvPr id="15" name="Rectangle 14"/>
+          <p:cNvSpPr/>
+          <p:nvPr/>
+        </p:nvSpPr>
+        <p:spPr>
+          <a:xfrm>
+            <a:off x="502920" y="8156448"/>
+            <a:ext cx="2990757" cy="41148"/>
+          </a:xfrm>
+          <a:prstGeom prst="rect">
+            <a:avLst/>
+          </a:prstGeom>
+          <a:solidFill>
+            <a:srgbClr val="43CEEF"/>
+          </a:solidFill>
+          <a:ln>
+            <a:noFill/>
+          </a:ln>
+        </p:spPr>
+        <p:style>
+          <a:lnRef idx="1">
+            <a:schemeClr val="accent1"/>
+          </a:lnRef>
+          <a:fillRef idx="3">
+            <a:schemeClr val="accent1"/>
+          </a:fillRef>
+          <a:effectRef idx="2">
+            <a:schemeClr val="accent1"/>
+          </a:effectRef>
+          <a:fontRef idx="minor">
+            <a:schemeClr val="lt1"/>
+          </a:fontRef>
+        </p:style>
+        <p:txBody>
+          <a:bodyPr rtlCol="0" anchor="ctr"/>
+          <a:lstStyle/>
+          <a:p>
+            <a:pPr algn="ctr"/>
           </a:p>
         </p:txBody>
       </p:sp>
@@ -43587,7 +49987,7 @@
               </a:defRPr>
             </a:pPr>
             <a:r>
-              <a:t>04 / 32</a:t>
+              <a:t>13 / 41</a:t>
             </a:r>
           </a:p>
         </p:txBody>
@@ -43601,7 +50001,7 @@
         <p:spPr>
           <a:xfrm>
             <a:off x="502920" y="8156448"/>
-            <a:ext cx="1703070" cy="41148"/>
+            <a:ext cx="4319982" cy="41148"/>
           </a:xfrm>
           <a:prstGeom prst="rect">
             <a:avLst/>
@@ -44904,6 +51304,1584 @@
             <a:r>
               <a:t>92% no prazo na base histórica</a:t>
             </a:r>
+          </a:p>
+        </p:txBody>
+      </p:sp>
+    </p:spTree>
+  </p:cSld>
+  <p:clrMapOvr>
+    <a:masterClrMapping/>
+  </p:clrMapOvr>
+</p:sld>
+</file>
+
+<file path=ppt/slides/slide40.xml><?xml version="1.0" encoding="utf-8"?>
+<p:sld xmlns:a="http://schemas.openxmlformats.org/drawingml/2006/main" xmlns:p="http://schemas.openxmlformats.org/presentationml/2006/main" xmlns:r="http://schemas.openxmlformats.org/officeDocument/2006/relationships">
+  <p:cSld>
+    <p:bg>
+      <p:bgPr>
+        <a:solidFill>
+          <a:srgbClr val="071E35"/>
+        </a:solidFill>
+        <a:effectLst/>
+      </p:bgPr>
+    </p:bg>
+    <p:spTree>
+      <p:nvGrpSpPr>
+        <p:cNvPr id="1" name=""/>
+        <p:cNvGrpSpPr/>
+        <p:nvPr/>
+      </p:nvGrpSpPr>
+      <p:grpSpPr/>
+      <p:sp>
+        <p:nvSpPr>
+          <p:cNvPr id="2" name="TextBox 1"/>
+          <p:cNvSpPr txBox="1"/>
+          <p:nvPr/>
+        </p:nvSpPr>
+        <p:spPr>
+          <a:xfrm>
+            <a:off x="502920" y="256032"/>
+            <a:ext cx="4572000" cy="274320"/>
+          </a:xfrm>
+          <a:prstGeom prst="rect">
+            <a:avLst/>
+          </a:prstGeom>
+          <a:noFill/>
+        </p:spPr>
+        <p:txBody>
+          <a:bodyPr wrap="square" lIns="0" rIns="0" tIns="0" bIns="0">
+            <a:spAutoFit/>
+          </a:bodyPr>
+          <a:lstStyle/>
+          <a:p>
+            <a:pPr>
+              <a:spcAft>
+                <a:spcPts val="1000"/>
+              </a:spcAft>
+              <a:defRPr sz="1300" b="1">
+                <a:solidFill>
+                  <a:srgbClr val="43CEEF"/>
+                </a:solidFill>
+                <a:latin typeface="Aptos"/>
+              </a:defRPr>
+            </a:pPr>
+            <a:r>
+              <a:t>AZUL / SMARTCARGO</a:t>
+            </a:r>
+          </a:p>
+        </p:txBody>
+      </p:sp>
+      <p:sp>
+        <p:nvSpPr>
+          <p:cNvPr id="3" name="TextBox 2"/>
+          <p:cNvSpPr txBox="1"/>
+          <p:nvPr/>
+        </p:nvSpPr>
+        <p:spPr>
+          <a:xfrm>
+            <a:off x="10149840" y="256032"/>
+            <a:ext cx="3931920" cy="274320"/>
+          </a:xfrm>
+          <a:prstGeom prst="rect">
+            <a:avLst/>
+          </a:prstGeom>
+          <a:noFill/>
+        </p:spPr>
+        <p:txBody>
+          <a:bodyPr wrap="square" lIns="0" rIns="0" tIns="0" bIns="0">
+            <a:spAutoFit/>
+          </a:bodyPr>
+          <a:lstStyle/>
+          <a:p>
+            <a:pPr>
+              <a:spcAft>
+                <a:spcPts val="1000"/>
+              </a:spcAft>
+              <a:defRPr sz="1000" b="0">
+                <a:solidFill>
+                  <a:srgbClr val="A6BDCF"/>
+                </a:solidFill>
+                <a:latin typeface="Aptos"/>
+              </a:defRPr>
+            </a:pPr>
+            <a:r>
+              <a:t>FIAP  +  AZUL LOGÍSTICA  /  SPRINT 1</a:t>
+            </a:r>
+          </a:p>
+        </p:txBody>
+      </p:sp>
+      <p:sp>
+        <p:nvSpPr>
+          <p:cNvPr id="4" name="TextBox 3"/>
+          <p:cNvSpPr txBox="1"/>
+          <p:nvPr/>
+        </p:nvSpPr>
+        <p:spPr>
+          <a:xfrm>
+            <a:off x="640080" y="1143000"/>
+            <a:ext cx="13258800" cy="1005840"/>
+          </a:xfrm>
+          <a:prstGeom prst="rect">
+            <a:avLst/>
+          </a:prstGeom>
+          <a:noFill/>
+        </p:spPr>
+        <p:txBody>
+          <a:bodyPr wrap="square" lIns="0" rIns="0" tIns="0" bIns="0">
+            <a:spAutoFit/>
+          </a:bodyPr>
+          <a:lstStyle/>
+          <a:p>
+            <a:pPr>
+              <a:spcAft>
+                <a:spcPts val="1000"/>
+              </a:spcAft>
+              <a:defRPr sz="3400" b="1">
+                <a:solidFill>
+                  <a:srgbClr val="FFFFFF"/>
+                </a:solidFill>
+                <a:latin typeface="Aptos"/>
+              </a:defRPr>
+            </a:pPr>
+            <a:r>
+              <a:t>Plano de validação do piloto</a:t>
+            </a:r>
+          </a:p>
+        </p:txBody>
+      </p:sp>
+      <p:sp>
+        <p:nvSpPr>
+          <p:cNvPr id="5" name="TextBox 4"/>
+          <p:cNvSpPr txBox="1"/>
+          <p:nvPr/>
+        </p:nvSpPr>
+        <p:spPr>
+          <a:xfrm>
+            <a:off x="685800" y="2331720"/>
+            <a:ext cx="12984480" cy="822960"/>
+          </a:xfrm>
+          <a:prstGeom prst="rect">
+            <a:avLst/>
+          </a:prstGeom>
+          <a:noFill/>
+        </p:spPr>
+        <p:txBody>
+          <a:bodyPr wrap="square" lIns="0" rIns="0" tIns="0" bIns="0">
+            <a:spAutoFit/>
+          </a:bodyPr>
+          <a:lstStyle/>
+          <a:p>
+            <a:pPr>
+              <a:spcAft>
+                <a:spcPts val="1000"/>
+              </a:spcAft>
+              <a:defRPr sz="2100" b="0">
+                <a:solidFill>
+                  <a:srgbClr val="A6BDCF"/>
+                </a:solidFill>
+                <a:latin typeface="Aptos"/>
+              </a:defRPr>
+            </a:pPr>
+            <a:r>
+              <a:t>Proposta de implantação gradual, condicionada ao alinhamento com a operação.</a:t>
+            </a:r>
+          </a:p>
+        </p:txBody>
+      </p:sp>
+      <p:sp>
+        <p:nvSpPr>
+          <p:cNvPr id="6" name="TextBox 5"/>
+          <p:cNvSpPr txBox="1"/>
+          <p:nvPr/>
+        </p:nvSpPr>
+        <p:spPr>
+          <a:xfrm>
+            <a:off x="502920" y="7808975"/>
+            <a:ext cx="10972800" cy="228600"/>
+          </a:xfrm>
+          <a:prstGeom prst="rect">
+            <a:avLst/>
+          </a:prstGeom>
+          <a:noFill/>
+        </p:spPr>
+        <p:txBody>
+          <a:bodyPr wrap="square" lIns="0" rIns="0" tIns="0" bIns="0">
+            <a:spAutoFit/>
+          </a:bodyPr>
+          <a:lstStyle/>
+          <a:p>
+            <a:pPr>
+              <a:spcAft>
+                <a:spcPts val="1000"/>
+              </a:spcAft>
+              <a:defRPr sz="900" b="0">
+                <a:solidFill>
+                  <a:srgbClr val="A6BDCF"/>
+                </a:solidFill>
+                <a:latin typeface="Aptos"/>
+              </a:defRPr>
+            </a:pPr>
+            <a:r>
+              <a:t>PROTÓTIPO ACADÊMICO   /   HIPÓTESES DE NEGÓCIO A VALIDAR</a:t>
+            </a:r>
+          </a:p>
+        </p:txBody>
+      </p:sp>
+      <p:sp>
+        <p:nvSpPr>
+          <p:cNvPr id="7" name="Rounded Rectangle 6"/>
+          <p:cNvSpPr/>
+          <p:nvPr/>
+        </p:nvSpPr>
+        <p:spPr>
+          <a:xfrm>
+            <a:off x="685800" y="3566160"/>
+            <a:ext cx="4251960" cy="3474720"/>
+          </a:xfrm>
+          <a:prstGeom prst="roundRect">
+            <a:avLst>
+              <a:gd name="adj" fmla="val 8000"/>
+            </a:avLst>
+          </a:prstGeom>
+          <a:solidFill>
+            <a:srgbClr val="10314B"/>
+          </a:solidFill>
+          <a:ln>
+            <a:noFill/>
+          </a:ln>
+        </p:spPr>
+        <p:style>
+          <a:lnRef idx="1">
+            <a:schemeClr val="accent1"/>
+          </a:lnRef>
+          <a:fillRef idx="3">
+            <a:schemeClr val="accent1"/>
+          </a:fillRef>
+          <a:effectRef idx="2">
+            <a:schemeClr val="accent1"/>
+          </a:effectRef>
+          <a:fontRef idx="minor">
+            <a:schemeClr val="lt1"/>
+          </a:fontRef>
+        </p:style>
+        <p:txBody>
+          <a:bodyPr rtlCol="0" anchor="ctr"/>
+          <a:lstStyle/>
+          <a:p>
+            <a:pPr algn="ctr"/>
+          </a:p>
+        </p:txBody>
+      </p:sp>
+      <p:sp>
+        <p:nvSpPr>
+          <p:cNvPr id="8" name="TextBox 7"/>
+          <p:cNvSpPr txBox="1"/>
+          <p:nvPr/>
+        </p:nvSpPr>
+        <p:spPr>
+          <a:xfrm>
+            <a:off x="914400" y="3794760"/>
+            <a:ext cx="914400" cy="502920"/>
+          </a:xfrm>
+          <a:prstGeom prst="rect">
+            <a:avLst/>
+          </a:prstGeom>
+          <a:noFill/>
+        </p:spPr>
+        <p:txBody>
+          <a:bodyPr wrap="square" lIns="0" rIns="0" tIns="0" bIns="0">
+            <a:spAutoFit/>
+          </a:bodyPr>
+          <a:lstStyle/>
+          <a:p>
+            <a:pPr>
+              <a:spcAft>
+                <a:spcPts val="1000"/>
+              </a:spcAft>
+              <a:defRPr sz="2900" b="1">
+                <a:solidFill>
+                  <a:srgbClr val="43CEEF"/>
+                </a:solidFill>
+                <a:latin typeface="Aptos"/>
+              </a:defRPr>
+            </a:pPr>
+            <a:r>
+              <a:t>01</a:t>
+            </a:r>
+          </a:p>
+        </p:txBody>
+      </p:sp>
+      <p:sp>
+        <p:nvSpPr>
+          <p:cNvPr id="9" name="TextBox 8"/>
+          <p:cNvSpPr txBox="1"/>
+          <p:nvPr/>
+        </p:nvSpPr>
+        <p:spPr>
+          <a:xfrm>
+            <a:off x="914400" y="4572000"/>
+            <a:ext cx="3749039" cy="777240"/>
+          </a:xfrm>
+          <a:prstGeom prst="rect">
+            <a:avLst/>
+          </a:prstGeom>
+          <a:noFill/>
+        </p:spPr>
+        <p:txBody>
+          <a:bodyPr wrap="square" lIns="0" rIns="0" tIns="0" bIns="0">
+            <a:spAutoFit/>
+          </a:bodyPr>
+          <a:lstStyle/>
+          <a:p>
+            <a:pPr>
+              <a:spcAft>
+                <a:spcPts val="1000"/>
+              </a:spcAft>
+              <a:defRPr sz="2300" b="1">
+                <a:solidFill>
+                  <a:srgbClr val="FFFFFF"/>
+                </a:solidFill>
+                <a:latin typeface="Aptos"/>
+              </a:defRPr>
+            </a:pPr>
+            <a:r>
+              <a:t>Diagnosticar</a:t>
+            </a:r>
+          </a:p>
+        </p:txBody>
+      </p:sp>
+      <p:sp>
+        <p:nvSpPr>
+          <p:cNvPr id="10" name="TextBox 9"/>
+          <p:cNvSpPr txBox="1"/>
+          <p:nvPr/>
+        </p:nvSpPr>
+        <p:spPr>
+          <a:xfrm>
+            <a:off x="914400" y="5577840"/>
+            <a:ext cx="3749039" cy="1234440"/>
+          </a:xfrm>
+          <a:prstGeom prst="rect">
+            <a:avLst/>
+          </a:prstGeom>
+          <a:noFill/>
+        </p:spPr>
+        <p:txBody>
+          <a:bodyPr wrap="square" lIns="0" rIns="0" tIns="0" bIns="0">
+            <a:spAutoFit/>
+          </a:bodyPr>
+          <a:lstStyle/>
+          <a:p>
+            <a:pPr>
+              <a:spcAft>
+                <a:spcPts val="1000"/>
+              </a:spcAft>
+              <a:defRPr sz="2000" b="0">
+                <a:solidFill>
+                  <a:srgbClr val="A6BDCF"/>
+                </a:solidFill>
+                <a:latin typeface="Aptos"/>
+              </a:defRPr>
+            </a:pPr>
+            <a:r>
+              <a:t>Observar a operação, ouvir usuários e medir a linha de base.</a:t>
+            </a:r>
+          </a:p>
+        </p:txBody>
+      </p:sp>
+      <p:sp>
+        <p:nvSpPr>
+          <p:cNvPr id="11" name="Rounded Rectangle 10"/>
+          <p:cNvSpPr/>
+          <p:nvPr/>
+        </p:nvSpPr>
+        <p:spPr>
+          <a:xfrm>
+            <a:off x="5257800" y="3566160"/>
+            <a:ext cx="4251960" cy="3474720"/>
+          </a:xfrm>
+          <a:prstGeom prst="roundRect">
+            <a:avLst>
+              <a:gd name="adj" fmla="val 8000"/>
+            </a:avLst>
+          </a:prstGeom>
+          <a:solidFill>
+            <a:srgbClr val="10314B"/>
+          </a:solidFill>
+          <a:ln>
+            <a:noFill/>
+          </a:ln>
+        </p:spPr>
+        <p:style>
+          <a:lnRef idx="1">
+            <a:schemeClr val="accent1"/>
+          </a:lnRef>
+          <a:fillRef idx="3">
+            <a:schemeClr val="accent1"/>
+          </a:fillRef>
+          <a:effectRef idx="2">
+            <a:schemeClr val="accent1"/>
+          </a:effectRef>
+          <a:fontRef idx="minor">
+            <a:schemeClr val="lt1"/>
+          </a:fontRef>
+        </p:style>
+        <p:txBody>
+          <a:bodyPr rtlCol="0" anchor="ctr"/>
+          <a:lstStyle/>
+          <a:p>
+            <a:pPr algn="ctr"/>
+          </a:p>
+        </p:txBody>
+      </p:sp>
+      <p:sp>
+        <p:nvSpPr>
+          <p:cNvPr id="12" name="TextBox 11"/>
+          <p:cNvSpPr txBox="1"/>
+          <p:nvPr/>
+        </p:nvSpPr>
+        <p:spPr>
+          <a:xfrm>
+            <a:off x="5486400" y="3794760"/>
+            <a:ext cx="914400" cy="502920"/>
+          </a:xfrm>
+          <a:prstGeom prst="rect">
+            <a:avLst/>
+          </a:prstGeom>
+          <a:noFill/>
+        </p:spPr>
+        <p:txBody>
+          <a:bodyPr wrap="square" lIns="0" rIns="0" tIns="0" bIns="0">
+            <a:spAutoFit/>
+          </a:bodyPr>
+          <a:lstStyle/>
+          <a:p>
+            <a:pPr>
+              <a:spcAft>
+                <a:spcPts val="1000"/>
+              </a:spcAft>
+              <a:defRPr sz="2900" b="1">
+                <a:solidFill>
+                  <a:srgbClr val="43CEEF"/>
+                </a:solidFill>
+                <a:latin typeface="Aptos"/>
+              </a:defRPr>
+            </a:pPr>
+            <a:r>
+              <a:t>02</a:t>
+            </a:r>
+          </a:p>
+        </p:txBody>
+      </p:sp>
+      <p:sp>
+        <p:nvSpPr>
+          <p:cNvPr id="13" name="TextBox 12"/>
+          <p:cNvSpPr txBox="1"/>
+          <p:nvPr/>
+        </p:nvSpPr>
+        <p:spPr>
+          <a:xfrm>
+            <a:off x="5486400" y="4572000"/>
+            <a:ext cx="3749039" cy="777240"/>
+          </a:xfrm>
+          <a:prstGeom prst="rect">
+            <a:avLst/>
+          </a:prstGeom>
+          <a:noFill/>
+        </p:spPr>
+        <p:txBody>
+          <a:bodyPr wrap="square" lIns="0" rIns="0" tIns="0" bIns="0">
+            <a:spAutoFit/>
+          </a:bodyPr>
+          <a:lstStyle/>
+          <a:p>
+            <a:pPr>
+              <a:spcAft>
+                <a:spcPts val="1000"/>
+              </a:spcAft>
+              <a:defRPr sz="2300" b="1">
+                <a:solidFill>
+                  <a:srgbClr val="FFFFFF"/>
+                </a:solidFill>
+                <a:latin typeface="Aptos"/>
+              </a:defRPr>
+            </a:pPr>
+            <a:r>
+              <a:t>Experimentar</a:t>
+            </a:r>
+          </a:p>
+        </p:txBody>
+      </p:sp>
+      <p:sp>
+        <p:nvSpPr>
+          <p:cNvPr id="14" name="TextBox 13"/>
+          <p:cNvSpPr txBox="1"/>
+          <p:nvPr/>
+        </p:nvSpPr>
+        <p:spPr>
+          <a:xfrm>
+            <a:off x="5486400" y="5577840"/>
+            <a:ext cx="3749039" cy="1234440"/>
+          </a:xfrm>
+          <a:prstGeom prst="rect">
+            <a:avLst/>
+          </a:prstGeom>
+          <a:noFill/>
+        </p:spPr>
+        <p:txBody>
+          <a:bodyPr wrap="square" lIns="0" rIns="0" tIns="0" bIns="0">
+            <a:spAutoFit/>
+          </a:bodyPr>
+          <a:lstStyle/>
+          <a:p>
+            <a:pPr>
+              <a:spcAft>
+                <a:spcPts val="1000"/>
+              </a:spcAft>
+              <a:defRPr sz="2000" b="0">
+                <a:solidFill>
+                  <a:srgbClr val="A6BDCF"/>
+                </a:solidFill>
+                <a:latin typeface="Aptos"/>
+              </a:defRPr>
+            </a:pPr>
+            <a:r>
+              <a:t>Testar a interface e executar um piloto em área ou turno delimitado.</a:t>
+            </a:r>
+          </a:p>
+        </p:txBody>
+      </p:sp>
+      <p:sp>
+        <p:nvSpPr>
+          <p:cNvPr id="15" name="Rounded Rectangle 14"/>
+          <p:cNvSpPr/>
+          <p:nvPr/>
+        </p:nvSpPr>
+        <p:spPr>
+          <a:xfrm>
+            <a:off x="9829800" y="3566160"/>
+            <a:ext cx="4251960" cy="3474720"/>
+          </a:xfrm>
+          <a:prstGeom prst="roundRect">
+            <a:avLst>
+              <a:gd name="adj" fmla="val 8000"/>
+            </a:avLst>
+          </a:prstGeom>
+          <a:solidFill>
+            <a:srgbClr val="10314B"/>
+          </a:solidFill>
+          <a:ln>
+            <a:noFill/>
+          </a:ln>
+        </p:spPr>
+        <p:style>
+          <a:lnRef idx="1">
+            <a:schemeClr val="accent1"/>
+          </a:lnRef>
+          <a:fillRef idx="3">
+            <a:schemeClr val="accent1"/>
+          </a:fillRef>
+          <a:effectRef idx="2">
+            <a:schemeClr val="accent1"/>
+          </a:effectRef>
+          <a:fontRef idx="minor">
+            <a:schemeClr val="lt1"/>
+          </a:fontRef>
+        </p:style>
+        <p:txBody>
+          <a:bodyPr rtlCol="0" anchor="ctr"/>
+          <a:lstStyle/>
+          <a:p>
+            <a:pPr algn="ctr"/>
+          </a:p>
+        </p:txBody>
+      </p:sp>
+      <p:sp>
+        <p:nvSpPr>
+          <p:cNvPr id="16" name="TextBox 15"/>
+          <p:cNvSpPr txBox="1"/>
+          <p:nvPr/>
+        </p:nvSpPr>
+        <p:spPr>
+          <a:xfrm>
+            <a:off x="10058400" y="3794760"/>
+            <a:ext cx="914400" cy="502920"/>
+          </a:xfrm>
+          <a:prstGeom prst="rect">
+            <a:avLst/>
+          </a:prstGeom>
+          <a:noFill/>
+        </p:spPr>
+        <p:txBody>
+          <a:bodyPr wrap="square" lIns="0" rIns="0" tIns="0" bIns="0">
+            <a:spAutoFit/>
+          </a:bodyPr>
+          <a:lstStyle/>
+          <a:p>
+            <a:pPr>
+              <a:spcAft>
+                <a:spcPts val="1000"/>
+              </a:spcAft>
+              <a:defRPr sz="2900" b="1">
+                <a:solidFill>
+                  <a:srgbClr val="43CEEF"/>
+                </a:solidFill>
+                <a:latin typeface="Aptos"/>
+              </a:defRPr>
+            </a:pPr>
+            <a:r>
+              <a:t>03</a:t>
+            </a:r>
+          </a:p>
+        </p:txBody>
+      </p:sp>
+      <p:sp>
+        <p:nvSpPr>
+          <p:cNvPr id="17" name="TextBox 16"/>
+          <p:cNvSpPr txBox="1"/>
+          <p:nvPr/>
+        </p:nvSpPr>
+        <p:spPr>
+          <a:xfrm>
+            <a:off x="10058400" y="4572000"/>
+            <a:ext cx="3749039" cy="777240"/>
+          </a:xfrm>
+          <a:prstGeom prst="rect">
+            <a:avLst/>
+          </a:prstGeom>
+          <a:noFill/>
+        </p:spPr>
+        <p:txBody>
+          <a:bodyPr wrap="square" lIns="0" rIns="0" tIns="0" bIns="0">
+            <a:spAutoFit/>
+          </a:bodyPr>
+          <a:lstStyle/>
+          <a:p>
+            <a:pPr>
+              <a:spcAft>
+                <a:spcPts val="1000"/>
+              </a:spcAft>
+              <a:defRPr sz="2300" b="1">
+                <a:solidFill>
+                  <a:srgbClr val="FFFFFF"/>
+                </a:solidFill>
+                <a:latin typeface="Aptos"/>
+              </a:defRPr>
+            </a:pPr>
+            <a:r>
+              <a:t>Decidir</a:t>
+            </a:r>
+          </a:p>
+        </p:txBody>
+      </p:sp>
+      <p:sp>
+        <p:nvSpPr>
+          <p:cNvPr id="18" name="TextBox 17"/>
+          <p:cNvSpPr txBox="1"/>
+          <p:nvPr/>
+        </p:nvSpPr>
+        <p:spPr>
+          <a:xfrm>
+            <a:off x="10058400" y="5577840"/>
+            <a:ext cx="3749039" cy="1234440"/>
+          </a:xfrm>
+          <a:prstGeom prst="rect">
+            <a:avLst/>
+          </a:prstGeom>
+          <a:noFill/>
+        </p:spPr>
+        <p:txBody>
+          <a:bodyPr wrap="square" lIns="0" rIns="0" tIns="0" bIns="0">
+            <a:spAutoFit/>
+          </a:bodyPr>
+          <a:lstStyle/>
+          <a:p>
+            <a:pPr>
+              <a:spcAft>
+                <a:spcPts val="1000"/>
+              </a:spcAft>
+              <a:defRPr sz="2000" b="0">
+                <a:solidFill>
+                  <a:srgbClr val="A6BDCF"/>
+                </a:solidFill>
+                <a:latin typeface="Aptos"/>
+              </a:defRPr>
+            </a:pPr>
+            <a:r>
+              <a:t>Comparar indicadores e adoção; ajustar antes de ampliar o uso.</a:t>
+            </a:r>
+          </a:p>
+        </p:txBody>
+      </p:sp>
+      <p:sp>
+        <p:nvSpPr>
+          <p:cNvPr id="19" name="TextBox 18"/>
+          <p:cNvSpPr txBox="1"/>
+          <p:nvPr/>
+        </p:nvSpPr>
+        <p:spPr>
+          <a:xfrm>
+            <a:off x="13213080" y="7772400"/>
+            <a:ext cx="914400" cy="274320"/>
+          </a:xfrm>
+          <a:prstGeom prst="rect">
+            <a:avLst/>
+          </a:prstGeom>
+          <a:noFill/>
+        </p:spPr>
+        <p:txBody>
+          <a:bodyPr wrap="square" lIns="0" rIns="0" tIns="0" bIns="0">
+            <a:spAutoFit/>
+          </a:bodyPr>
+          <a:lstStyle/>
+          <a:p>
+            <a:pPr>
+              <a:spcAft>
+                <a:spcPts val="1000"/>
+              </a:spcAft>
+              <a:defRPr sz="1100" b="0">
+                <a:solidFill>
+                  <a:srgbClr val="A6BDCF"/>
+                </a:solidFill>
+                <a:latin typeface="Aptos"/>
+              </a:defRPr>
+            </a:pPr>
+            <a:r>
+              <a:t>10 / 41</a:t>
+            </a:r>
+          </a:p>
+        </p:txBody>
+      </p:sp>
+      <p:sp>
+        <p:nvSpPr>
+          <p:cNvPr id="20" name="Rectangle 19"/>
+          <p:cNvSpPr/>
+          <p:nvPr/>
+        </p:nvSpPr>
+        <p:spPr>
+          <a:xfrm>
+            <a:off x="502920" y="8156448"/>
+            <a:ext cx="3323063" cy="41148"/>
+          </a:xfrm>
+          <a:prstGeom prst="rect">
+            <a:avLst/>
+          </a:prstGeom>
+          <a:solidFill>
+            <a:srgbClr val="43CEEF"/>
+          </a:solidFill>
+          <a:ln>
+            <a:noFill/>
+          </a:ln>
+        </p:spPr>
+        <p:style>
+          <a:lnRef idx="1">
+            <a:schemeClr val="accent1"/>
+          </a:lnRef>
+          <a:fillRef idx="3">
+            <a:schemeClr val="accent1"/>
+          </a:fillRef>
+          <a:effectRef idx="2">
+            <a:schemeClr val="accent1"/>
+          </a:effectRef>
+          <a:fontRef idx="minor">
+            <a:schemeClr val="lt1"/>
+          </a:fontRef>
+        </p:style>
+        <p:txBody>
+          <a:bodyPr rtlCol="0" anchor="ctr"/>
+          <a:lstStyle/>
+          <a:p>
+            <a:pPr algn="ctr"/>
+          </a:p>
+        </p:txBody>
+      </p:sp>
+    </p:spTree>
+  </p:cSld>
+  <p:clrMapOvr>
+    <a:masterClrMapping/>
+  </p:clrMapOvr>
+</p:sld>
+</file>
+
+<file path=ppt/slides/slide41.xml><?xml version="1.0" encoding="utf-8"?>
+<p:sld xmlns:a="http://schemas.openxmlformats.org/drawingml/2006/main" xmlns:p="http://schemas.openxmlformats.org/presentationml/2006/main" xmlns:r="http://schemas.openxmlformats.org/officeDocument/2006/relationships">
+  <p:cSld>
+    <p:bg>
+      <p:bgPr>
+        <a:solidFill>
+          <a:srgbClr val="071E35"/>
+        </a:solidFill>
+        <a:effectLst/>
+      </p:bgPr>
+    </p:bg>
+    <p:spTree>
+      <p:nvGrpSpPr>
+        <p:cNvPr id="1" name=""/>
+        <p:cNvGrpSpPr/>
+        <p:nvPr/>
+      </p:nvGrpSpPr>
+      <p:grpSpPr/>
+      <p:sp>
+        <p:nvSpPr>
+          <p:cNvPr id="2" name="TextBox 1"/>
+          <p:cNvSpPr txBox="1"/>
+          <p:nvPr/>
+        </p:nvSpPr>
+        <p:spPr>
+          <a:xfrm>
+            <a:off x="502920" y="256032"/>
+            <a:ext cx="4572000" cy="274320"/>
+          </a:xfrm>
+          <a:prstGeom prst="rect">
+            <a:avLst/>
+          </a:prstGeom>
+          <a:noFill/>
+        </p:spPr>
+        <p:txBody>
+          <a:bodyPr wrap="square" lIns="0" rIns="0" tIns="0" bIns="0">
+            <a:spAutoFit/>
+          </a:bodyPr>
+          <a:lstStyle/>
+          <a:p>
+            <a:pPr>
+              <a:spcAft>
+                <a:spcPts val="1000"/>
+              </a:spcAft>
+              <a:defRPr sz="1300" b="1">
+                <a:solidFill>
+                  <a:srgbClr val="43CEEF"/>
+                </a:solidFill>
+                <a:latin typeface="Aptos"/>
+              </a:defRPr>
+            </a:pPr>
+            <a:r>
+              <a:t>AZUL / SMARTCARGO</a:t>
+            </a:r>
+          </a:p>
+        </p:txBody>
+      </p:sp>
+      <p:sp>
+        <p:nvSpPr>
+          <p:cNvPr id="3" name="TextBox 2"/>
+          <p:cNvSpPr txBox="1"/>
+          <p:nvPr/>
+        </p:nvSpPr>
+        <p:spPr>
+          <a:xfrm>
+            <a:off x="10149840" y="256032"/>
+            <a:ext cx="3931920" cy="274320"/>
+          </a:xfrm>
+          <a:prstGeom prst="rect">
+            <a:avLst/>
+          </a:prstGeom>
+          <a:noFill/>
+        </p:spPr>
+        <p:txBody>
+          <a:bodyPr wrap="square" lIns="0" rIns="0" tIns="0" bIns="0">
+            <a:spAutoFit/>
+          </a:bodyPr>
+          <a:lstStyle/>
+          <a:p>
+            <a:pPr>
+              <a:spcAft>
+                <a:spcPts val="1000"/>
+              </a:spcAft>
+              <a:defRPr sz="1000" b="0">
+                <a:solidFill>
+                  <a:srgbClr val="A6BDCF"/>
+                </a:solidFill>
+                <a:latin typeface="Aptos"/>
+              </a:defRPr>
+            </a:pPr>
+            <a:r>
+              <a:t>FIAP  +  AZUL LOGÍSTICA  /  SPRINT 1</a:t>
+            </a:r>
+          </a:p>
+        </p:txBody>
+      </p:sp>
+      <p:sp>
+        <p:nvSpPr>
+          <p:cNvPr id="4" name="TextBox 3"/>
+          <p:cNvSpPr txBox="1"/>
+          <p:nvPr/>
+        </p:nvSpPr>
+        <p:spPr>
+          <a:xfrm>
+            <a:off x="640080" y="1143000"/>
+            <a:ext cx="13258800" cy="1005840"/>
+          </a:xfrm>
+          <a:prstGeom prst="rect">
+            <a:avLst/>
+          </a:prstGeom>
+          <a:noFill/>
+        </p:spPr>
+        <p:txBody>
+          <a:bodyPr wrap="square" lIns="0" rIns="0" tIns="0" bIns="0">
+            <a:spAutoFit/>
+          </a:bodyPr>
+          <a:lstStyle/>
+          <a:p>
+            <a:pPr>
+              <a:spcAft>
+                <a:spcPts val="1000"/>
+              </a:spcAft>
+              <a:defRPr sz="3400" b="1">
+                <a:solidFill>
+                  <a:srgbClr val="FFFFFF"/>
+                </a:solidFill>
+                <a:latin typeface="Aptos"/>
+              </a:defRPr>
+            </a:pPr>
+            <a:r>
+              <a:t>MVP, dependências e limites</a:t>
+            </a:r>
+          </a:p>
+        </p:txBody>
+      </p:sp>
+      <p:sp>
+        <p:nvSpPr>
+          <p:cNvPr id="5" name="TextBox 4"/>
+          <p:cNvSpPr txBox="1"/>
+          <p:nvPr/>
+        </p:nvSpPr>
+        <p:spPr>
+          <a:xfrm>
+            <a:off x="685800" y="2331720"/>
+            <a:ext cx="12984480" cy="822960"/>
+          </a:xfrm>
+          <a:prstGeom prst="rect">
+            <a:avLst/>
+          </a:prstGeom>
+          <a:noFill/>
+        </p:spPr>
+        <p:txBody>
+          <a:bodyPr wrap="square" lIns="0" rIns="0" tIns="0" bIns="0">
+            <a:spAutoFit/>
+          </a:bodyPr>
+          <a:lstStyle/>
+          <a:p>
+            <a:pPr>
+              <a:spcAft>
+                <a:spcPts val="1000"/>
+              </a:spcAft>
+              <a:defRPr sz="2100" b="0">
+                <a:solidFill>
+                  <a:srgbClr val="A6BDCF"/>
+                </a:solidFill>
+                <a:latin typeface="Aptos"/>
+              </a:defRPr>
+            </a:pPr>
+            <a:r>
+              <a:t>Um escopo enxuto para testar valor antes de ampliar a solução.</a:t>
+            </a:r>
+          </a:p>
+        </p:txBody>
+      </p:sp>
+      <p:sp>
+        <p:nvSpPr>
+          <p:cNvPr id="6" name="TextBox 5"/>
+          <p:cNvSpPr txBox="1"/>
+          <p:nvPr/>
+        </p:nvSpPr>
+        <p:spPr>
+          <a:xfrm>
+            <a:off x="502920" y="7808975"/>
+            <a:ext cx="10972800" cy="228600"/>
+          </a:xfrm>
+          <a:prstGeom prst="rect">
+            <a:avLst/>
+          </a:prstGeom>
+          <a:noFill/>
+        </p:spPr>
+        <p:txBody>
+          <a:bodyPr wrap="square" lIns="0" rIns="0" tIns="0" bIns="0">
+            <a:spAutoFit/>
+          </a:bodyPr>
+          <a:lstStyle/>
+          <a:p>
+            <a:pPr>
+              <a:spcAft>
+                <a:spcPts val="1000"/>
+              </a:spcAft>
+              <a:defRPr sz="900" b="0">
+                <a:solidFill>
+                  <a:srgbClr val="A6BDCF"/>
+                </a:solidFill>
+                <a:latin typeface="Aptos"/>
+              </a:defRPr>
+            </a:pPr>
+            <a:r>
+              <a:t>PROTÓTIPO ACADÊMICO   /   HIPÓTESES DE NEGÓCIO A VALIDAR</a:t>
+            </a:r>
+          </a:p>
+        </p:txBody>
+      </p:sp>
+      <p:sp>
+        <p:nvSpPr>
+          <p:cNvPr id="7" name="Rounded Rectangle 6"/>
+          <p:cNvSpPr/>
+          <p:nvPr/>
+        </p:nvSpPr>
+        <p:spPr>
+          <a:xfrm>
+            <a:off x="685800" y="3566160"/>
+            <a:ext cx="4251960" cy="3474720"/>
+          </a:xfrm>
+          <a:prstGeom prst="roundRect">
+            <a:avLst>
+              <a:gd name="adj" fmla="val 8000"/>
+            </a:avLst>
+          </a:prstGeom>
+          <a:solidFill>
+            <a:srgbClr val="10314B"/>
+          </a:solidFill>
+          <a:ln>
+            <a:noFill/>
+          </a:ln>
+        </p:spPr>
+        <p:style>
+          <a:lnRef idx="1">
+            <a:schemeClr val="accent1"/>
+          </a:lnRef>
+          <a:fillRef idx="3">
+            <a:schemeClr val="accent1"/>
+          </a:fillRef>
+          <a:effectRef idx="2">
+            <a:schemeClr val="accent1"/>
+          </a:effectRef>
+          <a:fontRef idx="minor">
+            <a:schemeClr val="lt1"/>
+          </a:fontRef>
+        </p:style>
+        <p:txBody>
+          <a:bodyPr rtlCol="0" anchor="ctr"/>
+          <a:lstStyle/>
+          <a:p>
+            <a:pPr algn="ctr"/>
+          </a:p>
+        </p:txBody>
+      </p:sp>
+      <p:sp>
+        <p:nvSpPr>
+          <p:cNvPr id="8" name="TextBox 7"/>
+          <p:cNvSpPr txBox="1"/>
+          <p:nvPr/>
+        </p:nvSpPr>
+        <p:spPr>
+          <a:xfrm>
+            <a:off x="914400" y="3794760"/>
+            <a:ext cx="914400" cy="502920"/>
+          </a:xfrm>
+          <a:prstGeom prst="rect">
+            <a:avLst/>
+          </a:prstGeom>
+          <a:noFill/>
+        </p:spPr>
+        <p:txBody>
+          <a:bodyPr wrap="square" lIns="0" rIns="0" tIns="0" bIns="0">
+            <a:spAutoFit/>
+          </a:bodyPr>
+          <a:lstStyle/>
+          <a:p>
+            <a:pPr>
+              <a:spcAft>
+                <a:spcPts val="1000"/>
+              </a:spcAft>
+              <a:defRPr sz="2900" b="1">
+                <a:solidFill>
+                  <a:srgbClr val="43CEEF"/>
+                </a:solidFill>
+                <a:latin typeface="Aptos"/>
+              </a:defRPr>
+            </a:pPr>
+            <a:r>
+              <a:t>01</a:t>
+            </a:r>
+          </a:p>
+        </p:txBody>
+      </p:sp>
+      <p:sp>
+        <p:nvSpPr>
+          <p:cNvPr id="9" name="TextBox 8"/>
+          <p:cNvSpPr txBox="1"/>
+          <p:nvPr/>
+        </p:nvSpPr>
+        <p:spPr>
+          <a:xfrm>
+            <a:off x="914400" y="4572000"/>
+            <a:ext cx="3749039" cy="777240"/>
+          </a:xfrm>
+          <a:prstGeom prst="rect">
+            <a:avLst/>
+          </a:prstGeom>
+          <a:noFill/>
+        </p:spPr>
+        <p:txBody>
+          <a:bodyPr wrap="square" lIns="0" rIns="0" tIns="0" bIns="0">
+            <a:spAutoFit/>
+          </a:bodyPr>
+          <a:lstStyle/>
+          <a:p>
+            <a:pPr>
+              <a:spcAft>
+                <a:spcPts val="1000"/>
+              </a:spcAft>
+              <a:defRPr sz="2300" b="1">
+                <a:solidFill>
+                  <a:srgbClr val="FFFFFF"/>
+                </a:solidFill>
+                <a:latin typeface="Aptos"/>
+              </a:defRPr>
+            </a:pPr>
+            <a:r>
+              <a:t>MVP proposto</a:t>
+            </a:r>
+          </a:p>
+        </p:txBody>
+      </p:sp>
+      <p:sp>
+        <p:nvSpPr>
+          <p:cNvPr id="10" name="TextBox 9"/>
+          <p:cNvSpPr txBox="1"/>
+          <p:nvPr/>
+        </p:nvSpPr>
+        <p:spPr>
+          <a:xfrm>
+            <a:off x="914400" y="5577840"/>
+            <a:ext cx="3749039" cy="1234440"/>
+          </a:xfrm>
+          <a:prstGeom prst="rect">
+            <a:avLst/>
+          </a:prstGeom>
+          <a:noFill/>
+        </p:spPr>
+        <p:txBody>
+          <a:bodyPr wrap="square" lIns="0" rIns="0" tIns="0" bIns="0">
+            <a:spAutoFit/>
+          </a:bodyPr>
+          <a:lstStyle/>
+          <a:p>
+            <a:pPr>
+              <a:spcAft>
+                <a:spcPts val="1000"/>
+              </a:spcAft>
+              <a:defRPr sz="2000" b="0">
+                <a:solidFill>
+                  <a:srgbClr val="A6BDCF"/>
+                </a:solidFill>
+                <a:latin typeface="Aptos"/>
+              </a:defRPr>
+            </a:pPr>
+            <a:r>
+              <a:t>Cadastro, fila, simulação de capacidade, etapas e indicadores básicos.</a:t>
+            </a:r>
+          </a:p>
+        </p:txBody>
+      </p:sp>
+      <p:sp>
+        <p:nvSpPr>
+          <p:cNvPr id="11" name="Rounded Rectangle 10"/>
+          <p:cNvSpPr/>
+          <p:nvPr/>
+        </p:nvSpPr>
+        <p:spPr>
+          <a:xfrm>
+            <a:off x="5257800" y="3566160"/>
+            <a:ext cx="4251960" cy="3474720"/>
+          </a:xfrm>
+          <a:prstGeom prst="roundRect">
+            <a:avLst>
+              <a:gd name="adj" fmla="val 8000"/>
+            </a:avLst>
+          </a:prstGeom>
+          <a:solidFill>
+            <a:srgbClr val="10314B"/>
+          </a:solidFill>
+          <a:ln>
+            <a:noFill/>
+          </a:ln>
+        </p:spPr>
+        <p:style>
+          <a:lnRef idx="1">
+            <a:schemeClr val="accent1"/>
+          </a:lnRef>
+          <a:fillRef idx="3">
+            <a:schemeClr val="accent1"/>
+          </a:fillRef>
+          <a:effectRef idx="2">
+            <a:schemeClr val="accent1"/>
+          </a:effectRef>
+          <a:fontRef idx="minor">
+            <a:schemeClr val="lt1"/>
+          </a:fontRef>
+        </p:style>
+        <p:txBody>
+          <a:bodyPr rtlCol="0" anchor="ctr"/>
+          <a:lstStyle/>
+          <a:p>
+            <a:pPr algn="ctr"/>
+          </a:p>
+        </p:txBody>
+      </p:sp>
+      <p:sp>
+        <p:nvSpPr>
+          <p:cNvPr id="12" name="TextBox 11"/>
+          <p:cNvSpPr txBox="1"/>
+          <p:nvPr/>
+        </p:nvSpPr>
+        <p:spPr>
+          <a:xfrm>
+            <a:off x="5486400" y="3794760"/>
+            <a:ext cx="914400" cy="502920"/>
+          </a:xfrm>
+          <a:prstGeom prst="rect">
+            <a:avLst/>
+          </a:prstGeom>
+          <a:noFill/>
+        </p:spPr>
+        <p:txBody>
+          <a:bodyPr wrap="square" lIns="0" rIns="0" tIns="0" bIns="0">
+            <a:spAutoFit/>
+          </a:bodyPr>
+          <a:lstStyle/>
+          <a:p>
+            <a:pPr>
+              <a:spcAft>
+                <a:spcPts val="1000"/>
+              </a:spcAft>
+              <a:defRPr sz="2900" b="1">
+                <a:solidFill>
+                  <a:srgbClr val="43CEEF"/>
+                </a:solidFill>
+                <a:latin typeface="Aptos"/>
+              </a:defRPr>
+            </a:pPr>
+            <a:r>
+              <a:t>02</a:t>
+            </a:r>
+          </a:p>
+        </p:txBody>
+      </p:sp>
+      <p:sp>
+        <p:nvSpPr>
+          <p:cNvPr id="13" name="TextBox 12"/>
+          <p:cNvSpPr txBox="1"/>
+          <p:nvPr/>
+        </p:nvSpPr>
+        <p:spPr>
+          <a:xfrm>
+            <a:off x="5486400" y="4572000"/>
+            <a:ext cx="3749039" cy="777240"/>
+          </a:xfrm>
+          <a:prstGeom prst="rect">
+            <a:avLst/>
+          </a:prstGeom>
+          <a:noFill/>
+        </p:spPr>
+        <p:txBody>
+          <a:bodyPr wrap="square" lIns="0" rIns="0" tIns="0" bIns="0">
+            <a:spAutoFit/>
+          </a:bodyPr>
+          <a:lstStyle/>
+          <a:p>
+            <a:pPr>
+              <a:spcAft>
+                <a:spcPts val="1000"/>
+              </a:spcAft>
+              <a:defRPr sz="2300" b="1">
+                <a:solidFill>
+                  <a:srgbClr val="FFFFFF"/>
+                </a:solidFill>
+                <a:latin typeface="Aptos"/>
+              </a:defRPr>
+            </a:pPr>
+            <a:r>
+              <a:t>Dependências</a:t>
+            </a:r>
+          </a:p>
+        </p:txBody>
+      </p:sp>
+      <p:sp>
+        <p:nvSpPr>
+          <p:cNvPr id="14" name="TextBox 13"/>
+          <p:cNvSpPr txBox="1"/>
+          <p:nvPr/>
+        </p:nvSpPr>
+        <p:spPr>
+          <a:xfrm>
+            <a:off x="5486400" y="5577840"/>
+            <a:ext cx="3749039" cy="1234440"/>
+          </a:xfrm>
+          <a:prstGeom prst="rect">
+            <a:avLst/>
+          </a:prstGeom>
+          <a:noFill/>
+        </p:spPr>
+        <p:txBody>
+          <a:bodyPr wrap="square" lIns="0" rIns="0" tIns="0" bIns="0">
+            <a:spAutoFit/>
+          </a:bodyPr>
+          <a:lstStyle/>
+          <a:p>
+            <a:pPr>
+              <a:spcAft>
+                <a:spcPts val="1000"/>
+              </a:spcAft>
+              <a:defRPr sz="2000" b="0">
+                <a:solidFill>
+                  <a:srgbClr val="A6BDCF"/>
+                </a:solidFill>
+                <a:latin typeface="Aptos"/>
+              </a:defRPr>
+            </a:pPr>
+            <a:r>
+              <a:t>Estimativas confiáveis, capacidade atualizada e regras acordadas.</a:t>
+            </a:r>
+          </a:p>
+        </p:txBody>
+      </p:sp>
+      <p:sp>
+        <p:nvSpPr>
+          <p:cNvPr id="15" name="Rounded Rectangle 14"/>
+          <p:cNvSpPr/>
+          <p:nvPr/>
+        </p:nvSpPr>
+        <p:spPr>
+          <a:xfrm>
+            <a:off x="9829800" y="3566160"/>
+            <a:ext cx="4251960" cy="3474720"/>
+          </a:xfrm>
+          <a:prstGeom prst="roundRect">
+            <a:avLst>
+              <a:gd name="adj" fmla="val 8000"/>
+            </a:avLst>
+          </a:prstGeom>
+          <a:solidFill>
+            <a:srgbClr val="10314B"/>
+          </a:solidFill>
+          <a:ln>
+            <a:noFill/>
+          </a:ln>
+        </p:spPr>
+        <p:style>
+          <a:lnRef idx="1">
+            <a:schemeClr val="accent1"/>
+          </a:lnRef>
+          <a:fillRef idx="3">
+            <a:schemeClr val="accent1"/>
+          </a:fillRef>
+          <a:effectRef idx="2">
+            <a:schemeClr val="accent1"/>
+          </a:effectRef>
+          <a:fontRef idx="minor">
+            <a:schemeClr val="lt1"/>
+          </a:fontRef>
+        </p:style>
+        <p:txBody>
+          <a:bodyPr rtlCol="0" anchor="ctr"/>
+          <a:lstStyle/>
+          <a:p>
+            <a:pPr algn="ctr"/>
+          </a:p>
+        </p:txBody>
+      </p:sp>
+      <p:sp>
+        <p:nvSpPr>
+          <p:cNvPr id="16" name="TextBox 15"/>
+          <p:cNvSpPr txBox="1"/>
+          <p:nvPr/>
+        </p:nvSpPr>
+        <p:spPr>
+          <a:xfrm>
+            <a:off x="10058400" y="3794760"/>
+            <a:ext cx="914400" cy="502920"/>
+          </a:xfrm>
+          <a:prstGeom prst="rect">
+            <a:avLst/>
+          </a:prstGeom>
+          <a:noFill/>
+        </p:spPr>
+        <p:txBody>
+          <a:bodyPr wrap="square" lIns="0" rIns="0" tIns="0" bIns="0">
+            <a:spAutoFit/>
+          </a:bodyPr>
+          <a:lstStyle/>
+          <a:p>
+            <a:pPr>
+              <a:spcAft>
+                <a:spcPts val="1000"/>
+              </a:spcAft>
+              <a:defRPr sz="2900" b="1">
+                <a:solidFill>
+                  <a:srgbClr val="43CEEF"/>
+                </a:solidFill>
+                <a:latin typeface="Aptos"/>
+              </a:defRPr>
+            </a:pPr>
+            <a:r>
+              <a:t>03</a:t>
+            </a:r>
+          </a:p>
+        </p:txBody>
+      </p:sp>
+      <p:sp>
+        <p:nvSpPr>
+          <p:cNvPr id="17" name="TextBox 16"/>
+          <p:cNvSpPr txBox="1"/>
+          <p:nvPr/>
+        </p:nvSpPr>
+        <p:spPr>
+          <a:xfrm>
+            <a:off x="10058400" y="4572000"/>
+            <a:ext cx="3749039" cy="777240"/>
+          </a:xfrm>
+          <a:prstGeom prst="rect">
+            <a:avLst/>
+          </a:prstGeom>
+          <a:noFill/>
+        </p:spPr>
+        <p:txBody>
+          <a:bodyPr wrap="square" lIns="0" rIns="0" tIns="0" bIns="0">
+            <a:spAutoFit/>
+          </a:bodyPr>
+          <a:lstStyle/>
+          <a:p>
+            <a:pPr>
+              <a:spcAft>
+                <a:spcPts val="1000"/>
+              </a:spcAft>
+              <a:defRPr sz="2300" b="1">
+                <a:solidFill>
+                  <a:srgbClr val="FFFFFF"/>
+                </a:solidFill>
+                <a:latin typeface="Aptos"/>
+              </a:defRPr>
+            </a:pPr>
+            <a:r>
+              <a:t>Evolução condicionada</a:t>
+            </a:r>
+          </a:p>
+        </p:txBody>
+      </p:sp>
+      <p:sp>
+        <p:nvSpPr>
+          <p:cNvPr id="18" name="TextBox 17"/>
+          <p:cNvSpPr txBox="1"/>
+          <p:nvPr/>
+        </p:nvSpPr>
+        <p:spPr>
+          <a:xfrm>
+            <a:off x="10058400" y="5577840"/>
+            <a:ext cx="3749039" cy="1234440"/>
+          </a:xfrm>
+          <a:prstGeom prst="rect">
+            <a:avLst/>
+          </a:prstGeom>
+          <a:noFill/>
+        </p:spPr>
+        <p:txBody>
+          <a:bodyPr wrap="square" lIns="0" rIns="0" tIns="0" bIns="0">
+            <a:spAutoFit/>
+          </a:bodyPr>
+          <a:lstStyle/>
+          <a:p>
+            <a:pPr>
+              <a:spcAft>
+                <a:spcPts val="1000"/>
+              </a:spcAft>
+              <a:defRPr sz="2000" b="0">
+                <a:solidFill>
+                  <a:srgbClr val="A6BDCF"/>
+                </a:solidFill>
+                <a:latin typeface="Aptos"/>
+              </a:defRPr>
+            </a:pPr>
+            <a:r>
+              <a:t>Integrar dados e permissões após validar usabilidade e valor no piloto.</a:t>
+            </a:r>
+          </a:p>
+        </p:txBody>
+      </p:sp>
+      <p:sp>
+        <p:nvSpPr>
+          <p:cNvPr id="19" name="TextBox 18"/>
+          <p:cNvSpPr txBox="1"/>
+          <p:nvPr/>
+        </p:nvSpPr>
+        <p:spPr>
+          <a:xfrm>
+            <a:off x="13213080" y="7772400"/>
+            <a:ext cx="914400" cy="274320"/>
+          </a:xfrm>
+          <a:prstGeom prst="rect">
+            <a:avLst/>
+          </a:prstGeom>
+          <a:noFill/>
+        </p:spPr>
+        <p:txBody>
+          <a:bodyPr wrap="square" lIns="0" rIns="0" tIns="0" bIns="0">
+            <a:spAutoFit/>
+          </a:bodyPr>
+          <a:lstStyle/>
+          <a:p>
+            <a:pPr>
+              <a:spcAft>
+                <a:spcPts val="1000"/>
+              </a:spcAft>
+              <a:defRPr sz="1100" b="0">
+                <a:solidFill>
+                  <a:srgbClr val="A6BDCF"/>
+                </a:solidFill>
+                <a:latin typeface="Aptos"/>
+              </a:defRPr>
+            </a:pPr>
+            <a:r>
+              <a:t>11 / 41</a:t>
+            </a:r>
+          </a:p>
+        </p:txBody>
+      </p:sp>
+      <p:sp>
+        <p:nvSpPr>
+          <p:cNvPr id="20" name="Rectangle 19"/>
+          <p:cNvSpPr/>
+          <p:nvPr/>
+        </p:nvSpPr>
+        <p:spPr>
+          <a:xfrm>
+            <a:off x="502920" y="8156448"/>
+            <a:ext cx="3655369" cy="41148"/>
+          </a:xfrm>
+          <a:prstGeom prst="rect">
+            <a:avLst/>
+          </a:prstGeom>
+          <a:solidFill>
+            <a:srgbClr val="43CEEF"/>
+          </a:solidFill>
+          <a:ln>
+            <a:noFill/>
+          </a:ln>
+        </p:spPr>
+        <p:style>
+          <a:lnRef idx="1">
+            <a:schemeClr val="accent1"/>
+          </a:lnRef>
+          <a:fillRef idx="3">
+            <a:schemeClr val="accent1"/>
+          </a:fillRef>
+          <a:effectRef idx="2">
+            <a:schemeClr val="accent1"/>
+          </a:effectRef>
+          <a:fontRef idx="minor">
+            <a:schemeClr val="lt1"/>
+          </a:fontRef>
+        </p:style>
+        <p:txBody>
+          <a:bodyPr rtlCol="0" anchor="ctr"/>
+          <a:lstStyle/>
+          <a:p>
+            <a:pPr algn="ctr"/>
           </a:p>
         </p:txBody>
       </p:sp>
@@ -45127,7 +53105,7 @@
               </a:defRPr>
             </a:pPr>
             <a:r>
-              <a:t>05 / 32</a:t>
+              <a:t>14 / 41</a:t>
             </a:r>
           </a:p>
         </p:txBody>
@@ -45141,7 +53119,7 @@
         <p:spPr>
           <a:xfrm>
             <a:off x="502920" y="8156448"/>
-            <a:ext cx="2128837" cy="41148"/>
+            <a:ext cx="4652288" cy="41148"/>
           </a:xfrm>
           <a:prstGeom prst="rect">
             <a:avLst/>
@@ -46667,7 +54645,7 @@
               </a:defRPr>
             </a:pPr>
             <a:r>
-              <a:t>06 / 32</a:t>
+              <a:t>15 / 41</a:t>
             </a:r>
           </a:p>
         </p:txBody>
@@ -46681,7 +54659,7 @@
         <p:spPr>
           <a:xfrm>
             <a:off x="502920" y="8156448"/>
-            <a:ext cx="2554605" cy="41148"/>
+            <a:ext cx="4984595" cy="41148"/>
           </a:xfrm>
           <a:prstGeom prst="rect">
             <a:avLst/>
@@ -48207,7 +56185,7 @@
               </a:defRPr>
             </a:pPr>
             <a:r>
-              <a:t>07 / 32</a:t>
+              <a:t>16 / 41</a:t>
             </a:r>
           </a:p>
         </p:txBody>
@@ -48221,7 +56199,7 @@
         <p:spPr>
           <a:xfrm>
             <a:off x="502920" y="8156448"/>
-            <a:ext cx="2980372" cy="41148"/>
+            <a:ext cx="5316901" cy="41148"/>
           </a:xfrm>
           <a:prstGeom prst="rect">
             <a:avLst/>
@@ -49747,7 +57725,7 @@
               </a:defRPr>
             </a:pPr>
             <a:r>
-              <a:t>08 / 32</a:t>
+              <a:t>17 / 41</a:t>
             </a:r>
           </a:p>
         </p:txBody>
@@ -49761,7 +57739,7 @@
         <p:spPr>
           <a:xfrm>
             <a:off x="502920" y="8156448"/>
-            <a:ext cx="3406140" cy="41148"/>
+            <a:ext cx="5649207" cy="41148"/>
           </a:xfrm>
           <a:prstGeom prst="rect">
             <a:avLst/>
@@ -51287,7 +59265,7 @@
               </a:defRPr>
             </a:pPr>
             <a:r>
-              <a:t>09 / 32</a:t>
+              <a:t>18 / 41</a:t>
             </a:r>
           </a:p>
         </p:txBody>
@@ -51301,7 +59279,7 @@
         <p:spPr>
           <a:xfrm>
             <a:off x="502920" y="8156448"/>
-            <a:ext cx="3831907" cy="41148"/>
+            <a:ext cx="5981514" cy="41148"/>
           </a:xfrm>
           <a:prstGeom prst="rect">
             <a:avLst/>
